--- a/Reports_Presentations/CMP682-DorukTopcu-AlihanSagoz-Final-Project-Presentation.pptx
+++ b/Reports_Presentations/CMP682-DorukTopcu-AlihanSagoz-Final-Project-Presentation.pptx
@@ -5,29 +5,29 @@
     <p:sldMasterId id="2147483648" r:id="rId1"/>
   </p:sldMasterIdLst>
   <p:sldIdLst>
-    <p:sldId id="256" r:id="rId2"/>
-    <p:sldId id="257" r:id="rId3"/>
-    <p:sldId id="258" r:id="rId4"/>
-    <p:sldId id="259" r:id="rId5"/>
-    <p:sldId id="260" r:id="rId6"/>
-    <p:sldId id="261" r:id="rId7"/>
-    <p:sldId id="262" r:id="rId8"/>
-    <p:sldId id="263" r:id="rId9"/>
-    <p:sldId id="264" r:id="rId10"/>
-    <p:sldId id="265" r:id="rId11"/>
-    <p:sldId id="266" r:id="rId12"/>
-    <p:sldId id="267" r:id="rId13"/>
-    <p:sldId id="268" r:id="rId14"/>
-    <p:sldId id="269" r:id="rId15"/>
-    <p:sldId id="270" r:id="rId16"/>
-    <p:sldId id="271" r:id="rId17"/>
-    <p:sldId id="272" r:id="rId18"/>
-    <p:sldId id="273" r:id="rId19"/>
-    <p:sldId id="274" r:id="rId20"/>
-    <p:sldId id="275" r:id="rId21"/>
-    <p:sldId id="276" r:id="rId22"/>
+    <p:sldId id="256" r:id="rId7"/>
+    <p:sldId id="257" r:id="rId8"/>
+    <p:sldId id="258" r:id="rId9"/>
+    <p:sldId id="259" r:id="rId10"/>
+    <p:sldId id="260" r:id="rId11"/>
+    <p:sldId id="261" r:id="rId12"/>
+    <p:sldId id="262" r:id="rId13"/>
+    <p:sldId id="263" r:id="rId14"/>
+    <p:sldId id="264" r:id="rId15"/>
+    <p:sldId id="265" r:id="rId16"/>
+    <p:sldId id="266" r:id="rId17"/>
+    <p:sldId id="267" r:id="rId18"/>
+    <p:sldId id="268" r:id="rId19"/>
+    <p:sldId id="269" r:id="rId20"/>
+    <p:sldId id="270" r:id="rId21"/>
+    <p:sldId id="271" r:id="rId22"/>
+    <p:sldId id="272" r:id="rId23"/>
+    <p:sldId id="273" r:id="rId24"/>
+    <p:sldId id="274" r:id="rId25"/>
+    <p:sldId id="275" r:id="rId26"/>
+    <p:sldId id="276" r:id="rId27"/>
   </p:sldIdLst>
-  <p:sldSz cx="12192000" cy="6858000"/>
+  <p:sldSz cx="12191695" cy="6858000" type="screen4x3"/>
   <p:notesSz cx="6858000" cy="9144000"/>
   <p:defaultTextStyle>
     <a:defPPr>
@@ -124,39 +124,18 @@
       </a:defRPr>
     </a:lvl9pPr>
   </p:defaultTextStyle>
-  <p:extLst>
-    <p:ext uri="{EFAFB233-063F-42B5-8137-9DF3F51BA10A}">
-      <p15:sldGuideLst xmlns:p15="http://schemas.microsoft.com/office/powerpoint/2012/main">
-        <p15:guide id="1" orient="horz" pos="2160">
-          <p15:clr>
-            <a:srgbClr val="A4A3A4"/>
-          </p15:clr>
-        </p15:guide>
-        <p15:guide id="2" pos="2880">
-          <p15:clr>
-            <a:srgbClr val="A4A3A4"/>
-          </p15:clr>
-        </p15:guide>
-      </p15:sldGuideLst>
-    </p:ext>
-  </p:extLst>
 </p:presentation>
 </file>
 
 <file path=ppt/charts/chart1.xml><?xml version="1.0" encoding="utf-8"?>
-<c:chartSpace xmlns:c="http://schemas.openxmlformats.org/drawingml/2006/chart" xmlns:a="http://schemas.openxmlformats.org/drawingml/2006/main" xmlns:r="http://schemas.openxmlformats.org/officeDocument/2006/relationships" xmlns:c16r2="http://schemas.microsoft.com/office/drawing/2015/06/chart">
+<c:chartSpace xmlns:c="http://schemas.openxmlformats.org/drawingml/2006/chart" xmlns:a="http://schemas.openxmlformats.org/drawingml/2006/main" xmlns:r="http://schemas.openxmlformats.org/officeDocument/2006/relationships">
   <c:date1904 val="0"/>
-  <c:lang val="en-US"/>
-  <c:roundedCorners val="1"/>
-  <c:style val="2"/>
   <c:chart>
     <c:autoTitleDeleted val="1"/>
     <c:plotArea>
-      <c:layout/>
       <c:barChart>
         <c:barDir val="bar"/>
         <c:grouping val="clustered"/>
-        <c:varyColors val="1"/>
         <c:ser>
           <c:idx val="0"/>
           <c:order val="0"/>
@@ -181,45 +160,6 @@
               </a:solidFill>
             </a:ln>
           </c:spPr>
-          <c:invertIfNegative val="1"/>
-          <c:dLbls>
-            <c:numFmt formatCode="0.000" sourceLinked="0"/>
-            <c:spPr>
-              <a:noFill/>
-              <a:ln>
-                <a:noFill/>
-              </a:ln>
-              <a:effectLst/>
-            </c:spPr>
-            <c:txPr>
-              <a:bodyPr/>
-              <a:lstStyle/>
-              <a:p>
-                <a:pPr>
-                  <a:defRPr sz="1200">
-                    <a:solidFill>
-                      <a:srgbClr val="202020"/>
-                    </a:solidFill>
-                    <a:latin typeface="Calibri"/>
-                  </a:defRPr>
-                </a:pPr>
-                <a:endParaRPr lang="en-US"/>
-              </a:p>
-            </c:txPr>
-            <c:dLblPos val="outEnd"/>
-            <c:showLegendKey val="0"/>
-            <c:showVal val="1"/>
-            <c:showCatName val="0"/>
-            <c:showSerName val="0"/>
-            <c:showPercent val="0"/>
-            <c:showBubbleSize val="0"/>
-            <c:showLeaderLines val="0"/>
-            <c:extLst>
-              <c:ext xmlns:c15="http://schemas.microsoft.com/office/drawing/2012/chart" uri="{CE6537A1-D6FC-4f65-9D91-7224C49458BB}">
-                <c15:showLeaderLines val="0"/>
-              </c:ext>
-            </c:extLst>
-          </c:dLbls>
           <c:cat>
             <c:strRef>
               <c:f>Sheet1!$A$2:$A$8</c:f>
@@ -256,50 +196,46 @@
                 <c:formatCode>General</c:formatCode>
                 <c:ptCount val="7"/>
                 <c:pt idx="0">
-                  <c:v>0.65979097452510194</c:v>
+                  <c:v>0.6597909745251019</c:v>
                 </c:pt>
                 <c:pt idx="1">
-                  <c:v>0.70032322934386282</c:v>
+                  <c:v>0.7003232293438628</c:v>
                 </c:pt>
                 <c:pt idx="2">
-                  <c:v>0.70219901594954903</c:v>
+                  <c:v>0.702199015949549</c:v>
                 </c:pt>
                 <c:pt idx="3">
-                  <c:v>0.71820849606046844</c:v>
+                  <c:v>0.7182084960604684</c:v>
                 </c:pt>
                 <c:pt idx="4">
-                  <c:v>0.75140900678597822</c:v>
+                  <c:v>0.7514090067859782</c:v>
                 </c:pt>
                 <c:pt idx="5">
-                  <c:v>0.75493355272700602</c:v>
+                  <c:v>0.754933552727006</c:v>
                 </c:pt>
                 <c:pt idx="6">
-                  <c:v>0.79503926169518224</c:v>
+                  <c:v>0.7950392616951822</c:v>
                 </c:pt>
               </c:numCache>
             </c:numRef>
           </c:val>
-          <c:extLst>
-            <c:ext xmlns:c14="http://schemas.microsoft.com/office/drawing/2007/8/2/chart" uri="{6F2FDCE9-48DA-4B69-8628-5D25D57E5C99}">
-              <c14:invertSolidFillFmt>
-                <c14:spPr xmlns:c14="http://schemas.microsoft.com/office/drawing/2007/8/2/chart">
-                  <a:solidFill>
-                    <a:srgbClr val="FFFFFF"/>
-                  </a:solidFill>
-                  <a:ln w="9525">
-                    <a:solidFill>
-                      <a:srgbClr val="202020"/>
-                    </a:solidFill>
-                  </a:ln>
-                </c14:spPr>
-              </c14:invertSolidFillFmt>
-            </c:ext>
-            <c:ext xmlns:c16="http://schemas.microsoft.com/office/drawing/2014/chart" uri="{C3380CC4-5D6E-409C-BE32-E72D297353CC}">
-              <c16:uniqueId val="{00000000-1AFF-4212-BF40-D78A32B98812}"/>
-            </c:ext>
-          </c:extLst>
         </c:ser>
         <c:dLbls>
+          <c:numFmt formatCode="0.000" sourceLinked="0"/>
+          <c:txPr>
+            <a:bodyPr/>
+            <a:lstStyle/>
+            <a:p>
+              <a:pPr>
+                <a:defRPr sz="1200">
+                  <a:solidFill>
+                    <a:srgbClr val="202020"/>
+                  </a:solidFill>
+                  <a:latin typeface="Calibri"/>
+                </a:defRPr>
+              </a:pPr>
+            </a:p>
+          </c:txPr>
           <c:dLblPos val="outEnd"/>
           <c:showLegendKey val="0"/>
           <c:showVal val="1"/>
@@ -307,8 +243,8 @@
           <c:showSerName val="0"/>
           <c:showPercent val="0"/>
           <c:showBubbleSize val="0"/>
+          <c:showLeaderLines val="1"/>
         </c:dLbls>
-        <c:gapWidth val="150"/>
         <c:axId val="-2068027336"/>
         <c:axId val="-2113994440"/>
       </c:barChart>
@@ -326,7 +262,6 @@
             </a:ln>
           </c:spPr>
         </c:majorGridlines>
-        <c:numFmt formatCode="General" sourceLinked="0"/>
         <c:majorTickMark val="out"/>
         <c:minorTickMark val="none"/>
         <c:tickLblPos val="nextTo"/>
@@ -349,7 +284,6 @@
                 <a:latin typeface="Calibri"/>
               </a:defRPr>
             </a:pPr>
-            <a:endParaRPr lang="en-US"/>
           </a:p>
         </c:txPr>
         <c:crossAx val="-2113994440"/>
@@ -362,14 +296,12 @@
       <c:valAx>
         <c:axId val="-2113994440"/>
         <c:scaling>
-          <c:orientation val="minMax"/>
           <c:max val="0.85"/>
           <c:min val="0.5"/>
         </c:scaling>
         <c:delete val="0"/>
         <c:axPos val="b"/>
         <c:majorGridlines/>
-        <c:numFmt formatCode="General" sourceLinked="1"/>
         <c:majorTickMark val="out"/>
         <c:minorTickMark val="none"/>
         <c:tickLblPos val="nextTo"/>
@@ -392,17 +324,13 @@
                 <a:latin typeface="Calibri"/>
               </a:defRPr>
             </a:pPr>
-            <a:endParaRPr lang="en-US"/>
           </a:p>
         </c:txPr>
         <c:crossAx val="-2068027336"/>
         <c:crosses val="autoZero"/>
-        <c:crossBetween val="between"/>
       </c:valAx>
     </c:plotArea>
-    <c:plotVisOnly val="1"/>
     <c:dispBlanksAs val="gap"/>
-    <c:showDLblsOverMax val="1"/>
   </c:chart>
   <c:txPr>
     <a:bodyPr/>
@@ -421,19 +349,14 @@
 </file>
 
 <file path=ppt/charts/chart2.xml><?xml version="1.0" encoding="utf-8"?>
-<c:chartSpace xmlns:c="http://schemas.openxmlformats.org/drawingml/2006/chart" xmlns:a="http://schemas.openxmlformats.org/drawingml/2006/main" xmlns:r="http://schemas.openxmlformats.org/officeDocument/2006/relationships" xmlns:c16r2="http://schemas.microsoft.com/office/drawing/2015/06/chart">
+<c:chartSpace xmlns:c="http://schemas.openxmlformats.org/drawingml/2006/chart" xmlns:a="http://schemas.openxmlformats.org/drawingml/2006/main" xmlns:r="http://schemas.openxmlformats.org/officeDocument/2006/relationships">
   <c:date1904 val="0"/>
-  <c:lang val="en-US"/>
-  <c:roundedCorners val="1"/>
-  <c:style val="2"/>
   <c:chart>
     <c:autoTitleDeleted val="1"/>
     <c:plotArea>
-      <c:layout/>
       <c:barChart>
         <c:barDir val="col"/>
         <c:grouping val="clustered"/>
-        <c:varyColors val="1"/>
         <c:ser>
           <c:idx val="0"/>
           <c:order val="0"/>
@@ -458,45 +381,6 @@
               </a:solidFill>
             </a:ln>
           </c:spPr>
-          <c:invertIfNegative val="1"/>
-          <c:dLbls>
-            <c:numFmt formatCode="0.000" sourceLinked="0"/>
-            <c:spPr>
-              <a:noFill/>
-              <a:ln>
-                <a:noFill/>
-              </a:ln>
-              <a:effectLst/>
-            </c:spPr>
-            <c:txPr>
-              <a:bodyPr/>
-              <a:lstStyle/>
-              <a:p>
-                <a:pPr>
-                  <a:defRPr sz="1200">
-                    <a:solidFill>
-                      <a:srgbClr val="202020"/>
-                    </a:solidFill>
-                    <a:latin typeface="Calibri"/>
-                  </a:defRPr>
-                </a:pPr>
-                <a:endParaRPr lang="en-US"/>
-              </a:p>
-            </c:txPr>
-            <c:dLblPos val="outEnd"/>
-            <c:showLegendKey val="0"/>
-            <c:showVal val="1"/>
-            <c:showCatName val="0"/>
-            <c:showSerName val="0"/>
-            <c:showPercent val="0"/>
-            <c:showBubbleSize val="0"/>
-            <c:showLeaderLines val="0"/>
-            <c:extLst>
-              <c:ext xmlns:c15="http://schemas.microsoft.com/office/drawing/2012/chart" uri="{CE6537A1-D6FC-4f65-9D91-7224C49458BB}">
-                <c15:showLeaderLines val="0"/>
-              </c:ext>
-            </c:extLst>
-          </c:dLbls>
           <c:cat>
             <c:strRef>
               <c:f>Sheet1!$A$2:$A$6</c:f>
@@ -527,44 +411,40 @@
                 <c:formatCode>General</c:formatCode>
                 <c:ptCount val="5"/>
                 <c:pt idx="0">
-                  <c:v>0.92900000000000005</c:v>
+                  <c:v>0.929</c:v>
                 </c:pt>
                 <c:pt idx="1">
-                  <c:v>0.89400000000000002</c:v>
+                  <c:v>0.894</c:v>
                 </c:pt>
                 <c:pt idx="2">
                   <c:v>0.622</c:v>
                 </c:pt>
                 <c:pt idx="3">
-                  <c:v>0.64600000000000002</c:v>
+                  <c:v>0.646</c:v>
                 </c:pt>
                 <c:pt idx="4">
-                  <c:v>0.90100000000000002</c:v>
+                  <c:v>0.901</c:v>
                 </c:pt>
               </c:numCache>
             </c:numRef>
           </c:val>
-          <c:extLst>
-            <c:ext xmlns:c14="http://schemas.microsoft.com/office/drawing/2007/8/2/chart" uri="{6F2FDCE9-48DA-4B69-8628-5D25D57E5C99}">
-              <c14:invertSolidFillFmt>
-                <c14:spPr xmlns:c14="http://schemas.microsoft.com/office/drawing/2007/8/2/chart">
-                  <a:solidFill>
-                    <a:srgbClr val="FFFFFF"/>
-                  </a:solidFill>
-                  <a:ln w="9525">
-                    <a:solidFill>
-                      <a:srgbClr val="202020"/>
-                    </a:solidFill>
-                  </a:ln>
-                </c14:spPr>
-              </c14:invertSolidFillFmt>
-            </c:ext>
-            <c:ext xmlns:c16="http://schemas.microsoft.com/office/drawing/2014/chart" uri="{C3380CC4-5D6E-409C-BE32-E72D297353CC}">
-              <c16:uniqueId val="{00000000-009C-4822-BA55-53EDC43CA196}"/>
-            </c:ext>
-          </c:extLst>
         </c:ser>
         <c:dLbls>
+          <c:numFmt formatCode="0.000" sourceLinked="0"/>
+          <c:txPr>
+            <a:bodyPr/>
+            <a:lstStyle/>
+            <a:p>
+              <a:pPr>
+                <a:defRPr sz="1200">
+                  <a:solidFill>
+                    <a:srgbClr val="202020"/>
+                  </a:solidFill>
+                  <a:latin typeface="Calibri"/>
+                </a:defRPr>
+              </a:pPr>
+            </a:p>
+          </c:txPr>
           <c:dLblPos val="outEnd"/>
           <c:showLegendKey val="0"/>
           <c:showVal val="1"/>
@@ -572,8 +452,8 @@
           <c:showSerName val="0"/>
           <c:showPercent val="0"/>
           <c:showBubbleSize val="0"/>
+          <c:showLeaderLines val="1"/>
         </c:dLbls>
-        <c:gapWidth val="150"/>
         <c:axId val="-2068027336"/>
         <c:axId val="-2113994440"/>
       </c:barChart>
@@ -591,7 +471,6 @@
             </a:ln>
           </c:spPr>
         </c:majorGridlines>
-        <c:numFmt formatCode="General" sourceLinked="0"/>
         <c:majorTickMark val="out"/>
         <c:minorTickMark val="none"/>
         <c:tickLblPos val="nextTo"/>
@@ -614,7 +493,6 @@
                 <a:latin typeface="Calibri"/>
               </a:defRPr>
             </a:pPr>
-            <a:endParaRPr lang="en-US"/>
           </a:p>
         </c:txPr>
         <c:crossAx val="-2113994440"/>
@@ -627,14 +505,12 @@
       <c:valAx>
         <c:axId val="-2113994440"/>
         <c:scaling>
-          <c:orientation val="minMax"/>
-          <c:max val="1"/>
+          <c:max val="1.0"/>
           <c:min val="0.5"/>
         </c:scaling>
         <c:delete val="0"/>
         <c:axPos val="l"/>
         <c:majorGridlines/>
-        <c:numFmt formatCode="General" sourceLinked="1"/>
         <c:majorTickMark val="out"/>
         <c:minorTickMark val="none"/>
         <c:tickLblPos val="nextTo"/>
@@ -657,17 +533,13 @@
                 <a:latin typeface="Calibri"/>
               </a:defRPr>
             </a:pPr>
-            <a:endParaRPr lang="en-US"/>
           </a:p>
         </c:txPr>
         <c:crossAx val="-2068027336"/>
         <c:crosses val="autoZero"/>
-        <c:crossBetween val="between"/>
       </c:valAx>
     </c:plotArea>
-    <c:plotVisOnly val="1"/>
     <c:dispBlanksAs val="gap"/>
-    <c:showDLblsOverMax val="1"/>
   </c:chart>
   <c:txPr>
     <a:bodyPr/>
@@ -686,19 +558,14 @@
 </file>
 
 <file path=ppt/charts/chart3.xml><?xml version="1.0" encoding="utf-8"?>
-<c:chartSpace xmlns:c="http://schemas.openxmlformats.org/drawingml/2006/chart" xmlns:a="http://schemas.openxmlformats.org/drawingml/2006/main" xmlns:r="http://schemas.openxmlformats.org/officeDocument/2006/relationships" xmlns:c16r2="http://schemas.microsoft.com/office/drawing/2015/06/chart">
+<c:chartSpace xmlns:c="http://schemas.openxmlformats.org/drawingml/2006/chart" xmlns:a="http://schemas.openxmlformats.org/drawingml/2006/main" xmlns:r="http://schemas.openxmlformats.org/officeDocument/2006/relationships">
   <c:date1904 val="0"/>
-  <c:lang val="en-US"/>
-  <c:roundedCorners val="1"/>
-  <c:style val="2"/>
   <c:chart>
     <c:autoTitleDeleted val="1"/>
     <c:plotArea>
-      <c:layout/>
       <c:barChart>
         <c:barDir val="col"/>
         <c:grouping val="clustered"/>
-        <c:varyColors val="1"/>
         <c:ser>
           <c:idx val="0"/>
           <c:order val="0"/>
@@ -723,45 +590,6 @@
               </a:solidFill>
             </a:ln>
           </c:spPr>
-          <c:invertIfNegative val="1"/>
-          <c:dLbls>
-            <c:numFmt formatCode="0.000" sourceLinked="0"/>
-            <c:spPr>
-              <a:noFill/>
-              <a:ln>
-                <a:noFill/>
-              </a:ln>
-              <a:effectLst/>
-            </c:spPr>
-            <c:txPr>
-              <a:bodyPr/>
-              <a:lstStyle/>
-              <a:p>
-                <a:pPr>
-                  <a:defRPr sz="1100">
-                    <a:solidFill>
-                      <a:srgbClr val="404040"/>
-                    </a:solidFill>
-                    <a:latin typeface="Calibri"/>
-                  </a:defRPr>
-                </a:pPr>
-                <a:endParaRPr lang="en-US"/>
-              </a:p>
-            </c:txPr>
-            <c:dLblPos val="outEnd"/>
-            <c:showLegendKey val="0"/>
-            <c:showVal val="1"/>
-            <c:showCatName val="0"/>
-            <c:showSerName val="0"/>
-            <c:showPercent val="0"/>
-            <c:showBubbleSize val="0"/>
-            <c:showLeaderLines val="0"/>
-            <c:extLst>
-              <c:ext xmlns:c15="http://schemas.microsoft.com/office/drawing/2012/chart" uri="{CE6537A1-D6FC-4f65-9D91-7224C49458BB}">
-                <c15:showLeaderLines val="0"/>
-              </c:ext>
-            </c:extLst>
-          </c:dLbls>
           <c:cat>
             <c:strRef>
               <c:f>Sheet1!$A$2:$A$5</c:f>
@@ -789,13 +617,13 @@
                 <c:formatCode>General</c:formatCode>
                 <c:ptCount val="4"/>
                 <c:pt idx="0">
-                  <c:v>0.98719999999999997</c:v>
+                  <c:v>0.9872</c:v>
                 </c:pt>
                 <c:pt idx="1">
-                  <c:v>0.94589999999999996</c:v>
+                  <c:v>0.9459</c:v>
                 </c:pt>
                 <c:pt idx="2">
-                  <c:v>0.79500000000000004</c:v>
+                  <c:v>0.795</c:v>
                 </c:pt>
                 <c:pt idx="3">
                   <c:v>0.7984</c:v>
@@ -803,25 +631,6 @@
               </c:numCache>
             </c:numRef>
           </c:val>
-          <c:extLst>
-            <c:ext xmlns:c14="http://schemas.microsoft.com/office/drawing/2007/8/2/chart" uri="{6F2FDCE9-48DA-4B69-8628-5D25D57E5C99}">
-              <c14:invertSolidFillFmt>
-                <c14:spPr xmlns:c14="http://schemas.microsoft.com/office/drawing/2007/8/2/chart">
-                  <a:solidFill>
-                    <a:srgbClr val="FFFFFF"/>
-                  </a:solidFill>
-                  <a:ln w="9525">
-                    <a:solidFill>
-                      <a:srgbClr val="202020"/>
-                    </a:solidFill>
-                  </a:ln>
-                </c14:spPr>
-              </c14:invertSolidFillFmt>
-            </c:ext>
-            <c:ext xmlns:c16="http://schemas.microsoft.com/office/drawing/2014/chart" uri="{C3380CC4-5D6E-409C-BE32-E72D297353CC}">
-              <c16:uniqueId val="{00000000-C89B-4ABD-85FA-F1DDA4919833}"/>
-            </c:ext>
-          </c:extLst>
         </c:ser>
         <c:ser>
           <c:idx val="1"/>
@@ -847,45 +656,6 @@
               </a:solidFill>
             </a:ln>
           </c:spPr>
-          <c:invertIfNegative val="1"/>
-          <c:dLbls>
-            <c:numFmt formatCode="0.000" sourceLinked="0"/>
-            <c:spPr>
-              <a:noFill/>
-              <a:ln>
-                <a:noFill/>
-              </a:ln>
-              <a:effectLst/>
-            </c:spPr>
-            <c:txPr>
-              <a:bodyPr/>
-              <a:lstStyle/>
-              <a:p>
-                <a:pPr>
-                  <a:defRPr sz="1100">
-                    <a:solidFill>
-                      <a:srgbClr val="404040"/>
-                    </a:solidFill>
-                    <a:latin typeface="Calibri"/>
-                  </a:defRPr>
-                </a:pPr>
-                <a:endParaRPr lang="en-US"/>
-              </a:p>
-            </c:txPr>
-            <c:dLblPos val="outEnd"/>
-            <c:showLegendKey val="0"/>
-            <c:showVal val="1"/>
-            <c:showCatName val="0"/>
-            <c:showSerName val="0"/>
-            <c:showPercent val="0"/>
-            <c:showBubbleSize val="0"/>
-            <c:showLeaderLines val="0"/>
-            <c:extLst>
-              <c:ext xmlns:c15="http://schemas.microsoft.com/office/drawing/2012/chart" uri="{CE6537A1-D6FC-4f65-9D91-7224C49458BB}">
-                <c15:showLeaderLines val="0"/>
-              </c:ext>
-            </c:extLst>
-          </c:dLbls>
           <c:cat>
             <c:strRef>
               <c:f>Sheet1!$A$2:$A$5</c:f>
@@ -913,41 +683,37 @@
                 <c:formatCode>General</c:formatCode>
                 <c:ptCount val="4"/>
                 <c:pt idx="0">
-                  <c:v>0.98629999999999995</c:v>
+                  <c:v>0.9863</c:v>
                 </c:pt>
                 <c:pt idx="1">
-                  <c:v>0.93859999999999999</c:v>
+                  <c:v>0.9386</c:v>
                 </c:pt>
                 <c:pt idx="2">
                   <c:v>0.79</c:v>
                 </c:pt>
                 <c:pt idx="3">
-                  <c:v>0.78669999999999995</c:v>
+                  <c:v>0.7867</c:v>
                 </c:pt>
               </c:numCache>
             </c:numRef>
           </c:val>
-          <c:extLst>
-            <c:ext xmlns:c14="http://schemas.microsoft.com/office/drawing/2007/8/2/chart" uri="{6F2FDCE9-48DA-4B69-8628-5D25D57E5C99}">
-              <c14:invertSolidFillFmt>
-                <c14:spPr xmlns:c14="http://schemas.microsoft.com/office/drawing/2007/8/2/chart">
-                  <a:solidFill>
-                    <a:srgbClr val="FFFFFF"/>
-                  </a:solidFill>
-                  <a:ln w="9525">
-                    <a:solidFill>
-                      <a:srgbClr val="202020"/>
-                    </a:solidFill>
-                  </a:ln>
-                </c14:spPr>
-              </c14:invertSolidFillFmt>
-            </c:ext>
-            <c:ext xmlns:c16="http://schemas.microsoft.com/office/drawing/2014/chart" uri="{C3380CC4-5D6E-409C-BE32-E72D297353CC}">
-              <c16:uniqueId val="{00000001-C89B-4ABD-85FA-F1DDA4919833}"/>
-            </c:ext>
-          </c:extLst>
         </c:ser>
         <c:dLbls>
+          <c:numFmt formatCode="0.000" sourceLinked="0"/>
+          <c:txPr>
+            <a:bodyPr/>
+            <a:lstStyle/>
+            <a:p>
+              <a:pPr>
+                <a:defRPr sz="1100">
+                  <a:solidFill>
+                    <a:srgbClr val="404040"/>
+                  </a:solidFill>
+                  <a:latin typeface="Calibri"/>
+                </a:defRPr>
+              </a:pPr>
+            </a:p>
+          </c:txPr>
           <c:dLblPos val="outEnd"/>
           <c:showLegendKey val="0"/>
           <c:showVal val="1"/>
@@ -955,8 +721,8 @@
           <c:showSerName val="0"/>
           <c:showPercent val="0"/>
           <c:showBubbleSize val="0"/>
+          <c:showLeaderLines val="1"/>
         </c:dLbls>
-        <c:gapWidth val="150"/>
         <c:axId val="-2068027336"/>
         <c:axId val="-2113994440"/>
       </c:barChart>
@@ -967,7 +733,6 @@
         </c:scaling>
         <c:delete val="0"/>
         <c:axPos val="b"/>
-        <c:numFmt formatCode="General" sourceLinked="0"/>
         <c:majorTickMark val="out"/>
         <c:minorTickMark val="none"/>
         <c:tickLblPos val="nextTo"/>
@@ -990,7 +755,6 @@
                 <a:latin typeface="Calibri"/>
               </a:defRPr>
             </a:pPr>
-            <a:endParaRPr lang="en-US"/>
           </a:p>
         </c:txPr>
         <c:crossAx val="-2113994440"/>
@@ -1003,14 +767,12 @@
       <c:valAx>
         <c:axId val="-2113994440"/>
         <c:scaling>
-          <c:orientation val="minMax"/>
           <c:max val="1.05"/>
           <c:min val="0.5"/>
         </c:scaling>
         <c:delete val="0"/>
         <c:axPos val="l"/>
         <c:majorGridlines/>
-        <c:numFmt formatCode="General" sourceLinked="1"/>
         <c:majorTickMark val="out"/>
         <c:minorTickMark val="none"/>
         <c:tickLblPos val="nextTo"/>
@@ -1033,12 +795,10 @@
                 <a:latin typeface="Calibri"/>
               </a:defRPr>
             </a:pPr>
-            <a:endParaRPr lang="en-US"/>
           </a:p>
         </c:txPr>
         <c:crossAx val="-2068027336"/>
         <c:crosses val="autoZero"/>
-        <c:crossBetween val="between"/>
       </c:valAx>
     </c:plotArea>
     <c:legend>
@@ -1056,13 +816,10 @@
               <a:latin typeface="Calibri"/>
             </a:defRPr>
           </a:pPr>
-          <a:endParaRPr lang="en-US"/>
         </a:p>
       </c:txPr>
     </c:legend>
-    <c:plotVisOnly val="1"/>
     <c:dispBlanksAs val="gap"/>
-    <c:showDLblsOverMax val="1"/>
   </c:chart>
   <c:txPr>
     <a:bodyPr/>
@@ -1118,9 +875,10 @@
           <a:lstStyle/>
           <a:p>
             <a:r>
-              <a:rPr lang="en-US"/>
+              <a:rPr lang="en-US" smtClean="0"/>
               <a:t>Click to edit Master title style</a:t>
             </a:r>
+            <a:endParaRPr lang="en-US"/>
           </a:p>
         </p:txBody>
       </p:sp>
@@ -1236,9 +994,10 @@
           </a:lstStyle>
           <a:p>
             <a:r>
-              <a:rPr lang="en-US"/>
+              <a:rPr lang="en-US" smtClean="0"/>
               <a:t>Click to edit Master subtitle style</a:t>
             </a:r>
+            <a:endParaRPr lang="en-US"/>
           </a:p>
         </p:txBody>
       </p:sp>
@@ -1259,7 +1018,7 @@
           <a:p>
             <a:fld id="{5BCAD085-E8A6-8845-BD4E-CB4CCA059FC4}" type="datetimeFigureOut">
               <a:rPr lang="en-US" smtClean="0"/>
-              <a:t>5/24/2026</a:t>
+              <a:t>1/27/13</a:t>
             </a:fld>
             <a:endParaRPr lang="en-US"/>
           </a:p>
@@ -1353,9 +1112,10 @@
           <a:lstStyle/>
           <a:p>
             <a:r>
-              <a:rPr lang="en-US"/>
+              <a:rPr lang="en-US" smtClean="0"/>
               <a:t>Click to edit Master title style</a:t>
             </a:r>
+            <a:endParaRPr lang="en-US"/>
           </a:p>
         </p:txBody>
       </p:sp>
@@ -1376,37 +1136,38 @@
           <a:p>
             <a:pPr lvl="0"/>
             <a:r>
-              <a:rPr lang="en-US"/>
+              <a:rPr lang="en-US" smtClean="0"/>
               <a:t>Click to edit Master text styles</a:t>
             </a:r>
           </a:p>
           <a:p>
             <a:pPr lvl="1"/>
             <a:r>
-              <a:rPr lang="en-US"/>
+              <a:rPr lang="en-US" smtClean="0"/>
               <a:t>Second level</a:t>
             </a:r>
           </a:p>
           <a:p>
             <a:pPr lvl="2"/>
             <a:r>
-              <a:rPr lang="en-US"/>
+              <a:rPr lang="en-US" smtClean="0"/>
               <a:t>Third level</a:t>
             </a:r>
           </a:p>
           <a:p>
             <a:pPr lvl="3"/>
             <a:r>
-              <a:rPr lang="en-US"/>
+              <a:rPr lang="en-US" smtClean="0"/>
               <a:t>Fourth level</a:t>
             </a:r>
           </a:p>
           <a:p>
             <a:pPr lvl="4"/>
             <a:r>
-              <a:rPr lang="en-US"/>
+              <a:rPr lang="en-US" smtClean="0"/>
               <a:t>Fifth level</a:t>
             </a:r>
+            <a:endParaRPr lang="en-US"/>
           </a:p>
         </p:txBody>
       </p:sp>
@@ -1427,7 +1188,7 @@
           <a:p>
             <a:fld id="{5BCAD085-E8A6-8845-BD4E-CB4CCA059FC4}" type="datetimeFigureOut">
               <a:rPr lang="en-US" smtClean="0"/>
-              <a:t>5/24/2026</a:t>
+              <a:t>1/27/13</a:t>
             </a:fld>
             <a:endParaRPr lang="en-US"/>
           </a:p>
@@ -1526,9 +1287,10 @@
           <a:lstStyle/>
           <a:p>
             <a:r>
-              <a:rPr lang="en-US"/>
+              <a:rPr lang="en-US" smtClean="0"/>
               <a:t>Click to edit Master title style</a:t>
             </a:r>
+            <a:endParaRPr lang="en-US"/>
           </a:p>
         </p:txBody>
       </p:sp>
@@ -1554,37 +1316,38 @@
           <a:p>
             <a:pPr lvl="0"/>
             <a:r>
-              <a:rPr lang="en-US"/>
+              <a:rPr lang="en-US" smtClean="0"/>
               <a:t>Click to edit Master text styles</a:t>
             </a:r>
           </a:p>
           <a:p>
             <a:pPr lvl="1"/>
             <a:r>
-              <a:rPr lang="en-US"/>
+              <a:rPr lang="en-US" smtClean="0"/>
               <a:t>Second level</a:t>
             </a:r>
           </a:p>
           <a:p>
             <a:pPr lvl="2"/>
             <a:r>
-              <a:rPr lang="en-US"/>
+              <a:rPr lang="en-US" smtClean="0"/>
               <a:t>Third level</a:t>
             </a:r>
           </a:p>
           <a:p>
             <a:pPr lvl="3"/>
             <a:r>
-              <a:rPr lang="en-US"/>
+              <a:rPr lang="en-US" smtClean="0"/>
               <a:t>Fourth level</a:t>
             </a:r>
           </a:p>
           <a:p>
             <a:pPr lvl="4"/>
             <a:r>
-              <a:rPr lang="en-US"/>
+              <a:rPr lang="en-US" smtClean="0"/>
               <a:t>Fifth level</a:t>
             </a:r>
+            <a:endParaRPr lang="en-US"/>
           </a:p>
         </p:txBody>
       </p:sp>
@@ -1605,7 +1368,7 @@
           <a:p>
             <a:fld id="{5BCAD085-E8A6-8845-BD4E-CB4CCA059FC4}" type="datetimeFigureOut">
               <a:rPr lang="en-US" smtClean="0"/>
-              <a:t>5/24/2026</a:t>
+              <a:t>1/27/13</a:t>
             </a:fld>
             <a:endParaRPr lang="en-US"/>
           </a:p>
@@ -1699,9 +1462,10 @@
           <a:lstStyle/>
           <a:p>
             <a:r>
-              <a:rPr lang="en-US"/>
+              <a:rPr lang="en-US" smtClean="0"/>
               <a:t>Click to edit Master title style</a:t>
             </a:r>
+            <a:endParaRPr lang="en-US"/>
           </a:p>
         </p:txBody>
       </p:sp>
@@ -1722,37 +1486,38 @@
           <a:p>
             <a:pPr lvl="0"/>
             <a:r>
-              <a:rPr lang="en-US"/>
+              <a:rPr lang="en-US" smtClean="0"/>
               <a:t>Click to edit Master text styles</a:t>
             </a:r>
           </a:p>
           <a:p>
             <a:pPr lvl="1"/>
             <a:r>
-              <a:rPr lang="en-US"/>
+              <a:rPr lang="en-US" smtClean="0"/>
               <a:t>Second level</a:t>
             </a:r>
           </a:p>
           <a:p>
             <a:pPr lvl="2"/>
             <a:r>
-              <a:rPr lang="en-US"/>
+              <a:rPr lang="en-US" smtClean="0"/>
               <a:t>Third level</a:t>
             </a:r>
           </a:p>
           <a:p>
             <a:pPr lvl="3"/>
             <a:r>
-              <a:rPr lang="en-US"/>
+              <a:rPr lang="en-US" smtClean="0"/>
               <a:t>Fourth level</a:t>
             </a:r>
           </a:p>
           <a:p>
             <a:pPr lvl="4"/>
             <a:r>
-              <a:rPr lang="en-US"/>
+              <a:rPr lang="en-US" smtClean="0"/>
               <a:t>Fifth level</a:t>
             </a:r>
+            <a:endParaRPr lang="en-US"/>
           </a:p>
         </p:txBody>
       </p:sp>
@@ -1773,7 +1538,7 @@
           <a:p>
             <a:fld id="{5BCAD085-E8A6-8845-BD4E-CB4CCA059FC4}" type="datetimeFigureOut">
               <a:rPr lang="en-US" smtClean="0"/>
-              <a:t>5/24/2026</a:t>
+              <a:t>1/27/13</a:t>
             </a:fld>
             <a:endParaRPr lang="en-US"/>
           </a:p>
@@ -1876,9 +1641,10 @@
           </a:lstStyle>
           <a:p>
             <a:r>
-              <a:rPr lang="en-US"/>
+              <a:rPr lang="en-US" smtClean="0"/>
               <a:t>Click to edit Master title style</a:t>
             </a:r>
+            <a:endParaRPr lang="en-US"/>
           </a:p>
         </p:txBody>
       </p:sp>
@@ -1995,7 +1761,7 @@
           <a:p>
             <a:pPr lvl="0"/>
             <a:r>
-              <a:rPr lang="en-US"/>
+              <a:rPr lang="en-US" smtClean="0"/>
               <a:t>Click to edit Master text styles</a:t>
             </a:r>
           </a:p>
@@ -2018,7 +1784,7 @@
           <a:p>
             <a:fld id="{5BCAD085-E8A6-8845-BD4E-CB4CCA059FC4}" type="datetimeFigureOut">
               <a:rPr lang="en-US" smtClean="0"/>
-              <a:t>5/24/2026</a:t>
+              <a:t>1/27/13</a:t>
             </a:fld>
             <a:endParaRPr lang="en-US"/>
           </a:p>
@@ -2112,9 +1878,10 @@
           <a:lstStyle/>
           <a:p>
             <a:r>
-              <a:rPr lang="en-US"/>
+              <a:rPr lang="en-US" smtClean="0"/>
               <a:t>Click to edit Master title style</a:t>
             </a:r>
+            <a:endParaRPr lang="en-US"/>
           </a:p>
         </p:txBody>
       </p:sp>
@@ -2168,37 +1935,38 @@
           <a:p>
             <a:pPr lvl="0"/>
             <a:r>
-              <a:rPr lang="en-US"/>
+              <a:rPr lang="en-US" smtClean="0"/>
               <a:t>Click to edit Master text styles</a:t>
             </a:r>
           </a:p>
           <a:p>
             <a:pPr lvl="1"/>
             <a:r>
-              <a:rPr lang="en-US"/>
+              <a:rPr lang="en-US" smtClean="0"/>
               <a:t>Second level</a:t>
             </a:r>
           </a:p>
           <a:p>
             <a:pPr lvl="2"/>
             <a:r>
-              <a:rPr lang="en-US"/>
+              <a:rPr lang="en-US" smtClean="0"/>
               <a:t>Third level</a:t>
             </a:r>
           </a:p>
           <a:p>
             <a:pPr lvl="3"/>
             <a:r>
-              <a:rPr lang="en-US"/>
+              <a:rPr lang="en-US" smtClean="0"/>
               <a:t>Fourth level</a:t>
             </a:r>
           </a:p>
           <a:p>
             <a:pPr lvl="4"/>
             <a:r>
-              <a:rPr lang="en-US"/>
+              <a:rPr lang="en-US" smtClean="0"/>
               <a:t>Fifth level</a:t>
             </a:r>
+            <a:endParaRPr lang="en-US"/>
           </a:p>
         </p:txBody>
       </p:sp>
@@ -2252,37 +2020,38 @@
           <a:p>
             <a:pPr lvl="0"/>
             <a:r>
-              <a:rPr lang="en-US"/>
+              <a:rPr lang="en-US" smtClean="0"/>
               <a:t>Click to edit Master text styles</a:t>
             </a:r>
           </a:p>
           <a:p>
             <a:pPr lvl="1"/>
             <a:r>
-              <a:rPr lang="en-US"/>
+              <a:rPr lang="en-US" smtClean="0"/>
               <a:t>Second level</a:t>
             </a:r>
           </a:p>
           <a:p>
             <a:pPr lvl="2"/>
             <a:r>
-              <a:rPr lang="en-US"/>
+              <a:rPr lang="en-US" smtClean="0"/>
               <a:t>Third level</a:t>
             </a:r>
           </a:p>
           <a:p>
             <a:pPr lvl="3"/>
             <a:r>
-              <a:rPr lang="en-US"/>
+              <a:rPr lang="en-US" smtClean="0"/>
               <a:t>Fourth level</a:t>
             </a:r>
           </a:p>
           <a:p>
             <a:pPr lvl="4"/>
             <a:r>
-              <a:rPr lang="en-US"/>
+              <a:rPr lang="en-US" smtClean="0"/>
               <a:t>Fifth level</a:t>
             </a:r>
+            <a:endParaRPr lang="en-US"/>
           </a:p>
         </p:txBody>
       </p:sp>
@@ -2303,7 +2072,7 @@
           <a:p>
             <a:fld id="{5BCAD085-E8A6-8845-BD4E-CB4CCA059FC4}" type="datetimeFigureOut">
               <a:rPr lang="en-US" smtClean="0"/>
-              <a:t>5/24/2026</a:t>
+              <a:t>1/27/13</a:t>
             </a:fld>
             <a:endParaRPr lang="en-US"/>
           </a:p>
@@ -2401,9 +2170,10 @@
           </a:lstStyle>
           <a:p>
             <a:r>
-              <a:rPr lang="en-US"/>
+              <a:rPr lang="en-US" smtClean="0"/>
               <a:t>Click to edit Master title style</a:t>
             </a:r>
+            <a:endParaRPr lang="en-US"/>
           </a:p>
         </p:txBody>
       </p:sp>
@@ -2466,7 +2236,7 @@
           <a:p>
             <a:pPr lvl="0"/>
             <a:r>
-              <a:rPr lang="en-US"/>
+              <a:rPr lang="en-US" smtClean="0"/>
               <a:t>Click to edit Master text styles</a:t>
             </a:r>
           </a:p>
@@ -2522,37 +2292,38 @@
           <a:p>
             <a:pPr lvl="0"/>
             <a:r>
-              <a:rPr lang="en-US"/>
+              <a:rPr lang="en-US" smtClean="0"/>
               <a:t>Click to edit Master text styles</a:t>
             </a:r>
           </a:p>
           <a:p>
             <a:pPr lvl="1"/>
             <a:r>
-              <a:rPr lang="en-US"/>
+              <a:rPr lang="en-US" smtClean="0"/>
               <a:t>Second level</a:t>
             </a:r>
           </a:p>
           <a:p>
             <a:pPr lvl="2"/>
             <a:r>
-              <a:rPr lang="en-US"/>
+              <a:rPr lang="en-US" smtClean="0"/>
               <a:t>Third level</a:t>
             </a:r>
           </a:p>
           <a:p>
             <a:pPr lvl="3"/>
             <a:r>
-              <a:rPr lang="en-US"/>
+              <a:rPr lang="en-US" smtClean="0"/>
               <a:t>Fourth level</a:t>
             </a:r>
           </a:p>
           <a:p>
             <a:pPr lvl="4"/>
             <a:r>
-              <a:rPr lang="en-US"/>
+              <a:rPr lang="en-US" smtClean="0"/>
               <a:t>Fifth level</a:t>
             </a:r>
+            <a:endParaRPr lang="en-US"/>
           </a:p>
         </p:txBody>
       </p:sp>
@@ -2615,7 +2386,7 @@
           <a:p>
             <a:pPr lvl="0"/>
             <a:r>
-              <a:rPr lang="en-US"/>
+              <a:rPr lang="en-US" smtClean="0"/>
               <a:t>Click to edit Master text styles</a:t>
             </a:r>
           </a:p>
@@ -2671,37 +2442,38 @@
           <a:p>
             <a:pPr lvl="0"/>
             <a:r>
-              <a:rPr lang="en-US"/>
+              <a:rPr lang="en-US" smtClean="0"/>
               <a:t>Click to edit Master text styles</a:t>
             </a:r>
           </a:p>
           <a:p>
             <a:pPr lvl="1"/>
             <a:r>
-              <a:rPr lang="en-US"/>
+              <a:rPr lang="en-US" smtClean="0"/>
               <a:t>Second level</a:t>
             </a:r>
           </a:p>
           <a:p>
             <a:pPr lvl="2"/>
             <a:r>
-              <a:rPr lang="en-US"/>
+              <a:rPr lang="en-US" smtClean="0"/>
               <a:t>Third level</a:t>
             </a:r>
           </a:p>
           <a:p>
             <a:pPr lvl="3"/>
             <a:r>
-              <a:rPr lang="en-US"/>
+              <a:rPr lang="en-US" smtClean="0"/>
               <a:t>Fourth level</a:t>
             </a:r>
           </a:p>
           <a:p>
             <a:pPr lvl="4"/>
             <a:r>
-              <a:rPr lang="en-US"/>
+              <a:rPr lang="en-US" smtClean="0"/>
               <a:t>Fifth level</a:t>
             </a:r>
+            <a:endParaRPr lang="en-US"/>
           </a:p>
         </p:txBody>
       </p:sp>
@@ -2722,7 +2494,7 @@
           <a:p>
             <a:fld id="{5BCAD085-E8A6-8845-BD4E-CB4CCA059FC4}" type="datetimeFigureOut">
               <a:rPr lang="en-US" smtClean="0"/>
-              <a:t>5/24/2026</a:t>
+              <a:t>1/27/13</a:t>
             </a:fld>
             <a:endParaRPr lang="en-US"/>
           </a:p>
@@ -2816,9 +2588,10 @@
           <a:lstStyle/>
           <a:p>
             <a:r>
-              <a:rPr lang="en-US"/>
+              <a:rPr lang="en-US" smtClean="0"/>
               <a:t>Click to edit Master title style</a:t>
             </a:r>
+            <a:endParaRPr lang="en-US"/>
           </a:p>
         </p:txBody>
       </p:sp>
@@ -2839,7 +2612,7 @@
           <a:p>
             <a:fld id="{5BCAD085-E8A6-8845-BD4E-CB4CCA059FC4}" type="datetimeFigureOut">
               <a:rPr lang="en-US" smtClean="0"/>
-              <a:t>5/24/2026</a:t>
+              <a:t>1/27/13</a:t>
             </a:fld>
             <a:endParaRPr lang="en-US"/>
           </a:p>
@@ -2934,7 +2707,7 @@
           <a:p>
             <a:fld id="{5BCAD085-E8A6-8845-BD4E-CB4CCA059FC4}" type="datetimeFigureOut">
               <a:rPr lang="en-US" smtClean="0"/>
-              <a:t>5/24/2026</a:t>
+              <a:t>1/27/13</a:t>
             </a:fld>
             <a:endParaRPr lang="en-US"/>
           </a:p>
@@ -3037,9 +2810,10 @@
           </a:lstStyle>
           <a:p>
             <a:r>
-              <a:rPr lang="en-US"/>
+              <a:rPr lang="en-US" smtClean="0"/>
               <a:t>Click to edit Master title style</a:t>
             </a:r>
+            <a:endParaRPr lang="en-US"/>
           </a:p>
         </p:txBody>
       </p:sp>
@@ -3093,37 +2867,38 @@
           <a:p>
             <a:pPr lvl="0"/>
             <a:r>
-              <a:rPr lang="en-US"/>
+              <a:rPr lang="en-US" smtClean="0"/>
               <a:t>Click to edit Master text styles</a:t>
             </a:r>
           </a:p>
           <a:p>
             <a:pPr lvl="1"/>
             <a:r>
-              <a:rPr lang="en-US"/>
+              <a:rPr lang="en-US" smtClean="0"/>
               <a:t>Second level</a:t>
             </a:r>
           </a:p>
           <a:p>
             <a:pPr lvl="2"/>
             <a:r>
-              <a:rPr lang="en-US"/>
+              <a:rPr lang="en-US" smtClean="0"/>
               <a:t>Third level</a:t>
             </a:r>
           </a:p>
           <a:p>
             <a:pPr lvl="3"/>
             <a:r>
-              <a:rPr lang="en-US"/>
+              <a:rPr lang="en-US" smtClean="0"/>
               <a:t>Fourth level</a:t>
             </a:r>
           </a:p>
           <a:p>
             <a:pPr lvl="4"/>
             <a:r>
-              <a:rPr lang="en-US"/>
+              <a:rPr lang="en-US" smtClean="0"/>
               <a:t>Fifth level</a:t>
             </a:r>
+            <a:endParaRPr lang="en-US"/>
           </a:p>
         </p:txBody>
       </p:sp>
@@ -3186,7 +2961,7 @@
           <a:p>
             <a:pPr lvl="0"/>
             <a:r>
-              <a:rPr lang="en-US"/>
+              <a:rPr lang="en-US" smtClean="0"/>
               <a:t>Click to edit Master text styles</a:t>
             </a:r>
           </a:p>
@@ -3209,7 +2984,7 @@
           <a:p>
             <a:fld id="{5BCAD085-E8A6-8845-BD4E-CB4CCA059FC4}" type="datetimeFigureOut">
               <a:rPr lang="en-US" smtClean="0"/>
-              <a:t>5/24/2026</a:t>
+              <a:t>1/27/13</a:t>
             </a:fld>
             <a:endParaRPr lang="en-US"/>
           </a:p>
@@ -3312,9 +3087,10 @@
           </a:lstStyle>
           <a:p>
             <a:r>
-              <a:rPr lang="en-US"/>
+              <a:rPr lang="en-US" smtClean="0"/>
               <a:t>Click to edit Master title style</a:t>
             </a:r>
+            <a:endParaRPr lang="en-US"/>
           </a:p>
         </p:txBody>
       </p:sp>
@@ -3438,7 +3214,7 @@
           <a:p>
             <a:pPr lvl="0"/>
             <a:r>
-              <a:rPr lang="en-US"/>
+              <a:rPr lang="en-US" smtClean="0"/>
               <a:t>Click to edit Master text styles</a:t>
             </a:r>
           </a:p>
@@ -3461,7 +3237,7 @@
           <a:p>
             <a:fld id="{5BCAD085-E8A6-8845-BD4E-CB4CCA059FC4}" type="datetimeFigureOut">
               <a:rPr lang="en-US" smtClean="0"/>
-              <a:t>5/24/2026</a:t>
+              <a:t>1/27/13</a:t>
             </a:fld>
             <a:endParaRPr lang="en-US"/>
           </a:p>
@@ -3570,9 +3346,10 @@
           <a:lstStyle/>
           <a:p>
             <a:r>
-              <a:rPr lang="en-US"/>
+              <a:rPr lang="en-US" smtClean="0"/>
               <a:t>Click to edit Master title style</a:t>
             </a:r>
+            <a:endParaRPr lang="en-US"/>
           </a:p>
         </p:txBody>
       </p:sp>
@@ -3603,37 +3380,38 @@
           <a:p>
             <a:pPr lvl="0"/>
             <a:r>
-              <a:rPr lang="en-US"/>
+              <a:rPr lang="en-US" smtClean="0"/>
               <a:t>Click to edit Master text styles</a:t>
             </a:r>
           </a:p>
           <a:p>
             <a:pPr lvl="1"/>
             <a:r>
-              <a:rPr lang="en-US"/>
+              <a:rPr lang="en-US" smtClean="0"/>
               <a:t>Second level</a:t>
             </a:r>
           </a:p>
           <a:p>
             <a:pPr lvl="2"/>
             <a:r>
-              <a:rPr lang="en-US"/>
+              <a:rPr lang="en-US" smtClean="0"/>
               <a:t>Third level</a:t>
             </a:r>
           </a:p>
           <a:p>
             <a:pPr lvl="3"/>
             <a:r>
-              <a:rPr lang="en-US"/>
+              <a:rPr lang="en-US" smtClean="0"/>
               <a:t>Fourth level</a:t>
             </a:r>
           </a:p>
           <a:p>
             <a:pPr lvl="4"/>
             <a:r>
-              <a:rPr lang="en-US"/>
+              <a:rPr lang="en-US" smtClean="0"/>
               <a:t>Fifth level</a:t>
             </a:r>
+            <a:endParaRPr lang="en-US"/>
           </a:p>
         </p:txBody>
       </p:sp>
@@ -3672,7 +3450,7 @@
           <a:p>
             <a:fld id="{5BCAD085-E8A6-8845-BD4E-CB4CCA059FC4}" type="datetimeFigureOut">
               <a:rPr lang="en-US" smtClean="0"/>
-              <a:t>5/24/2026</a:t>
+              <a:t>1/27/13</a:t>
             </a:fld>
             <a:endParaRPr lang="en-US"/>
           </a:p>
@@ -4031,7 +3809,7 @@
 </file>
 
 <file path=ppt/slides/slide1.xml><?xml version="1.0" encoding="utf-8"?>
-<p:sld xmlns:a="http://schemas.openxmlformats.org/drawingml/2006/main" xmlns:r="http://schemas.openxmlformats.org/officeDocument/2006/relationships" xmlns:p="http://schemas.openxmlformats.org/presentationml/2006/main">
+<p:sld xmlns:a="http://schemas.openxmlformats.org/drawingml/2006/main" xmlns:p="http://schemas.openxmlformats.org/presentationml/2006/main" xmlns:r="http://schemas.openxmlformats.org/officeDocument/2006/relationships">
   <p:cSld>
     <p:spTree>
       <p:nvGrpSpPr>
@@ -4039,14 +3817,7 @@
         <p:cNvGrpSpPr/>
         <p:nvPr/>
       </p:nvGrpSpPr>
-      <p:grpSpPr>
-        <a:xfrm>
-          <a:off x="0" y="0"/>
-          <a:ext cx="0" cy="0"/>
-          <a:chOff x="0" y="0"/>
-          <a:chExt cx="0" cy="0"/>
-        </a:xfrm>
-      </p:grpSpPr>
+      <p:grpSpPr/>
       <p:sp>
         <p:nvSpPr>
           <p:cNvPr id="2" name="Rectangle 1"/>
@@ -4087,7 +3858,6 @@
           <a:lstStyle/>
           <a:p>
             <a:pPr algn="ctr"/>
-            <a:endParaRPr/>
           </a:p>
         </p:txBody>
       </p:sp>
@@ -4108,7 +3878,7 @@
           <a:noFill/>
         </p:spPr>
         <p:txBody>
-          <a:bodyPr wrap="square" lIns="0" tIns="0" rIns="0" bIns="0" anchor="t">
+          <a:bodyPr wrap="square" anchor="t" lIns="0" rIns="0" tIns="0" bIns="0">
             <a:spAutoFit/>
           </a:bodyPr>
           <a:lstStyle/>
@@ -4143,7 +3913,7 @@
           <a:noFill/>
         </p:spPr>
         <p:txBody>
-          <a:bodyPr wrap="square" lIns="0" tIns="0" rIns="0" bIns="0" anchor="t">
+          <a:bodyPr wrap="square" anchor="t" lIns="0" rIns="0" tIns="0" bIns="0">
             <a:spAutoFit/>
           </a:bodyPr>
           <a:lstStyle/>
@@ -4178,7 +3948,7 @@
           <a:noFill/>
         </p:spPr>
         <p:txBody>
-          <a:bodyPr wrap="square" lIns="0" tIns="0" rIns="0" bIns="0" anchor="t">
+          <a:bodyPr wrap="square" anchor="t" lIns="0" rIns="0" tIns="0" bIns="0">
             <a:spAutoFit/>
           </a:bodyPr>
           <a:lstStyle/>
@@ -4213,7 +3983,7 @@
           <a:noFill/>
         </p:spPr>
         <p:txBody>
-          <a:bodyPr wrap="square" lIns="0" tIns="0" rIns="0" bIns="0" anchor="t">
+          <a:bodyPr wrap="square" anchor="t" lIns="0" rIns="0" tIns="0" bIns="0">
             <a:spAutoFit/>
           </a:bodyPr>
           <a:lstStyle/>
@@ -4248,7 +4018,7 @@
           <a:noFill/>
         </p:spPr>
         <p:txBody>
-          <a:bodyPr wrap="square" lIns="0" tIns="0" rIns="0" bIns="0" anchor="t">
+          <a:bodyPr wrap="square" anchor="t" lIns="0" rIns="0" tIns="0" bIns="0">
             <a:spAutoFit/>
           </a:bodyPr>
           <a:lstStyle/>
@@ -4275,7 +4045,7 @@
 </file>
 
 <file path=ppt/slides/slide10.xml><?xml version="1.0" encoding="utf-8"?>
-<p:sld xmlns:a="http://schemas.openxmlformats.org/drawingml/2006/main" xmlns:r="http://schemas.openxmlformats.org/officeDocument/2006/relationships" xmlns:p="http://schemas.openxmlformats.org/presentationml/2006/main">
+<p:sld xmlns:a="http://schemas.openxmlformats.org/drawingml/2006/main" xmlns:p="http://schemas.openxmlformats.org/presentationml/2006/main" xmlns:r="http://schemas.openxmlformats.org/officeDocument/2006/relationships">
   <p:cSld>
     <p:spTree>
       <p:nvGrpSpPr>
@@ -4283,14 +4053,7 @@
         <p:cNvGrpSpPr/>
         <p:nvPr/>
       </p:nvGrpSpPr>
-      <p:grpSpPr>
-        <a:xfrm>
-          <a:off x="0" y="0"/>
-          <a:ext cx="0" cy="0"/>
-          <a:chOff x="0" y="0"/>
-          <a:chExt cx="0" cy="0"/>
-        </a:xfrm>
-      </p:grpSpPr>
+      <p:grpSpPr/>
       <p:sp>
         <p:nvSpPr>
           <p:cNvPr id="2" name="TextBox 1"/>
@@ -4308,7 +4071,7 @@
           <a:noFill/>
         </p:spPr>
         <p:txBody>
-          <a:bodyPr wrap="square" lIns="0" tIns="0" rIns="0" bIns="0" anchor="t">
+          <a:bodyPr wrap="square" anchor="t" lIns="0" rIns="0" tIns="0" bIns="0">
             <a:spAutoFit/>
           </a:bodyPr>
           <a:lstStyle/>
@@ -4349,27 +4112,9 @@
                 <a:tableStyleId>{5C22544A-7EE6-4342-B048-85BDC9FD1C3A}</a:tableStyleId>
               </a:tblPr>
               <a:tblGrid>
-                <a:gridCol w="6858000">
-                  <a:extLst>
-                    <a:ext uri="{9D8B030D-6E8A-4147-A177-3AD203B41FA5}">
-                      <a16:colId xmlns:a16="http://schemas.microsoft.com/office/drawing/2014/main" val="20000"/>
-                    </a:ext>
-                  </a:extLst>
-                </a:gridCol>
-                <a:gridCol w="2103120">
-                  <a:extLst>
-                    <a:ext uri="{9D8B030D-6E8A-4147-A177-3AD203B41FA5}">
-                      <a16:colId xmlns:a16="http://schemas.microsoft.com/office/drawing/2014/main" val="20001"/>
-                    </a:ext>
-                  </a:extLst>
-                </a:gridCol>
-                <a:gridCol w="2103120">
-                  <a:extLst>
-                    <a:ext uri="{9D8B030D-6E8A-4147-A177-3AD203B41FA5}">
-                      <a16:colId xmlns:a16="http://schemas.microsoft.com/office/drawing/2014/main" val="20002"/>
-                    </a:ext>
-                  </a:extLst>
-                </a:gridCol>
+                <a:gridCol w="6858000"/>
+                <a:gridCol w="2103120"/>
+                <a:gridCol w="2103120"/>
               </a:tblGrid>
               <a:tr h="457200">
                 <a:tc>
@@ -4441,11 +4186,6 @@
                     </a:solidFill>
                   </a:tcPr>
                 </a:tc>
-                <a:extLst>
-                  <a:ext uri="{0D108BD9-81ED-4DB2-BD59-A6C34878D82A}">
-                    <a16:rowId xmlns:a16="http://schemas.microsoft.com/office/drawing/2014/main" val="10000"/>
-                  </a:ext>
-                </a:extLst>
               </a:tr>
               <a:tr h="457200">
                 <a:tc>
@@ -4517,11 +4257,6 @@
                     </a:solidFill>
                   </a:tcPr>
                 </a:tc>
-                <a:extLst>
-                  <a:ext uri="{0D108BD9-81ED-4DB2-BD59-A6C34878D82A}">
-                    <a16:rowId xmlns:a16="http://schemas.microsoft.com/office/drawing/2014/main" val="10001"/>
-                  </a:ext>
-                </a:extLst>
               </a:tr>
               <a:tr h="457200">
                 <a:tc>
@@ -4593,11 +4328,6 @@
                     </a:solidFill>
                   </a:tcPr>
                 </a:tc>
-                <a:extLst>
-                  <a:ext uri="{0D108BD9-81ED-4DB2-BD59-A6C34878D82A}">
-                    <a16:rowId xmlns:a16="http://schemas.microsoft.com/office/drawing/2014/main" val="10002"/>
-                  </a:ext>
-                </a:extLst>
               </a:tr>
               <a:tr h="457200">
                 <a:tc>
@@ -4669,11 +4399,6 @@
                     </a:solidFill>
                   </a:tcPr>
                 </a:tc>
-                <a:extLst>
-                  <a:ext uri="{0D108BD9-81ED-4DB2-BD59-A6C34878D82A}">
-                    <a16:rowId xmlns:a16="http://schemas.microsoft.com/office/drawing/2014/main" val="10003"/>
-                  </a:ext>
-                </a:extLst>
               </a:tr>
               <a:tr h="457200">
                 <a:tc>
@@ -4745,11 +4470,6 @@
                     </a:solidFill>
                   </a:tcPr>
                 </a:tc>
-                <a:extLst>
-                  <a:ext uri="{0D108BD9-81ED-4DB2-BD59-A6C34878D82A}">
-                    <a16:rowId xmlns:a16="http://schemas.microsoft.com/office/drawing/2014/main" val="10004"/>
-                  </a:ext>
-                </a:extLst>
               </a:tr>
               <a:tr h="457200">
                 <a:tc>
@@ -4821,11 +4541,6 @@
                     </a:solidFill>
                   </a:tcPr>
                 </a:tc>
-                <a:extLst>
-                  <a:ext uri="{0D108BD9-81ED-4DB2-BD59-A6C34878D82A}">
-                    <a16:rowId xmlns:a16="http://schemas.microsoft.com/office/drawing/2014/main" val="10005"/>
-                  </a:ext>
-                </a:extLst>
               </a:tr>
               <a:tr h="457200">
                 <a:tc>
@@ -4897,11 +4612,6 @@
                     </a:solidFill>
                   </a:tcPr>
                 </a:tc>
-                <a:extLst>
-                  <a:ext uri="{0D108BD9-81ED-4DB2-BD59-A6C34878D82A}">
-                    <a16:rowId xmlns:a16="http://schemas.microsoft.com/office/drawing/2014/main" val="10006"/>
-                  </a:ext>
-                </a:extLst>
               </a:tr>
               <a:tr h="457200">
                 <a:tc>
@@ -4973,11 +4683,6 @@
                     </a:solidFill>
                   </a:tcPr>
                 </a:tc>
-                <a:extLst>
-                  <a:ext uri="{0D108BD9-81ED-4DB2-BD59-A6C34878D82A}">
-                    <a16:rowId xmlns:a16="http://schemas.microsoft.com/office/drawing/2014/main" val="10007"/>
-                  </a:ext>
-                </a:extLst>
               </a:tr>
             </a:tbl>
           </a:graphicData>
@@ -5000,7 +4705,7 @@
           <a:noFill/>
         </p:spPr>
         <p:txBody>
-          <a:bodyPr wrap="square" lIns="0" tIns="0" rIns="0" bIns="0" anchor="t">
+          <a:bodyPr wrap="square" anchor="t" lIns="0" rIns="0" tIns="0" bIns="0">
             <a:spAutoFit/>
           </a:bodyPr>
           <a:lstStyle/>
@@ -5039,7 +4744,7 @@
           <a:noFill/>
         </p:spPr>
         <p:txBody>
-          <a:bodyPr wrap="square" lIns="0" tIns="0" rIns="0" bIns="0" anchor="t">
+          <a:bodyPr wrap="square" anchor="t" lIns="0" rIns="0" tIns="0" bIns="0">
             <a:spAutoFit/>
           </a:bodyPr>
           <a:lstStyle/>
@@ -5066,7 +4771,7 @@
 </file>
 
 <file path=ppt/slides/slide11.xml><?xml version="1.0" encoding="utf-8"?>
-<p:sld xmlns:a="http://schemas.openxmlformats.org/drawingml/2006/main" xmlns:r="http://schemas.openxmlformats.org/officeDocument/2006/relationships" xmlns:p="http://schemas.openxmlformats.org/presentationml/2006/main">
+<p:sld xmlns:a="http://schemas.openxmlformats.org/drawingml/2006/main" xmlns:p="http://schemas.openxmlformats.org/presentationml/2006/main" xmlns:r="http://schemas.openxmlformats.org/officeDocument/2006/relationships">
   <p:cSld>
     <p:spTree>
       <p:nvGrpSpPr>
@@ -5074,14 +4779,7 @@
         <p:cNvGrpSpPr/>
         <p:nvPr/>
       </p:nvGrpSpPr>
-      <p:grpSpPr>
-        <a:xfrm>
-          <a:off x="0" y="0"/>
-          <a:ext cx="0" cy="0"/>
-          <a:chOff x="0" y="0"/>
-          <a:chExt cx="0" cy="0"/>
-        </a:xfrm>
-      </p:grpSpPr>
+      <p:grpSpPr/>
       <p:sp>
         <p:nvSpPr>
           <p:cNvPr id="2" name="TextBox 1"/>
@@ -5099,7 +4797,7 @@
           <a:noFill/>
         </p:spPr>
         <p:txBody>
-          <a:bodyPr wrap="square" lIns="0" tIns="0" rIns="0" bIns="0" anchor="t">
+          <a:bodyPr wrap="square" anchor="t" lIns="0" rIns="0" tIns="0" bIns="0">
             <a:spAutoFit/>
           </a:bodyPr>
           <a:lstStyle/>
@@ -5138,7 +4836,7 @@
           <a:noFill/>
         </p:spPr>
         <p:txBody>
-          <a:bodyPr wrap="square" lIns="0" tIns="0" rIns="0" bIns="0" anchor="t">
+          <a:bodyPr wrap="square" anchor="t" lIns="0" rIns="0" tIns="0" bIns="0">
             <a:spAutoFit/>
           </a:bodyPr>
           <a:lstStyle/>
@@ -5201,7 +4899,7 @@
           <a:noFill/>
         </p:spPr>
         <p:txBody>
-          <a:bodyPr wrap="square" lIns="0" tIns="0" rIns="0" bIns="0" anchor="t">
+          <a:bodyPr wrap="square" anchor="t" lIns="0" rIns="0" tIns="0" bIns="0">
             <a:spAutoFit/>
           </a:bodyPr>
           <a:lstStyle/>
@@ -5228,7 +4926,7 @@
 </file>
 
 <file path=ppt/slides/slide12.xml><?xml version="1.0" encoding="utf-8"?>
-<p:sld xmlns:a="http://schemas.openxmlformats.org/drawingml/2006/main" xmlns:r="http://schemas.openxmlformats.org/officeDocument/2006/relationships" xmlns:p="http://schemas.openxmlformats.org/presentationml/2006/main">
+<p:sld xmlns:a="http://schemas.openxmlformats.org/drawingml/2006/main" xmlns:p="http://schemas.openxmlformats.org/presentationml/2006/main" xmlns:r="http://schemas.openxmlformats.org/officeDocument/2006/relationships">
   <p:cSld>
     <p:spTree>
       <p:nvGrpSpPr>
@@ -5236,14 +4934,7 @@
         <p:cNvGrpSpPr/>
         <p:nvPr/>
       </p:nvGrpSpPr>
-      <p:grpSpPr>
-        <a:xfrm>
-          <a:off x="0" y="0"/>
-          <a:ext cx="0" cy="0"/>
-          <a:chOff x="0" y="0"/>
-          <a:chExt cx="0" cy="0"/>
-        </a:xfrm>
-      </p:grpSpPr>
+      <p:grpSpPr/>
       <p:sp>
         <p:nvSpPr>
           <p:cNvPr id="2" name="TextBox 1"/>
@@ -5261,7 +4952,7 @@
           <a:noFill/>
         </p:spPr>
         <p:txBody>
-          <a:bodyPr wrap="square" lIns="0" tIns="0" rIns="0" bIns="0" anchor="t">
+          <a:bodyPr wrap="square" anchor="t" lIns="0" rIns="0" tIns="0" bIns="0">
             <a:spAutoFit/>
           </a:bodyPr>
           <a:lstStyle/>
@@ -5300,7 +4991,7 @@
           <a:noFill/>
         </p:spPr>
         <p:txBody>
-          <a:bodyPr wrap="square" lIns="0" tIns="0" rIns="0" bIns="0" anchor="t">
+          <a:bodyPr wrap="square" anchor="t" lIns="0" rIns="0" tIns="0" bIns="0">
             <a:spAutoFit/>
           </a:bodyPr>
           <a:lstStyle/>
@@ -5339,7 +5030,7 @@
           <a:noFill/>
         </p:spPr>
         <p:txBody>
-          <a:bodyPr wrap="square" lIns="0" tIns="0" rIns="0" bIns="0" anchor="t">
+          <a:bodyPr wrap="square" anchor="t" lIns="0" rIns="0" tIns="0" bIns="0">
             <a:spAutoFit/>
           </a:bodyPr>
           <a:lstStyle/>
@@ -5374,7 +5065,7 @@
           <a:noFill/>
         </p:spPr>
         <p:txBody>
-          <a:bodyPr wrap="square" lIns="0" tIns="0" rIns="0" bIns="0" anchor="t">
+          <a:bodyPr wrap="square" anchor="t" lIns="0" rIns="0" tIns="0" bIns="0">
             <a:spAutoFit/>
           </a:bodyPr>
           <a:lstStyle/>
@@ -5413,7 +5104,7 @@
           <a:noFill/>
         </p:spPr>
         <p:txBody>
-          <a:bodyPr wrap="square" lIns="0" tIns="0" rIns="0" bIns="0" anchor="t">
+          <a:bodyPr wrap="square" anchor="t" lIns="0" rIns="0" tIns="0" bIns="0">
             <a:spAutoFit/>
           </a:bodyPr>
           <a:lstStyle/>
@@ -5448,7 +5139,7 @@
           <a:noFill/>
         </p:spPr>
         <p:txBody>
-          <a:bodyPr wrap="square" lIns="0" tIns="0" rIns="0" bIns="0" anchor="t">
+          <a:bodyPr wrap="square" anchor="t" lIns="0" rIns="0" tIns="0" bIns="0">
             <a:spAutoFit/>
           </a:bodyPr>
           <a:lstStyle/>
@@ -5487,7 +5178,7 @@
           <a:noFill/>
         </p:spPr>
         <p:txBody>
-          <a:bodyPr wrap="square" lIns="0" tIns="0" rIns="0" bIns="0" anchor="t">
+          <a:bodyPr wrap="square" anchor="t" lIns="0" rIns="0" tIns="0" bIns="0">
             <a:spAutoFit/>
           </a:bodyPr>
           <a:lstStyle/>
@@ -5522,7 +5213,7 @@
           <a:noFill/>
         </p:spPr>
         <p:txBody>
-          <a:bodyPr wrap="square" lIns="0" tIns="0" rIns="0" bIns="0" anchor="t">
+          <a:bodyPr wrap="square" anchor="t" lIns="0" rIns="0" tIns="0" bIns="0">
             <a:spAutoFit/>
           </a:bodyPr>
           <a:lstStyle/>
@@ -5561,7 +5252,7 @@
           <a:noFill/>
         </p:spPr>
         <p:txBody>
-          <a:bodyPr wrap="square" lIns="0" tIns="0" rIns="0" bIns="0" anchor="t">
+          <a:bodyPr wrap="square" anchor="t" lIns="0" rIns="0" tIns="0" bIns="0">
             <a:spAutoFit/>
           </a:bodyPr>
           <a:lstStyle/>
@@ -5596,7 +5287,7 @@
           <a:noFill/>
         </p:spPr>
         <p:txBody>
-          <a:bodyPr wrap="square" lIns="0" tIns="0" rIns="0" bIns="0" anchor="t">
+          <a:bodyPr wrap="square" anchor="t" lIns="0" rIns="0" tIns="0" bIns="0">
             <a:spAutoFit/>
           </a:bodyPr>
           <a:lstStyle/>
@@ -5635,7 +5326,7 @@
           <a:noFill/>
         </p:spPr>
         <p:txBody>
-          <a:bodyPr wrap="square" lIns="0" tIns="0" rIns="0" bIns="0" anchor="t">
+          <a:bodyPr wrap="square" anchor="t" lIns="0" rIns="0" tIns="0" bIns="0">
             <a:spAutoFit/>
           </a:bodyPr>
           <a:lstStyle/>
@@ -5662,7 +5353,7 @@
 </file>
 
 <file path=ppt/slides/slide13.xml><?xml version="1.0" encoding="utf-8"?>
-<p:sld xmlns:a="http://schemas.openxmlformats.org/drawingml/2006/main" xmlns:r="http://schemas.openxmlformats.org/officeDocument/2006/relationships" xmlns:p="http://schemas.openxmlformats.org/presentationml/2006/main">
+<p:sld xmlns:a="http://schemas.openxmlformats.org/drawingml/2006/main" xmlns:p="http://schemas.openxmlformats.org/presentationml/2006/main" xmlns:r="http://schemas.openxmlformats.org/officeDocument/2006/relationships">
   <p:cSld>
     <p:spTree>
       <p:nvGrpSpPr>
@@ -5670,14 +5361,7 @@
         <p:cNvGrpSpPr/>
         <p:nvPr/>
       </p:nvGrpSpPr>
-      <p:grpSpPr>
-        <a:xfrm>
-          <a:off x="0" y="0"/>
-          <a:ext cx="0" cy="0"/>
-          <a:chOff x="0" y="0"/>
-          <a:chExt cx="0" cy="0"/>
-        </a:xfrm>
-      </p:grpSpPr>
+      <p:grpSpPr/>
       <p:sp>
         <p:nvSpPr>
           <p:cNvPr id="2" name="TextBox 1"/>
@@ -5695,7 +5379,7 @@
           <a:noFill/>
         </p:spPr>
         <p:txBody>
-          <a:bodyPr wrap="square" lIns="0" tIns="0" rIns="0" bIns="0" anchor="t">
+          <a:bodyPr wrap="square" anchor="t" lIns="0" rIns="0" tIns="0" bIns="0">
             <a:spAutoFit/>
           </a:bodyPr>
           <a:lstStyle/>
@@ -5734,7 +5418,7 @@
           <a:noFill/>
         </p:spPr>
         <p:txBody>
-          <a:bodyPr wrap="square" lIns="0" tIns="0" rIns="0" bIns="0" anchor="t">
+          <a:bodyPr wrap="square" anchor="t" lIns="0" rIns="0" tIns="0" bIns="0">
             <a:spAutoFit/>
           </a:bodyPr>
           <a:lstStyle/>
@@ -5773,7 +5457,7 @@
           <a:noFill/>
         </p:spPr>
         <p:txBody>
-          <a:bodyPr wrap="square" lIns="0" tIns="0" rIns="0" bIns="0" anchor="t">
+          <a:bodyPr wrap="square" anchor="t" lIns="0" rIns="0" tIns="0" bIns="0">
             <a:spAutoFit/>
           </a:bodyPr>
           <a:lstStyle/>
@@ -5808,7 +5492,7 @@
           <a:noFill/>
         </p:spPr>
         <p:txBody>
-          <a:bodyPr wrap="square" lIns="0" tIns="0" rIns="0" bIns="0" anchor="t">
+          <a:bodyPr wrap="square" anchor="t" lIns="0" rIns="0" tIns="0" bIns="0">
             <a:spAutoFit/>
           </a:bodyPr>
           <a:lstStyle/>
@@ -5843,7 +5527,7 @@
           <a:noFill/>
         </p:spPr>
         <p:txBody>
-          <a:bodyPr wrap="square" lIns="0" tIns="0" rIns="0" bIns="0" anchor="t">
+          <a:bodyPr wrap="square" anchor="t" lIns="0" rIns="0" tIns="0" bIns="0">
             <a:spAutoFit/>
           </a:bodyPr>
           <a:lstStyle/>
@@ -5878,7 +5562,7 @@
           <a:noFill/>
         </p:spPr>
         <p:txBody>
-          <a:bodyPr wrap="square" lIns="0" tIns="0" rIns="0" bIns="0" anchor="t">
+          <a:bodyPr wrap="square" anchor="t" lIns="0" rIns="0" tIns="0" bIns="0">
             <a:spAutoFit/>
           </a:bodyPr>
           <a:lstStyle/>
@@ -5913,7 +5597,7 @@
           <a:noFill/>
         </p:spPr>
         <p:txBody>
-          <a:bodyPr wrap="square" lIns="0" tIns="0" rIns="0" bIns="0" anchor="t">
+          <a:bodyPr wrap="square" anchor="t" lIns="0" rIns="0" tIns="0" bIns="0">
             <a:spAutoFit/>
           </a:bodyPr>
           <a:lstStyle/>
@@ -5948,7 +5632,7 @@
           <a:noFill/>
         </p:spPr>
         <p:txBody>
-          <a:bodyPr wrap="square" lIns="0" tIns="0" rIns="0" bIns="0" anchor="t">
+          <a:bodyPr wrap="square" anchor="t" lIns="0" rIns="0" tIns="0" bIns="0">
             <a:spAutoFit/>
           </a:bodyPr>
           <a:lstStyle/>
@@ -5983,7 +5667,7 @@
           <a:noFill/>
         </p:spPr>
         <p:txBody>
-          <a:bodyPr wrap="square" lIns="0" tIns="0" rIns="0" bIns="0" anchor="t">
+          <a:bodyPr wrap="square" anchor="t" lIns="0" rIns="0" tIns="0" bIns="0">
             <a:spAutoFit/>
           </a:bodyPr>
           <a:lstStyle/>
@@ -6018,7 +5702,7 @@
           <a:noFill/>
         </p:spPr>
         <p:txBody>
-          <a:bodyPr wrap="square" lIns="0" tIns="0" rIns="0" bIns="0" anchor="t">
+          <a:bodyPr wrap="square" anchor="t" lIns="0" rIns="0" tIns="0" bIns="0">
             <a:spAutoFit/>
           </a:bodyPr>
           <a:lstStyle/>
@@ -6053,7 +5737,7 @@
           <a:noFill/>
         </p:spPr>
         <p:txBody>
-          <a:bodyPr wrap="square" lIns="0" tIns="0" rIns="0" bIns="0" anchor="t">
+          <a:bodyPr wrap="square" anchor="t" lIns="0" rIns="0" tIns="0" bIns="0">
             <a:spAutoFit/>
           </a:bodyPr>
           <a:lstStyle/>
@@ -6089,7 +5773,7 @@
         </p:xfrm>
         <a:graphic>
           <a:graphicData uri="http://schemas.openxmlformats.org/drawingml/2006/chart">
-            <c:chart xmlns:c="http://schemas.openxmlformats.org/drawingml/2006/chart" xmlns:r="http://schemas.openxmlformats.org/officeDocument/2006/relationships" r:id="rId2"/>
+            <c:chart xmlns:c="http://schemas.openxmlformats.org/drawingml/2006/chart" r:id="rId2"/>
           </a:graphicData>
         </a:graphic>
       </p:graphicFrame>
@@ -6110,7 +5794,7 @@
           <a:noFill/>
         </p:spPr>
         <p:txBody>
-          <a:bodyPr wrap="square" lIns="0" tIns="0" rIns="0" bIns="0" anchor="t">
+          <a:bodyPr wrap="square" anchor="t" lIns="0" rIns="0" tIns="0" bIns="0">
             <a:spAutoFit/>
           </a:bodyPr>
           <a:lstStyle/>
@@ -6149,7 +5833,7 @@
           <a:noFill/>
         </p:spPr>
         <p:txBody>
-          <a:bodyPr wrap="square" lIns="0" tIns="0" rIns="0" bIns="0" anchor="t">
+          <a:bodyPr wrap="square" anchor="t" lIns="0" rIns="0" tIns="0" bIns="0">
             <a:spAutoFit/>
           </a:bodyPr>
           <a:lstStyle/>
@@ -6176,7 +5860,7 @@
 </file>
 
 <file path=ppt/slides/slide14.xml><?xml version="1.0" encoding="utf-8"?>
-<p:sld xmlns:a="http://schemas.openxmlformats.org/drawingml/2006/main" xmlns:r="http://schemas.openxmlformats.org/officeDocument/2006/relationships" xmlns:p="http://schemas.openxmlformats.org/presentationml/2006/main">
+<p:sld xmlns:a="http://schemas.openxmlformats.org/drawingml/2006/main" xmlns:p="http://schemas.openxmlformats.org/presentationml/2006/main" xmlns:r="http://schemas.openxmlformats.org/officeDocument/2006/relationships">
   <p:cSld>
     <p:spTree>
       <p:nvGrpSpPr>
@@ -6184,14 +5868,7 @@
         <p:cNvGrpSpPr/>
         <p:nvPr/>
       </p:nvGrpSpPr>
-      <p:grpSpPr>
-        <a:xfrm>
-          <a:off x="0" y="0"/>
-          <a:ext cx="0" cy="0"/>
-          <a:chOff x="0" y="0"/>
-          <a:chExt cx="0" cy="0"/>
-        </a:xfrm>
-      </p:grpSpPr>
+      <p:grpSpPr/>
       <p:sp>
         <p:nvSpPr>
           <p:cNvPr id="2" name="TextBox 1"/>
@@ -6209,7 +5886,7 @@
           <a:noFill/>
         </p:spPr>
         <p:txBody>
-          <a:bodyPr wrap="square" lIns="0" tIns="0" rIns="0" bIns="0" anchor="t">
+          <a:bodyPr wrap="square" anchor="t" lIns="0" rIns="0" tIns="0" bIns="0">
             <a:spAutoFit/>
           </a:bodyPr>
           <a:lstStyle/>
@@ -6239,16 +5916,16 @@
         </p:nvSpPr>
         <p:spPr>
           <a:xfrm>
-            <a:off x="6546850" y="1097280"/>
-            <a:ext cx="5066030" cy="2361865"/>
-          </a:xfrm>
-          <a:prstGeom prst="rect">
-            <a:avLst/>
-          </a:prstGeom>
-          <a:noFill/>
-        </p:spPr>
-        <p:txBody>
-          <a:bodyPr wrap="square" lIns="0" tIns="0" rIns="0" bIns="0" anchor="t">
+            <a:off x="548640" y="1097280"/>
+            <a:ext cx="11064240" cy="457200"/>
+          </a:xfrm>
+          <a:prstGeom prst="rect">
+            <a:avLst/>
+          </a:prstGeom>
+          <a:noFill/>
+        </p:spPr>
+        <p:txBody>
+          <a:bodyPr wrap="square" anchor="t" lIns="0" rIns="0" tIns="0" bIns="0">
             <a:spAutoFit/>
           </a:bodyPr>
           <a:lstStyle/>
@@ -6259,7 +5936,7 @@
               </a:lnSpc>
             </a:pPr>
             <a:r>
-              <a:rPr sz="2400" b="0" i="1" dirty="0">
+              <a:rPr sz="1300" b="0" i="1">
                 <a:solidFill>
                   <a:srgbClr val="707070"/>
                 </a:solidFill>
@@ -6286,8 +5963,8 @@
         </p:blipFill>
         <p:spPr>
           <a:xfrm>
-            <a:off x="0" y="1097279"/>
-            <a:ext cx="5930900" cy="4942417"/>
+            <a:off x="3337560" y="1828800"/>
+            <a:ext cx="5486400" cy="4572000"/>
           </a:xfrm>
           <a:prstGeom prst="rect">
             <a:avLst/>
@@ -6311,7 +5988,7 @@
           <a:noFill/>
         </p:spPr>
         <p:txBody>
-          <a:bodyPr wrap="square" lIns="0" tIns="0" rIns="0" bIns="0" anchor="t">
+          <a:bodyPr wrap="square" anchor="t" lIns="0" rIns="0" tIns="0" bIns="0">
             <a:spAutoFit/>
           </a:bodyPr>
           <a:lstStyle/>
@@ -6338,7 +6015,7 @@
 </file>
 
 <file path=ppt/slides/slide15.xml><?xml version="1.0" encoding="utf-8"?>
-<p:sld xmlns:a="http://schemas.openxmlformats.org/drawingml/2006/main" xmlns:r="http://schemas.openxmlformats.org/officeDocument/2006/relationships" xmlns:p="http://schemas.openxmlformats.org/presentationml/2006/main">
+<p:sld xmlns:a="http://schemas.openxmlformats.org/drawingml/2006/main" xmlns:p="http://schemas.openxmlformats.org/presentationml/2006/main" xmlns:r="http://schemas.openxmlformats.org/officeDocument/2006/relationships">
   <p:cSld>
     <p:spTree>
       <p:nvGrpSpPr>
@@ -6346,14 +6023,7 @@
         <p:cNvGrpSpPr/>
         <p:nvPr/>
       </p:nvGrpSpPr>
-      <p:grpSpPr>
-        <a:xfrm>
-          <a:off x="0" y="0"/>
-          <a:ext cx="0" cy="0"/>
-          <a:chOff x="0" y="0"/>
-          <a:chExt cx="0" cy="0"/>
-        </a:xfrm>
-      </p:grpSpPr>
+      <p:grpSpPr/>
       <p:sp>
         <p:nvSpPr>
           <p:cNvPr id="2" name="TextBox 1"/>
@@ -6371,7 +6041,7 @@
           <a:noFill/>
         </p:spPr>
         <p:txBody>
-          <a:bodyPr wrap="square" lIns="0" tIns="0" rIns="0" bIns="0" anchor="t">
+          <a:bodyPr wrap="square" anchor="t" lIns="0" rIns="0" tIns="0" bIns="0">
             <a:spAutoFit/>
           </a:bodyPr>
           <a:lstStyle/>
@@ -6401,16 +6071,16 @@
         </p:nvSpPr>
         <p:spPr>
           <a:xfrm>
-            <a:off x="5924550" y="1471374"/>
-            <a:ext cx="5218430" cy="2361865"/>
-          </a:xfrm>
-          <a:prstGeom prst="rect">
-            <a:avLst/>
-          </a:prstGeom>
-          <a:noFill/>
-        </p:spPr>
-        <p:txBody>
-          <a:bodyPr wrap="square" lIns="0" tIns="0" rIns="0" bIns="0" anchor="t">
+            <a:off x="548640" y="1097280"/>
+            <a:ext cx="11064240" cy="457200"/>
+          </a:xfrm>
+          <a:prstGeom prst="rect">
+            <a:avLst/>
+          </a:prstGeom>
+          <a:noFill/>
+        </p:spPr>
+        <p:txBody>
+          <a:bodyPr wrap="square" anchor="t" lIns="0" rIns="0" tIns="0" bIns="0">
             <a:spAutoFit/>
           </a:bodyPr>
           <a:lstStyle/>
@@ -6421,49 +6091,13 @@
               </a:lnSpc>
             </a:pPr>
             <a:r>
-              <a:rPr sz="2400" b="0" i="1" dirty="0">
+              <a:rPr sz="1300" b="0" i="1">
                 <a:solidFill>
                   <a:srgbClr val="707070"/>
                 </a:solidFill>
                 <a:latin typeface="Calibri"/>
               </a:rPr>
-              <a:t>Canonical 4-class </a:t>
-            </a:r>
-            <a:r>
-              <a:rPr sz="2400" b="0" i="1" dirty="0" err="1">
-                <a:solidFill>
-                  <a:srgbClr val="707070"/>
-                </a:solidFill>
-                <a:latin typeface="Calibri"/>
-              </a:rPr>
-              <a:t>HistGradientBoosting</a:t>
-            </a:r>
-            <a:r>
-              <a:rPr sz="2400" b="0" i="1" dirty="0">
-                <a:solidFill>
-                  <a:srgbClr val="707070"/>
-                </a:solidFill>
-                <a:latin typeface="Calibri"/>
-              </a:rPr>
-              <a:t>. DITTO leads, </a:t>
-            </a:r>
-            <a:r>
-              <a:rPr sz="2400" b="0" i="1" dirty="0" err="1">
-                <a:solidFill>
-                  <a:srgbClr val="707070"/>
-                </a:solidFill>
-                <a:latin typeface="Calibri"/>
-              </a:rPr>
-              <a:t>MetaRNN</a:t>
-            </a:r>
-            <a:r>
-              <a:rPr sz="2400" b="0" i="1" dirty="0">
-                <a:solidFill>
-                  <a:srgbClr val="707070"/>
-                </a:solidFill>
-                <a:latin typeface="Calibri"/>
-              </a:rPr>
-              <a:t> second, then population allele frequencies — the model is using both predictor scores and frequency data.</a:t>
+              <a:t>Canonical 4-class HistGradientBoosting. DITTO leads, MetaRNN second, then population allele frequencies — the model is using both predictor scores and frequency data.</a:t>
             </a:r>
           </a:p>
         </p:txBody>
@@ -6484,8 +6118,8 @@
         </p:blipFill>
         <p:spPr>
           <a:xfrm>
-            <a:off x="397510" y="1102995"/>
-            <a:ext cx="4790440" cy="5389245"/>
+            <a:off x="4048760" y="1828800"/>
+            <a:ext cx="4064000" cy="4572000"/>
           </a:xfrm>
           <a:prstGeom prst="rect">
             <a:avLst/>
@@ -6509,7 +6143,7 @@
           <a:noFill/>
         </p:spPr>
         <p:txBody>
-          <a:bodyPr wrap="square" lIns="0" tIns="0" rIns="0" bIns="0" anchor="t">
+          <a:bodyPr wrap="square" anchor="t" lIns="0" rIns="0" tIns="0" bIns="0">
             <a:spAutoFit/>
           </a:bodyPr>
           <a:lstStyle/>
@@ -6536,7 +6170,7 @@
 </file>
 
 <file path=ppt/slides/slide16.xml><?xml version="1.0" encoding="utf-8"?>
-<p:sld xmlns:a="http://schemas.openxmlformats.org/drawingml/2006/main" xmlns:r="http://schemas.openxmlformats.org/officeDocument/2006/relationships" xmlns:p="http://schemas.openxmlformats.org/presentationml/2006/main">
+<p:sld xmlns:a="http://schemas.openxmlformats.org/drawingml/2006/main" xmlns:p="http://schemas.openxmlformats.org/presentationml/2006/main" xmlns:r="http://schemas.openxmlformats.org/officeDocument/2006/relationships">
   <p:cSld>
     <p:spTree>
       <p:nvGrpSpPr>
@@ -6544,14 +6178,7 @@
         <p:cNvGrpSpPr/>
         <p:nvPr/>
       </p:nvGrpSpPr>
-      <p:grpSpPr>
-        <a:xfrm>
-          <a:off x="0" y="0"/>
-          <a:ext cx="0" cy="0"/>
-          <a:chOff x="0" y="0"/>
-          <a:chExt cx="0" cy="0"/>
-        </a:xfrm>
-      </p:grpSpPr>
+      <p:grpSpPr/>
       <p:sp>
         <p:nvSpPr>
           <p:cNvPr id="2" name="TextBox 1"/>
@@ -6569,7 +6196,7 @@
           <a:noFill/>
         </p:spPr>
         <p:txBody>
-          <a:bodyPr wrap="square" lIns="0" tIns="0" rIns="0" bIns="0" anchor="t">
+          <a:bodyPr wrap="square" anchor="t" lIns="0" rIns="0" tIns="0" bIns="0">
             <a:spAutoFit/>
           </a:bodyPr>
           <a:lstStyle/>
@@ -6587,6 +6214,45 @@
                 <a:latin typeface="Georgia"/>
               </a:rPr>
               <a:t>Predictor correlation — the redundancy structure</a:t>
+            </a:r>
+          </a:p>
+        </p:txBody>
+      </p:sp>
+      <p:sp>
+        <p:nvSpPr>
+          <p:cNvPr id="3" name="TextBox 2"/>
+          <p:cNvSpPr txBox="1"/>
+          <p:nvPr/>
+        </p:nvSpPr>
+        <p:spPr>
+          <a:xfrm>
+            <a:off x="548640" y="1371600"/>
+            <a:ext cx="11064240" cy="640080"/>
+          </a:xfrm>
+          <a:prstGeom prst="rect">
+            <a:avLst/>
+          </a:prstGeom>
+          <a:noFill/>
+        </p:spPr>
+        <p:txBody>
+          <a:bodyPr wrap="square" anchor="t" lIns="0" rIns="0" tIns="0" bIns="0">
+            <a:spAutoFit/>
+          </a:bodyPr>
+          <a:lstStyle/>
+          <a:p>
+            <a:pPr algn="l">
+              <a:lnSpc>
+                <a:spcPct val="130000"/>
+              </a:lnSpc>
+            </a:pPr>
+            <a:r>
+              <a:rPr sz="1300" b="0" i="1">
+                <a:solidFill>
+                  <a:srgbClr val="707070"/>
+                </a:solidFill>
+                <a:latin typeface="Calibri"/>
+              </a:rPr>
+              <a:t>Pearson correlation among key VEP scores + gnomAD AF. Predictor scores form a tight cluster; gnomAD AF sits in its own corner — the structural reason predictors substitute for each other, but population AF does not.</a:t>
             </a:r>
           </a:p>
         </p:txBody>
@@ -6607,8 +6273,8 @@
         </p:blipFill>
         <p:spPr>
           <a:xfrm>
-            <a:off x="0" y="848360"/>
-            <a:ext cx="6009640" cy="6009640"/>
+            <a:off x="4023360" y="2286000"/>
+            <a:ext cx="4114800" cy="4114800"/>
           </a:xfrm>
           <a:prstGeom prst="rect">
             <a:avLst/>
@@ -6632,7 +6298,7 @@
           <a:noFill/>
         </p:spPr>
         <p:txBody>
-          <a:bodyPr wrap="square" lIns="0" tIns="0" rIns="0" bIns="0" anchor="t">
+          <a:bodyPr wrap="square" anchor="t" lIns="0" rIns="0" tIns="0" bIns="0">
             <a:spAutoFit/>
           </a:bodyPr>
           <a:lstStyle/>
@@ -6646,81 +6312,6 @@
                 <a:latin typeface="Calibri"/>
               </a:rPr>
               <a:t>16 / 21</a:t>
-            </a:r>
-          </a:p>
-        </p:txBody>
-      </p:sp>
-      <p:sp>
-        <p:nvSpPr>
-          <p:cNvPr id="3" name="TextBox 2"/>
-          <p:cNvSpPr txBox="1"/>
-          <p:nvPr/>
-        </p:nvSpPr>
-        <p:spPr>
-          <a:xfrm>
-            <a:off x="5731510" y="1631950"/>
-            <a:ext cx="5885180" cy="3315651"/>
-          </a:xfrm>
-          <a:prstGeom prst="rect">
-            <a:avLst/>
-          </a:prstGeom>
-          <a:noFill/>
-        </p:spPr>
-        <p:txBody>
-          <a:bodyPr wrap="square" lIns="0" tIns="0" rIns="0" bIns="0" anchor="t">
-            <a:spAutoFit/>
-          </a:bodyPr>
-          <a:lstStyle/>
-          <a:p>
-            <a:pPr>
-              <a:lnSpc>
-                <a:spcPct val="130000"/>
-              </a:lnSpc>
-            </a:pPr>
-            <a:r>
-              <a:rPr sz="2800" b="0" i="1" dirty="0">
-                <a:solidFill>
-                  <a:srgbClr val="707070"/>
-                </a:solidFill>
-                <a:latin typeface="Calibri"/>
-              </a:rPr>
-              <a:t>Pearson correlation among key VEP scores + </a:t>
-            </a:r>
-            <a:r>
-              <a:rPr sz="2800" b="0" i="1" dirty="0" err="1">
-                <a:solidFill>
-                  <a:srgbClr val="707070"/>
-                </a:solidFill>
-                <a:latin typeface="Calibri"/>
-              </a:rPr>
-              <a:t>gnomAD</a:t>
-            </a:r>
-            <a:r>
-              <a:rPr sz="2800" b="0" i="1" dirty="0">
-                <a:solidFill>
-                  <a:srgbClr val="707070"/>
-                </a:solidFill>
-                <a:latin typeface="Calibri"/>
-              </a:rPr>
-              <a:t> AF. Predictor scores form a tight cluster; </a:t>
-            </a:r>
-            <a:r>
-              <a:rPr sz="2800" b="0" i="1" dirty="0" err="1">
-                <a:solidFill>
-                  <a:srgbClr val="707070"/>
-                </a:solidFill>
-                <a:latin typeface="Calibri"/>
-              </a:rPr>
-              <a:t>gnomAD</a:t>
-            </a:r>
-            <a:r>
-              <a:rPr sz="2800" b="0" i="1" dirty="0">
-                <a:solidFill>
-                  <a:srgbClr val="707070"/>
-                </a:solidFill>
-                <a:latin typeface="Calibri"/>
-              </a:rPr>
-              <a:t> AF sits in its own corner — the structural reason predictors substitute for each other, but population AF does not.</a:t>
             </a:r>
           </a:p>
         </p:txBody>
@@ -6734,7 +6325,7 @@
 </file>
 
 <file path=ppt/slides/slide17.xml><?xml version="1.0" encoding="utf-8"?>
-<p:sld xmlns:a="http://schemas.openxmlformats.org/drawingml/2006/main" xmlns:r="http://schemas.openxmlformats.org/officeDocument/2006/relationships" xmlns:p="http://schemas.openxmlformats.org/presentationml/2006/main">
+<p:sld xmlns:a="http://schemas.openxmlformats.org/drawingml/2006/main" xmlns:p="http://schemas.openxmlformats.org/presentationml/2006/main" xmlns:r="http://schemas.openxmlformats.org/officeDocument/2006/relationships">
   <p:cSld>
     <p:spTree>
       <p:nvGrpSpPr>
@@ -6742,14 +6333,7 @@
         <p:cNvGrpSpPr/>
         <p:nvPr/>
       </p:nvGrpSpPr>
-      <p:grpSpPr>
-        <a:xfrm>
-          <a:off x="0" y="0"/>
-          <a:ext cx="0" cy="0"/>
-          <a:chOff x="0" y="0"/>
-          <a:chExt cx="0" cy="0"/>
-        </a:xfrm>
-      </p:grpSpPr>
+      <p:grpSpPr/>
       <p:sp>
         <p:nvSpPr>
           <p:cNvPr id="2" name="TextBox 1"/>
@@ -6767,7 +6351,7 @@
           <a:noFill/>
         </p:spPr>
         <p:txBody>
-          <a:bodyPr wrap="square" lIns="0" tIns="0" rIns="0" bIns="0" anchor="t">
+          <a:bodyPr wrap="square" anchor="t" lIns="0" rIns="0" tIns="0" bIns="0">
             <a:spAutoFit/>
           </a:bodyPr>
           <a:lstStyle/>
@@ -6808,48 +6392,12 @@
                 <a:tableStyleId>{5C22544A-7EE6-4342-B048-85BDC9FD1C3A}</a:tableStyleId>
               </a:tblPr>
               <a:tblGrid>
-                <a:gridCol w="3108960">
-                  <a:extLst>
-                    <a:ext uri="{9D8B030D-6E8A-4147-A177-3AD203B41FA5}">
-                      <a16:colId xmlns:a16="http://schemas.microsoft.com/office/drawing/2014/main" val="20000"/>
-                    </a:ext>
-                  </a:extLst>
-                </a:gridCol>
-                <a:gridCol w="1554480">
-                  <a:extLst>
-                    <a:ext uri="{9D8B030D-6E8A-4147-A177-3AD203B41FA5}">
-                      <a16:colId xmlns:a16="http://schemas.microsoft.com/office/drawing/2014/main" val="20001"/>
-                    </a:ext>
-                  </a:extLst>
-                </a:gridCol>
-                <a:gridCol w="1554480">
-                  <a:extLst>
-                    <a:ext uri="{9D8B030D-6E8A-4147-A177-3AD203B41FA5}">
-                      <a16:colId xmlns:a16="http://schemas.microsoft.com/office/drawing/2014/main" val="20002"/>
-                    </a:ext>
-                  </a:extLst>
-                </a:gridCol>
-                <a:gridCol w="1554480">
-                  <a:extLst>
-                    <a:ext uri="{9D8B030D-6E8A-4147-A177-3AD203B41FA5}">
-                      <a16:colId xmlns:a16="http://schemas.microsoft.com/office/drawing/2014/main" val="20003"/>
-                    </a:ext>
-                  </a:extLst>
-                </a:gridCol>
-                <a:gridCol w="1554480">
-                  <a:extLst>
-                    <a:ext uri="{9D8B030D-6E8A-4147-A177-3AD203B41FA5}">
-                      <a16:colId xmlns:a16="http://schemas.microsoft.com/office/drawing/2014/main" val="20004"/>
-                    </a:ext>
-                  </a:extLst>
-                </a:gridCol>
-                <a:gridCol w="1737360">
-                  <a:extLst>
-                    <a:ext uri="{9D8B030D-6E8A-4147-A177-3AD203B41FA5}">
-                      <a16:colId xmlns:a16="http://schemas.microsoft.com/office/drawing/2014/main" val="20005"/>
-                    </a:ext>
-                  </a:extLst>
-                </a:gridCol>
+                <a:gridCol w="3108960"/>
+                <a:gridCol w="1554480"/>
+                <a:gridCol w="1554480"/>
+                <a:gridCol w="1554480"/>
+                <a:gridCol w="1554480"/>
+                <a:gridCol w="1737360"/>
               </a:tblGrid>
               <a:tr h="329184">
                 <a:tc>
@@ -6869,7 +6417,7 @@
                       </a:r>
                     </a:p>
                   </a:txBody>
-                  <a:tcPr marT="27432" marB="27432">
+                  <a:tcPr marL="91440" marR="91440" marT="27432" marB="27432">
                     <a:solidFill>
                       <a:srgbClr val="E8E8E8"/>
                     </a:solidFill>
@@ -6892,7 +6440,7 @@
                       </a:r>
                     </a:p>
                   </a:txBody>
-                  <a:tcPr marT="27432" marB="27432">
+                  <a:tcPr marL="91440" marR="91440" marT="27432" marB="27432">
                     <a:solidFill>
                       <a:srgbClr val="E8E8E8"/>
                     </a:solidFill>
@@ -6915,7 +6463,7 @@
                       </a:r>
                     </a:p>
                   </a:txBody>
-                  <a:tcPr marT="27432" marB="27432">
+                  <a:tcPr marL="91440" marR="91440" marT="27432" marB="27432">
                     <a:solidFill>
                       <a:srgbClr val="E8E8E8"/>
                     </a:solidFill>
@@ -6938,7 +6486,7 @@
                       </a:r>
                     </a:p>
                   </a:txBody>
-                  <a:tcPr marT="27432" marB="27432">
+                  <a:tcPr marL="91440" marR="91440" marT="27432" marB="27432">
                     <a:solidFill>
                       <a:srgbClr val="E8E8E8"/>
                     </a:solidFill>
@@ -6961,7 +6509,7 @@
                       </a:r>
                     </a:p>
                   </a:txBody>
-                  <a:tcPr marT="27432" marB="27432">
+                  <a:tcPr marL="91440" marR="91440" marT="27432" marB="27432">
                     <a:solidFill>
                       <a:srgbClr val="E8E8E8"/>
                     </a:solidFill>
@@ -6984,17 +6532,12 @@
                       </a:r>
                     </a:p>
                   </a:txBody>
-                  <a:tcPr marT="27432" marB="27432">
+                  <a:tcPr marL="91440" marR="91440" marT="27432" marB="27432">
                     <a:solidFill>
                       <a:srgbClr val="E8E8E8"/>
                     </a:solidFill>
                   </a:tcPr>
                 </a:tc>
-                <a:extLst>
-                  <a:ext uri="{0D108BD9-81ED-4DB2-BD59-A6C34878D82A}">
-                    <a16:rowId xmlns:a16="http://schemas.microsoft.com/office/drawing/2014/main" val="10000"/>
-                  </a:ext>
-                </a:extLst>
               </a:tr>
               <a:tr h="329184">
                 <a:tc>
@@ -7014,7 +6557,7 @@
                       </a:r>
                     </a:p>
                   </a:txBody>
-                  <a:tcPr marT="27432" marB="27432">
+                  <a:tcPr marL="91440" marR="91440" marT="27432" marB="27432">
                     <a:solidFill>
                       <a:srgbClr val="FFFFFF"/>
                     </a:solidFill>
@@ -7037,7 +6580,7 @@
                       </a:r>
                     </a:p>
                   </a:txBody>
-                  <a:tcPr marT="27432" marB="27432">
+                  <a:tcPr marL="91440" marR="91440" marT="27432" marB="27432">
                     <a:solidFill>
                       <a:srgbClr val="FFFFFF"/>
                     </a:solidFill>
@@ -7060,7 +6603,7 @@
                       </a:r>
                     </a:p>
                   </a:txBody>
-                  <a:tcPr marT="27432" marB="27432">
+                  <a:tcPr marL="91440" marR="91440" marT="27432" marB="27432">
                     <a:solidFill>
                       <a:srgbClr val="FFFFFF"/>
                     </a:solidFill>
@@ -7083,7 +6626,7 @@
                       </a:r>
                     </a:p>
                   </a:txBody>
-                  <a:tcPr marT="27432" marB="27432">
+                  <a:tcPr marL="91440" marR="91440" marT="27432" marB="27432">
                     <a:solidFill>
                       <a:srgbClr val="FFFFFF"/>
                     </a:solidFill>
@@ -7106,7 +6649,7 @@
                       </a:r>
                     </a:p>
                   </a:txBody>
-                  <a:tcPr marT="27432" marB="27432">
+                  <a:tcPr marL="91440" marR="91440" marT="27432" marB="27432">
                     <a:solidFill>
                       <a:srgbClr val="FFFFFF"/>
                     </a:solidFill>
@@ -7129,17 +6672,12 @@
                       </a:r>
                     </a:p>
                   </a:txBody>
-                  <a:tcPr marT="27432" marB="27432">
+                  <a:tcPr marL="91440" marR="91440" marT="27432" marB="27432">
                     <a:solidFill>
                       <a:srgbClr val="FFFFFF"/>
                     </a:solidFill>
                   </a:tcPr>
                 </a:tc>
-                <a:extLst>
-                  <a:ext uri="{0D108BD9-81ED-4DB2-BD59-A6C34878D82A}">
-                    <a16:rowId xmlns:a16="http://schemas.microsoft.com/office/drawing/2014/main" val="10001"/>
-                  </a:ext>
-                </a:extLst>
               </a:tr>
               <a:tr h="329184">
                 <a:tc>
@@ -7159,7 +6697,7 @@
                       </a:r>
                     </a:p>
                   </a:txBody>
-                  <a:tcPr marT="27432" marB="27432">
+                  <a:tcPr marL="91440" marR="91440" marT="27432" marB="27432">
                     <a:solidFill>
                       <a:srgbClr val="FFFFFF"/>
                     </a:solidFill>
@@ -7182,7 +6720,7 @@
                       </a:r>
                     </a:p>
                   </a:txBody>
-                  <a:tcPr marT="27432" marB="27432">
+                  <a:tcPr marL="91440" marR="91440" marT="27432" marB="27432">
                     <a:solidFill>
                       <a:srgbClr val="FFFFFF"/>
                     </a:solidFill>
@@ -7205,7 +6743,7 @@
                       </a:r>
                     </a:p>
                   </a:txBody>
-                  <a:tcPr marT="27432" marB="27432">
+                  <a:tcPr marL="91440" marR="91440" marT="27432" marB="27432">
                     <a:solidFill>
                       <a:srgbClr val="FFFFFF"/>
                     </a:solidFill>
@@ -7228,7 +6766,7 @@
                       </a:r>
                     </a:p>
                   </a:txBody>
-                  <a:tcPr marT="27432" marB="27432">
+                  <a:tcPr marL="91440" marR="91440" marT="27432" marB="27432">
                     <a:solidFill>
                       <a:srgbClr val="FFFFFF"/>
                     </a:solidFill>
@@ -7251,7 +6789,7 @@
                       </a:r>
                     </a:p>
                   </a:txBody>
-                  <a:tcPr marT="27432" marB="27432">
+                  <a:tcPr marL="91440" marR="91440" marT="27432" marB="27432">
                     <a:solidFill>
                       <a:srgbClr val="FFFFFF"/>
                     </a:solidFill>
@@ -7274,17 +6812,12 @@
                       </a:r>
                     </a:p>
                   </a:txBody>
-                  <a:tcPr marT="27432" marB="27432">
+                  <a:tcPr marL="91440" marR="91440" marT="27432" marB="27432">
                     <a:solidFill>
                       <a:srgbClr val="FFFFFF"/>
                     </a:solidFill>
                   </a:tcPr>
                 </a:tc>
-                <a:extLst>
-                  <a:ext uri="{0D108BD9-81ED-4DB2-BD59-A6C34878D82A}">
-                    <a16:rowId xmlns:a16="http://schemas.microsoft.com/office/drawing/2014/main" val="10002"/>
-                  </a:ext>
-                </a:extLst>
               </a:tr>
               <a:tr h="329184">
                 <a:tc>
@@ -7304,7 +6837,7 @@
                       </a:r>
                     </a:p>
                   </a:txBody>
-                  <a:tcPr marT="27432" marB="27432">
+                  <a:tcPr marL="91440" marR="91440" marT="27432" marB="27432">
                     <a:solidFill>
                       <a:srgbClr val="FFFFFF"/>
                     </a:solidFill>
@@ -7327,7 +6860,7 @@
                       </a:r>
                     </a:p>
                   </a:txBody>
-                  <a:tcPr marT="27432" marB="27432">
+                  <a:tcPr marL="91440" marR="91440" marT="27432" marB="27432">
                     <a:solidFill>
                       <a:srgbClr val="FFFFFF"/>
                     </a:solidFill>
@@ -7350,7 +6883,7 @@
                       </a:r>
                     </a:p>
                   </a:txBody>
-                  <a:tcPr marT="27432" marB="27432">
+                  <a:tcPr marL="91440" marR="91440" marT="27432" marB="27432">
                     <a:solidFill>
                       <a:srgbClr val="FFFFFF"/>
                     </a:solidFill>
@@ -7373,7 +6906,7 @@
                       </a:r>
                     </a:p>
                   </a:txBody>
-                  <a:tcPr marT="27432" marB="27432">
+                  <a:tcPr marL="91440" marR="91440" marT="27432" marB="27432">
                     <a:solidFill>
                       <a:srgbClr val="FFFFFF"/>
                     </a:solidFill>
@@ -7396,7 +6929,7 @@
                       </a:r>
                     </a:p>
                   </a:txBody>
-                  <a:tcPr marT="27432" marB="27432">
+                  <a:tcPr marL="91440" marR="91440" marT="27432" marB="27432">
                     <a:solidFill>
                       <a:srgbClr val="FFFFFF"/>
                     </a:solidFill>
@@ -7419,17 +6952,12 @@
                       </a:r>
                     </a:p>
                   </a:txBody>
-                  <a:tcPr marT="27432" marB="27432">
+                  <a:tcPr marL="91440" marR="91440" marT="27432" marB="27432">
                     <a:solidFill>
                       <a:srgbClr val="FFFFFF"/>
                     </a:solidFill>
                   </a:tcPr>
                 </a:tc>
-                <a:extLst>
-                  <a:ext uri="{0D108BD9-81ED-4DB2-BD59-A6C34878D82A}">
-                    <a16:rowId xmlns:a16="http://schemas.microsoft.com/office/drawing/2014/main" val="10003"/>
-                  </a:ext>
-                </a:extLst>
               </a:tr>
               <a:tr h="329184">
                 <a:tc>
@@ -7449,7 +6977,7 @@
                       </a:r>
                     </a:p>
                   </a:txBody>
-                  <a:tcPr marT="27432" marB="27432">
+                  <a:tcPr marL="91440" marR="91440" marT="27432" marB="27432">
                     <a:solidFill>
                       <a:srgbClr val="FFFFFF"/>
                     </a:solidFill>
@@ -7472,7 +7000,7 @@
                       </a:r>
                     </a:p>
                   </a:txBody>
-                  <a:tcPr marT="27432" marB="27432">
+                  <a:tcPr marL="91440" marR="91440" marT="27432" marB="27432">
                     <a:solidFill>
                       <a:srgbClr val="FFFFFF"/>
                     </a:solidFill>
@@ -7495,7 +7023,7 @@
                       </a:r>
                     </a:p>
                   </a:txBody>
-                  <a:tcPr marT="27432" marB="27432">
+                  <a:tcPr marL="91440" marR="91440" marT="27432" marB="27432">
                     <a:solidFill>
                       <a:srgbClr val="FFFFFF"/>
                     </a:solidFill>
@@ -7518,7 +7046,7 @@
                       </a:r>
                     </a:p>
                   </a:txBody>
-                  <a:tcPr marT="27432" marB="27432">
+                  <a:tcPr marL="91440" marR="91440" marT="27432" marB="27432">
                     <a:solidFill>
                       <a:srgbClr val="FFFFFF"/>
                     </a:solidFill>
@@ -7541,7 +7069,7 @@
                       </a:r>
                     </a:p>
                   </a:txBody>
-                  <a:tcPr marT="27432" marB="27432">
+                  <a:tcPr marL="91440" marR="91440" marT="27432" marB="27432">
                     <a:solidFill>
                       <a:srgbClr val="FFFFFF"/>
                     </a:solidFill>
@@ -7564,17 +7092,12 @@
                       </a:r>
                     </a:p>
                   </a:txBody>
-                  <a:tcPr marT="27432" marB="27432">
+                  <a:tcPr marL="91440" marR="91440" marT="27432" marB="27432">
                     <a:solidFill>
                       <a:srgbClr val="FFFFFF"/>
                     </a:solidFill>
                   </a:tcPr>
                 </a:tc>
-                <a:extLst>
-                  <a:ext uri="{0D108BD9-81ED-4DB2-BD59-A6C34878D82A}">
-                    <a16:rowId xmlns:a16="http://schemas.microsoft.com/office/drawing/2014/main" val="10004"/>
-                  </a:ext>
-                </a:extLst>
               </a:tr>
               <a:tr h="329184">
                 <a:tc>
@@ -7594,7 +7117,7 @@
                       </a:r>
                     </a:p>
                   </a:txBody>
-                  <a:tcPr marT="27432" marB="27432">
+                  <a:tcPr marL="91440" marR="91440" marT="27432" marB="27432">
                     <a:solidFill>
                       <a:srgbClr val="FFFFFF"/>
                     </a:solidFill>
@@ -7617,7 +7140,7 @@
                       </a:r>
                     </a:p>
                   </a:txBody>
-                  <a:tcPr marT="27432" marB="27432">
+                  <a:tcPr marL="91440" marR="91440" marT="27432" marB="27432">
                     <a:solidFill>
                       <a:srgbClr val="FFFFFF"/>
                     </a:solidFill>
@@ -7640,7 +7163,7 @@
                       </a:r>
                     </a:p>
                   </a:txBody>
-                  <a:tcPr marT="27432" marB="27432">
+                  <a:tcPr marL="91440" marR="91440" marT="27432" marB="27432">
                     <a:solidFill>
                       <a:srgbClr val="FFFFFF"/>
                     </a:solidFill>
@@ -7663,7 +7186,7 @@
                       </a:r>
                     </a:p>
                   </a:txBody>
-                  <a:tcPr marT="27432" marB="27432">
+                  <a:tcPr marL="91440" marR="91440" marT="27432" marB="27432">
                     <a:solidFill>
                       <a:srgbClr val="FFFFFF"/>
                     </a:solidFill>
@@ -7686,7 +7209,7 @@
                       </a:r>
                     </a:p>
                   </a:txBody>
-                  <a:tcPr marT="27432" marB="27432">
+                  <a:tcPr marL="91440" marR="91440" marT="27432" marB="27432">
                     <a:solidFill>
                       <a:srgbClr val="FFFFFF"/>
                     </a:solidFill>
@@ -7709,17 +7232,12 @@
                       </a:r>
                     </a:p>
                   </a:txBody>
-                  <a:tcPr marT="27432" marB="27432">
+                  <a:tcPr marL="91440" marR="91440" marT="27432" marB="27432">
                     <a:solidFill>
                       <a:srgbClr val="FFFFFF"/>
                     </a:solidFill>
                   </a:tcPr>
                 </a:tc>
-                <a:extLst>
-                  <a:ext uri="{0D108BD9-81ED-4DB2-BD59-A6C34878D82A}">
-                    <a16:rowId xmlns:a16="http://schemas.microsoft.com/office/drawing/2014/main" val="10005"/>
-                  </a:ext>
-                </a:extLst>
               </a:tr>
               <a:tr h="329184">
                 <a:tc>
@@ -7739,7 +7257,7 @@
                       </a:r>
                     </a:p>
                   </a:txBody>
-                  <a:tcPr marT="27432" marB="27432">
+                  <a:tcPr marL="91440" marR="91440" marT="27432" marB="27432">
                     <a:solidFill>
                       <a:srgbClr val="FFFFFF"/>
                     </a:solidFill>
@@ -7762,7 +7280,7 @@
                       </a:r>
                     </a:p>
                   </a:txBody>
-                  <a:tcPr marT="27432" marB="27432">
+                  <a:tcPr marL="91440" marR="91440" marT="27432" marB="27432">
                     <a:solidFill>
                       <a:srgbClr val="FFFFFF"/>
                     </a:solidFill>
@@ -7785,7 +7303,7 @@
                       </a:r>
                     </a:p>
                   </a:txBody>
-                  <a:tcPr marT="27432" marB="27432">
+                  <a:tcPr marL="91440" marR="91440" marT="27432" marB="27432">
                     <a:solidFill>
                       <a:srgbClr val="FFFFFF"/>
                     </a:solidFill>
@@ -7808,7 +7326,7 @@
                       </a:r>
                     </a:p>
                   </a:txBody>
-                  <a:tcPr marT="27432" marB="27432">
+                  <a:tcPr marL="91440" marR="91440" marT="27432" marB="27432">
                     <a:solidFill>
                       <a:srgbClr val="FFFFFF"/>
                     </a:solidFill>
@@ -7831,7 +7349,7 @@
                       </a:r>
                     </a:p>
                   </a:txBody>
-                  <a:tcPr marT="27432" marB="27432">
+                  <a:tcPr marL="91440" marR="91440" marT="27432" marB="27432">
                     <a:solidFill>
                       <a:srgbClr val="FFFFFF"/>
                     </a:solidFill>
@@ -7854,17 +7372,12 @@
                       </a:r>
                     </a:p>
                   </a:txBody>
-                  <a:tcPr marT="27432" marB="27432">
+                  <a:tcPr marL="91440" marR="91440" marT="27432" marB="27432">
                     <a:solidFill>
                       <a:srgbClr val="FFFFFF"/>
                     </a:solidFill>
                   </a:tcPr>
                 </a:tc>
-                <a:extLst>
-                  <a:ext uri="{0D108BD9-81ED-4DB2-BD59-A6C34878D82A}">
-                    <a16:rowId xmlns:a16="http://schemas.microsoft.com/office/drawing/2014/main" val="10006"/>
-                  </a:ext>
-                </a:extLst>
               </a:tr>
               <a:tr h="329184">
                 <a:tc>
@@ -7884,7 +7397,7 @@
                       </a:r>
                     </a:p>
                   </a:txBody>
-                  <a:tcPr marT="27432" marB="27432">
+                  <a:tcPr marL="91440" marR="91440" marT="27432" marB="27432">
                     <a:solidFill>
                       <a:srgbClr val="FFFFFF"/>
                     </a:solidFill>
@@ -7907,7 +7420,7 @@
                       </a:r>
                     </a:p>
                   </a:txBody>
-                  <a:tcPr marT="27432" marB="27432">
+                  <a:tcPr marL="91440" marR="91440" marT="27432" marB="27432">
                     <a:solidFill>
                       <a:srgbClr val="FFFFFF"/>
                     </a:solidFill>
@@ -7930,7 +7443,7 @@
                       </a:r>
                     </a:p>
                   </a:txBody>
-                  <a:tcPr marT="27432" marB="27432">
+                  <a:tcPr marL="91440" marR="91440" marT="27432" marB="27432">
                     <a:solidFill>
                       <a:srgbClr val="FFFFFF"/>
                     </a:solidFill>
@@ -7953,7 +7466,7 @@
                       </a:r>
                     </a:p>
                   </a:txBody>
-                  <a:tcPr marT="27432" marB="27432">
+                  <a:tcPr marL="91440" marR="91440" marT="27432" marB="27432">
                     <a:solidFill>
                       <a:srgbClr val="FFFFFF"/>
                     </a:solidFill>
@@ -7976,7 +7489,7 @@
                       </a:r>
                     </a:p>
                   </a:txBody>
-                  <a:tcPr marT="27432" marB="27432">
+                  <a:tcPr marL="91440" marR="91440" marT="27432" marB="27432">
                     <a:solidFill>
                       <a:srgbClr val="FFFFFF"/>
                     </a:solidFill>
@@ -7999,17 +7512,12 @@
                       </a:r>
                     </a:p>
                   </a:txBody>
-                  <a:tcPr marT="27432" marB="27432">
+                  <a:tcPr marL="91440" marR="91440" marT="27432" marB="27432">
                     <a:solidFill>
                       <a:srgbClr val="FFFFFF"/>
                     </a:solidFill>
                   </a:tcPr>
                 </a:tc>
-                <a:extLst>
-                  <a:ext uri="{0D108BD9-81ED-4DB2-BD59-A6C34878D82A}">
-                    <a16:rowId xmlns:a16="http://schemas.microsoft.com/office/drawing/2014/main" val="10007"/>
-                  </a:ext>
-                </a:extLst>
               </a:tr>
               <a:tr h="329184">
                 <a:tc>
@@ -8029,7 +7537,7 @@
                       </a:r>
                     </a:p>
                   </a:txBody>
-                  <a:tcPr marT="27432" marB="27432">
+                  <a:tcPr marL="91440" marR="91440" marT="27432" marB="27432">
                     <a:solidFill>
                       <a:srgbClr val="FFFFFF"/>
                     </a:solidFill>
@@ -8052,7 +7560,7 @@
                       </a:r>
                     </a:p>
                   </a:txBody>
-                  <a:tcPr marT="27432" marB="27432">
+                  <a:tcPr marL="91440" marR="91440" marT="27432" marB="27432">
                     <a:solidFill>
                       <a:srgbClr val="FFFFFF"/>
                     </a:solidFill>
@@ -8075,7 +7583,7 @@
                       </a:r>
                     </a:p>
                   </a:txBody>
-                  <a:tcPr marT="27432" marB="27432">
+                  <a:tcPr marL="91440" marR="91440" marT="27432" marB="27432">
                     <a:solidFill>
                       <a:srgbClr val="FFFFFF"/>
                     </a:solidFill>
@@ -8098,7 +7606,7 @@
                       </a:r>
                     </a:p>
                   </a:txBody>
-                  <a:tcPr marT="27432" marB="27432">
+                  <a:tcPr marL="91440" marR="91440" marT="27432" marB="27432">
                     <a:solidFill>
                       <a:srgbClr val="FFFFFF"/>
                     </a:solidFill>
@@ -8121,7 +7629,7 @@
                       </a:r>
                     </a:p>
                   </a:txBody>
-                  <a:tcPr marT="27432" marB="27432">
+                  <a:tcPr marL="91440" marR="91440" marT="27432" marB="27432">
                     <a:solidFill>
                       <a:srgbClr val="FFFFFF"/>
                     </a:solidFill>
@@ -8144,17 +7652,12 @@
                       </a:r>
                     </a:p>
                   </a:txBody>
-                  <a:tcPr marT="27432" marB="27432">
+                  <a:tcPr marL="91440" marR="91440" marT="27432" marB="27432">
                     <a:solidFill>
                       <a:srgbClr val="FFFFFF"/>
                     </a:solidFill>
                   </a:tcPr>
                 </a:tc>
-                <a:extLst>
-                  <a:ext uri="{0D108BD9-81ED-4DB2-BD59-A6C34878D82A}">
-                    <a16:rowId xmlns:a16="http://schemas.microsoft.com/office/drawing/2014/main" val="10008"/>
-                  </a:ext>
-                </a:extLst>
               </a:tr>
               <a:tr h="329184">
                 <a:tc>
@@ -8174,7 +7677,7 @@
                       </a:r>
                     </a:p>
                   </a:txBody>
-                  <a:tcPr marT="27432" marB="27432">
+                  <a:tcPr marL="91440" marR="91440" marT="27432" marB="27432">
                     <a:solidFill>
                       <a:srgbClr val="FFFFFF"/>
                     </a:solidFill>
@@ -8197,7 +7700,7 @@
                       </a:r>
                     </a:p>
                   </a:txBody>
-                  <a:tcPr marT="27432" marB="27432">
+                  <a:tcPr marL="91440" marR="91440" marT="27432" marB="27432">
                     <a:solidFill>
                       <a:srgbClr val="FFFFFF"/>
                     </a:solidFill>
@@ -8220,7 +7723,7 @@
                       </a:r>
                     </a:p>
                   </a:txBody>
-                  <a:tcPr marT="27432" marB="27432">
+                  <a:tcPr marL="91440" marR="91440" marT="27432" marB="27432">
                     <a:solidFill>
                       <a:srgbClr val="FFFFFF"/>
                     </a:solidFill>
@@ -8243,7 +7746,7 @@
                       </a:r>
                     </a:p>
                   </a:txBody>
-                  <a:tcPr marT="27432" marB="27432">
+                  <a:tcPr marL="91440" marR="91440" marT="27432" marB="27432">
                     <a:solidFill>
                       <a:srgbClr val="FFFFFF"/>
                     </a:solidFill>
@@ -8266,7 +7769,7 @@
                       </a:r>
                     </a:p>
                   </a:txBody>
-                  <a:tcPr marT="27432" marB="27432">
+                  <a:tcPr marL="91440" marR="91440" marT="27432" marB="27432">
                     <a:solidFill>
                       <a:srgbClr val="FFFFFF"/>
                     </a:solidFill>
@@ -8289,17 +7792,12 @@
                       </a:r>
                     </a:p>
                   </a:txBody>
-                  <a:tcPr marT="27432" marB="27432">
+                  <a:tcPr marL="91440" marR="91440" marT="27432" marB="27432">
                     <a:solidFill>
                       <a:srgbClr val="FFFFFF"/>
                     </a:solidFill>
                   </a:tcPr>
                 </a:tc>
-                <a:extLst>
-                  <a:ext uri="{0D108BD9-81ED-4DB2-BD59-A6C34878D82A}">
-                    <a16:rowId xmlns:a16="http://schemas.microsoft.com/office/drawing/2014/main" val="10009"/>
-                  </a:ext>
-                </a:extLst>
               </a:tr>
               <a:tr h="329184">
                 <a:tc>
@@ -8319,7 +7817,7 @@
                       </a:r>
                     </a:p>
                   </a:txBody>
-                  <a:tcPr marT="27432" marB="27432">
+                  <a:tcPr marL="91440" marR="91440" marT="27432" marB="27432">
                     <a:solidFill>
                       <a:srgbClr val="FFFFFF"/>
                     </a:solidFill>
@@ -8342,7 +7840,7 @@
                       </a:r>
                     </a:p>
                   </a:txBody>
-                  <a:tcPr marT="27432" marB="27432">
+                  <a:tcPr marL="91440" marR="91440" marT="27432" marB="27432">
                     <a:solidFill>
                       <a:srgbClr val="FFFFFF"/>
                     </a:solidFill>
@@ -8365,7 +7863,7 @@
                       </a:r>
                     </a:p>
                   </a:txBody>
-                  <a:tcPr marT="27432" marB="27432">
+                  <a:tcPr marL="91440" marR="91440" marT="27432" marB="27432">
                     <a:solidFill>
                       <a:srgbClr val="FFFFFF"/>
                     </a:solidFill>
@@ -8388,7 +7886,7 @@
                       </a:r>
                     </a:p>
                   </a:txBody>
-                  <a:tcPr marT="27432" marB="27432">
+                  <a:tcPr marL="91440" marR="91440" marT="27432" marB="27432">
                     <a:solidFill>
                       <a:srgbClr val="FFFFFF"/>
                     </a:solidFill>
@@ -8411,7 +7909,7 @@
                       </a:r>
                     </a:p>
                   </a:txBody>
-                  <a:tcPr marT="27432" marB="27432">
+                  <a:tcPr marL="91440" marR="91440" marT="27432" marB="27432">
                     <a:solidFill>
                       <a:srgbClr val="FFFFFF"/>
                     </a:solidFill>
@@ -8434,17 +7932,12 @@
                       </a:r>
                     </a:p>
                   </a:txBody>
-                  <a:tcPr marT="27432" marB="27432">
+                  <a:tcPr marL="91440" marR="91440" marT="27432" marB="27432">
                     <a:solidFill>
                       <a:srgbClr val="FFFFFF"/>
                     </a:solidFill>
                   </a:tcPr>
                 </a:tc>
-                <a:extLst>
-                  <a:ext uri="{0D108BD9-81ED-4DB2-BD59-A6C34878D82A}">
-                    <a16:rowId xmlns:a16="http://schemas.microsoft.com/office/drawing/2014/main" val="10010"/>
-                  </a:ext>
-                </a:extLst>
               </a:tr>
               <a:tr h="329184">
                 <a:tc>
@@ -8464,7 +7957,7 @@
                       </a:r>
                     </a:p>
                   </a:txBody>
-                  <a:tcPr marT="27432" marB="27432">
+                  <a:tcPr marL="91440" marR="91440" marT="27432" marB="27432">
                     <a:solidFill>
                       <a:srgbClr val="FFFFFF"/>
                     </a:solidFill>
@@ -8487,7 +7980,7 @@
                       </a:r>
                     </a:p>
                   </a:txBody>
-                  <a:tcPr marT="27432" marB="27432">
+                  <a:tcPr marL="91440" marR="91440" marT="27432" marB="27432">
                     <a:solidFill>
                       <a:srgbClr val="FFFFFF"/>
                     </a:solidFill>
@@ -8510,7 +8003,7 @@
                       </a:r>
                     </a:p>
                   </a:txBody>
-                  <a:tcPr marT="27432" marB="27432">
+                  <a:tcPr marL="91440" marR="91440" marT="27432" marB="27432">
                     <a:solidFill>
                       <a:srgbClr val="FFFFFF"/>
                     </a:solidFill>
@@ -8533,7 +8026,7 @@
                       </a:r>
                     </a:p>
                   </a:txBody>
-                  <a:tcPr marT="27432" marB="27432">
+                  <a:tcPr marL="91440" marR="91440" marT="27432" marB="27432">
                     <a:solidFill>
                       <a:srgbClr val="FFFFFF"/>
                     </a:solidFill>
@@ -8556,7 +8049,7 @@
                       </a:r>
                     </a:p>
                   </a:txBody>
-                  <a:tcPr marT="27432" marB="27432">
+                  <a:tcPr marL="91440" marR="91440" marT="27432" marB="27432">
                     <a:solidFill>
                       <a:srgbClr val="FFFFFF"/>
                     </a:solidFill>
@@ -8579,17 +8072,12 @@
                       </a:r>
                     </a:p>
                   </a:txBody>
-                  <a:tcPr marT="27432" marB="27432">
+                  <a:tcPr marL="91440" marR="91440" marT="27432" marB="27432">
                     <a:solidFill>
                       <a:srgbClr val="FFFFFF"/>
                     </a:solidFill>
                   </a:tcPr>
                 </a:tc>
-                <a:extLst>
-                  <a:ext uri="{0D108BD9-81ED-4DB2-BD59-A6C34878D82A}">
-                    <a16:rowId xmlns:a16="http://schemas.microsoft.com/office/drawing/2014/main" val="10011"/>
-                  </a:ext>
-                </a:extLst>
               </a:tr>
               <a:tr h="329184">
                 <a:tc>
@@ -8609,7 +8097,7 @@
                       </a:r>
                     </a:p>
                   </a:txBody>
-                  <a:tcPr marT="27432" marB="27432">
+                  <a:tcPr marL="91440" marR="91440" marT="27432" marB="27432">
                     <a:solidFill>
                       <a:srgbClr val="FFFFFF"/>
                     </a:solidFill>
@@ -8632,7 +8120,7 @@
                       </a:r>
                     </a:p>
                   </a:txBody>
-                  <a:tcPr marT="27432" marB="27432">
+                  <a:tcPr marL="91440" marR="91440" marT="27432" marB="27432">
                     <a:solidFill>
                       <a:srgbClr val="FFFFFF"/>
                     </a:solidFill>
@@ -8655,7 +8143,7 @@
                       </a:r>
                     </a:p>
                   </a:txBody>
-                  <a:tcPr marT="27432" marB="27432">
+                  <a:tcPr marL="91440" marR="91440" marT="27432" marB="27432">
                     <a:solidFill>
                       <a:srgbClr val="FFFFFF"/>
                     </a:solidFill>
@@ -8678,7 +8166,7 @@
                       </a:r>
                     </a:p>
                   </a:txBody>
-                  <a:tcPr marT="27432" marB="27432">
+                  <a:tcPr marL="91440" marR="91440" marT="27432" marB="27432">
                     <a:solidFill>
                       <a:srgbClr val="FFFFFF"/>
                     </a:solidFill>
@@ -8701,7 +8189,7 @@
                       </a:r>
                     </a:p>
                   </a:txBody>
-                  <a:tcPr marT="27432" marB="27432">
+                  <a:tcPr marL="91440" marR="91440" marT="27432" marB="27432">
                     <a:solidFill>
                       <a:srgbClr val="FFFFFF"/>
                     </a:solidFill>
@@ -8724,17 +8212,12 @@
                       </a:r>
                     </a:p>
                   </a:txBody>
-                  <a:tcPr marT="27432" marB="27432">
+                  <a:tcPr marL="91440" marR="91440" marT="27432" marB="27432">
                     <a:solidFill>
                       <a:srgbClr val="FFFFFF"/>
                     </a:solidFill>
                   </a:tcPr>
                 </a:tc>
-                <a:extLst>
-                  <a:ext uri="{0D108BD9-81ED-4DB2-BD59-A6C34878D82A}">
-                    <a16:rowId xmlns:a16="http://schemas.microsoft.com/office/drawing/2014/main" val="10012"/>
-                  </a:ext>
-                </a:extLst>
               </a:tr>
             </a:tbl>
           </a:graphicData>
@@ -8757,7 +8240,7 @@
           <a:noFill/>
         </p:spPr>
         <p:txBody>
-          <a:bodyPr wrap="square" lIns="0" tIns="0" rIns="0" bIns="0" anchor="t">
+          <a:bodyPr wrap="square" anchor="t" lIns="0" rIns="0" tIns="0" bIns="0">
             <a:spAutoFit/>
           </a:bodyPr>
           <a:lstStyle/>
@@ -8796,7 +8279,7 @@
           <a:noFill/>
         </p:spPr>
         <p:txBody>
-          <a:bodyPr wrap="square" lIns="0" tIns="0" rIns="0" bIns="0" anchor="t">
+          <a:bodyPr wrap="square" anchor="t" lIns="0" rIns="0" tIns="0" bIns="0">
             <a:spAutoFit/>
           </a:bodyPr>
           <a:lstStyle/>
@@ -8823,7 +8306,7 @@
 </file>
 
 <file path=ppt/slides/slide18.xml><?xml version="1.0" encoding="utf-8"?>
-<p:sld xmlns:a="http://schemas.openxmlformats.org/drawingml/2006/main" xmlns:r="http://schemas.openxmlformats.org/officeDocument/2006/relationships" xmlns:p="http://schemas.openxmlformats.org/presentationml/2006/main">
+<p:sld xmlns:a="http://schemas.openxmlformats.org/drawingml/2006/main" xmlns:p="http://schemas.openxmlformats.org/presentationml/2006/main" xmlns:r="http://schemas.openxmlformats.org/officeDocument/2006/relationships">
   <p:cSld>
     <p:spTree>
       <p:nvGrpSpPr>
@@ -8831,14 +8314,7 @@
         <p:cNvGrpSpPr/>
         <p:nvPr/>
       </p:nvGrpSpPr>
-      <p:grpSpPr>
-        <a:xfrm>
-          <a:off x="0" y="0"/>
-          <a:ext cx="0" cy="0"/>
-          <a:chOff x="0" y="0"/>
-          <a:chExt cx="0" cy="0"/>
-        </a:xfrm>
-      </p:grpSpPr>
+      <p:grpSpPr/>
       <p:sp>
         <p:nvSpPr>
           <p:cNvPr id="2" name="TextBox 1"/>
@@ -8856,7 +8332,7 @@
           <a:noFill/>
         </p:spPr>
         <p:txBody>
-          <a:bodyPr wrap="square" lIns="0" tIns="0" rIns="0" bIns="0" anchor="t">
+          <a:bodyPr wrap="square" anchor="t" lIns="0" rIns="0" tIns="0" bIns="0">
             <a:spAutoFit/>
           </a:bodyPr>
           <a:lstStyle/>
@@ -8895,7 +8371,7 @@
           <a:noFill/>
         </p:spPr>
         <p:txBody>
-          <a:bodyPr wrap="square" lIns="0" tIns="0" rIns="0" bIns="0" anchor="t">
+          <a:bodyPr wrap="square" anchor="t" lIns="0" rIns="0" tIns="0" bIns="0">
             <a:spAutoFit/>
           </a:bodyPr>
           <a:lstStyle/>
@@ -8934,7 +8410,7 @@
           <a:noFill/>
         </p:spPr>
         <p:txBody>
-          <a:bodyPr wrap="square" lIns="0" tIns="0" rIns="0" bIns="0" anchor="t">
+          <a:bodyPr wrap="square" anchor="t" lIns="0" rIns="0" tIns="0" bIns="0">
             <a:spAutoFit/>
           </a:bodyPr>
           <a:lstStyle/>
@@ -8969,7 +8445,7 @@
           <a:noFill/>
         </p:spPr>
         <p:txBody>
-          <a:bodyPr wrap="square" lIns="0" tIns="0" rIns="0" bIns="0" anchor="t">
+          <a:bodyPr wrap="square" anchor="t" lIns="0" rIns="0" tIns="0" bIns="0">
             <a:spAutoFit/>
           </a:bodyPr>
           <a:lstStyle/>
@@ -9004,7 +8480,7 @@
           <a:noFill/>
         </p:spPr>
         <p:txBody>
-          <a:bodyPr wrap="square" lIns="0" tIns="0" rIns="0" bIns="0" anchor="t">
+          <a:bodyPr wrap="square" anchor="t" lIns="0" rIns="0" tIns="0" bIns="0">
             <a:spAutoFit/>
           </a:bodyPr>
           <a:lstStyle/>
@@ -9039,7 +8515,7 @@
           <a:noFill/>
         </p:spPr>
         <p:txBody>
-          <a:bodyPr wrap="square" lIns="0" tIns="0" rIns="0" bIns="0" anchor="t">
+          <a:bodyPr wrap="square" anchor="t" lIns="0" rIns="0" tIns="0" bIns="0">
             <a:spAutoFit/>
           </a:bodyPr>
           <a:lstStyle/>
@@ -9074,7 +8550,7 @@
           <a:noFill/>
         </p:spPr>
         <p:txBody>
-          <a:bodyPr wrap="square" lIns="0" tIns="0" rIns="0" bIns="0" anchor="t">
+          <a:bodyPr wrap="square" anchor="t" lIns="0" rIns="0" tIns="0" bIns="0">
             <a:spAutoFit/>
           </a:bodyPr>
           <a:lstStyle/>
@@ -9109,7 +8585,7 @@
           <a:noFill/>
         </p:spPr>
         <p:txBody>
-          <a:bodyPr wrap="square" lIns="0" tIns="0" rIns="0" bIns="0" anchor="t">
+          <a:bodyPr wrap="square" anchor="t" lIns="0" rIns="0" tIns="0" bIns="0">
             <a:spAutoFit/>
           </a:bodyPr>
           <a:lstStyle/>
@@ -9144,7 +8620,7 @@
           <a:noFill/>
         </p:spPr>
         <p:txBody>
-          <a:bodyPr wrap="square" lIns="0" tIns="0" rIns="0" bIns="0" anchor="t">
+          <a:bodyPr wrap="square" anchor="t" lIns="0" rIns="0" tIns="0" bIns="0">
             <a:spAutoFit/>
           </a:bodyPr>
           <a:lstStyle/>
@@ -9183,7 +8659,7 @@
           <a:noFill/>
         </p:spPr>
         <p:txBody>
-          <a:bodyPr wrap="square" lIns="0" tIns="0" rIns="0" bIns="0" anchor="t">
+          <a:bodyPr wrap="square" anchor="t" lIns="0" rIns="0" tIns="0" bIns="0">
             <a:spAutoFit/>
           </a:bodyPr>
           <a:lstStyle/>
@@ -9210,7 +8686,7 @@
 </file>
 
 <file path=ppt/slides/slide19.xml><?xml version="1.0" encoding="utf-8"?>
-<p:sld xmlns:a="http://schemas.openxmlformats.org/drawingml/2006/main" xmlns:r="http://schemas.openxmlformats.org/officeDocument/2006/relationships" xmlns:p="http://schemas.openxmlformats.org/presentationml/2006/main">
+<p:sld xmlns:a="http://schemas.openxmlformats.org/drawingml/2006/main" xmlns:p="http://schemas.openxmlformats.org/presentationml/2006/main" xmlns:r="http://schemas.openxmlformats.org/officeDocument/2006/relationships">
   <p:cSld>
     <p:spTree>
       <p:nvGrpSpPr>
@@ -9218,14 +8694,7 @@
         <p:cNvGrpSpPr/>
         <p:nvPr/>
       </p:nvGrpSpPr>
-      <p:grpSpPr>
-        <a:xfrm>
-          <a:off x="0" y="0"/>
-          <a:ext cx="0" cy="0"/>
-          <a:chOff x="0" y="0"/>
-          <a:chExt cx="0" cy="0"/>
-        </a:xfrm>
-      </p:grpSpPr>
+      <p:grpSpPr/>
       <p:sp>
         <p:nvSpPr>
           <p:cNvPr id="2" name="TextBox 1"/>
@@ -9243,7 +8712,7 @@
           <a:noFill/>
         </p:spPr>
         <p:txBody>
-          <a:bodyPr wrap="square" lIns="0" tIns="0" rIns="0" bIns="0" anchor="t">
+          <a:bodyPr wrap="square" anchor="t" lIns="0" rIns="0" tIns="0" bIns="0">
             <a:spAutoFit/>
           </a:bodyPr>
           <a:lstStyle/>
@@ -9282,7 +8751,7 @@
           <a:noFill/>
         </p:spPr>
         <p:txBody>
-          <a:bodyPr wrap="square" lIns="0" tIns="0" rIns="0" bIns="0" anchor="t">
+          <a:bodyPr wrap="square" anchor="t" lIns="0" rIns="0" tIns="0" bIns="0">
             <a:spAutoFit/>
           </a:bodyPr>
           <a:lstStyle/>
@@ -9293,49 +8762,13 @@
               </a:lnSpc>
             </a:pPr>
             <a:r>
-              <a:rPr sz="1500" b="0" i="1" dirty="0">
+              <a:rPr sz="1500" b="0" i="1">
                 <a:solidFill>
                   <a:srgbClr val="707070"/>
                 </a:solidFill>
                 <a:latin typeface="Calibri"/>
               </a:rPr>
-              <a:t>Lean B drops 95 of 208 features, keeping </a:t>
-            </a:r>
-            <a:r>
-              <a:rPr sz="1500" b="0" i="1" dirty="0" err="1">
-                <a:solidFill>
-                  <a:srgbClr val="707070"/>
-                </a:solidFill>
-                <a:latin typeface="Calibri"/>
-              </a:rPr>
-              <a:t>ditto_score</a:t>
-            </a:r>
-            <a:r>
-              <a:rPr sz="1500" b="0" i="1" dirty="0">
-                <a:solidFill>
-                  <a:srgbClr val="707070"/>
-                </a:solidFill>
-                <a:latin typeface="Calibri"/>
-              </a:rPr>
-              <a:t> and </a:t>
-            </a:r>
-            <a:r>
-              <a:rPr sz="1500" b="0" i="1" dirty="0" err="1">
-                <a:solidFill>
-                  <a:srgbClr val="707070"/>
-                </a:solidFill>
-                <a:latin typeface="Calibri"/>
-              </a:rPr>
-              <a:t>metarnn_score</a:t>
-            </a:r>
-            <a:r>
-              <a:rPr sz="1500" b="0" i="1" dirty="0">
-                <a:solidFill>
-                  <a:srgbClr val="707070"/>
-                </a:solidFill>
-                <a:latin typeface="Calibri"/>
-              </a:rPr>
-              <a:t> (the per-feature winners).</a:t>
+              <a:t>Lean B drops 95 of 208 features, keeping ditto_score and metarnn_score (the per-feature winners).</a:t>
             </a:r>
           </a:p>
         </p:txBody>
@@ -9354,7 +8787,7 @@
         </p:xfrm>
         <a:graphic>
           <a:graphicData uri="http://schemas.openxmlformats.org/drawingml/2006/chart">
-            <c:chart xmlns:c="http://schemas.openxmlformats.org/drawingml/2006/chart" xmlns:r="http://schemas.openxmlformats.org/officeDocument/2006/relationships" r:id="rId2"/>
+            <c:chart xmlns:c="http://schemas.openxmlformats.org/drawingml/2006/chart" r:id="rId2"/>
           </a:graphicData>
         </a:graphic>
       </p:graphicFrame>
@@ -9375,7 +8808,7 @@
           <a:noFill/>
         </p:spPr>
         <p:txBody>
-          <a:bodyPr wrap="square" lIns="0" tIns="0" rIns="0" bIns="0" anchor="t">
+          <a:bodyPr wrap="square" anchor="t" lIns="0" rIns="0" tIns="0" bIns="0">
             <a:spAutoFit/>
           </a:bodyPr>
           <a:lstStyle/>
@@ -9414,7 +8847,7 @@
           <a:noFill/>
         </p:spPr>
         <p:txBody>
-          <a:bodyPr wrap="square" lIns="0" tIns="0" rIns="0" bIns="0" anchor="t">
+          <a:bodyPr wrap="square" anchor="t" lIns="0" rIns="0" tIns="0" bIns="0">
             <a:spAutoFit/>
           </a:bodyPr>
           <a:lstStyle/>
@@ -9441,7 +8874,7 @@
 </file>
 
 <file path=ppt/slides/slide2.xml><?xml version="1.0" encoding="utf-8"?>
-<p:sld xmlns:a="http://schemas.openxmlformats.org/drawingml/2006/main" xmlns:r="http://schemas.openxmlformats.org/officeDocument/2006/relationships" xmlns:p="http://schemas.openxmlformats.org/presentationml/2006/main">
+<p:sld xmlns:a="http://schemas.openxmlformats.org/drawingml/2006/main" xmlns:p="http://schemas.openxmlformats.org/presentationml/2006/main" xmlns:r="http://schemas.openxmlformats.org/officeDocument/2006/relationships">
   <p:cSld>
     <p:spTree>
       <p:nvGrpSpPr>
@@ -9449,14 +8882,7 @@
         <p:cNvGrpSpPr/>
         <p:nvPr/>
       </p:nvGrpSpPr>
-      <p:grpSpPr>
-        <a:xfrm>
-          <a:off x="0" y="0"/>
-          <a:ext cx="0" cy="0"/>
-          <a:chOff x="0" y="0"/>
-          <a:chExt cx="0" cy="0"/>
-        </a:xfrm>
-      </p:grpSpPr>
+      <p:grpSpPr/>
       <p:sp>
         <p:nvSpPr>
           <p:cNvPr id="2" name="TextBox 1"/>
@@ -9474,7 +8900,7 @@
           <a:noFill/>
         </p:spPr>
         <p:txBody>
-          <a:bodyPr wrap="square" lIns="0" tIns="0" rIns="0" bIns="0" anchor="t">
+          <a:bodyPr wrap="square" anchor="t" lIns="0" rIns="0" tIns="0" bIns="0">
             <a:spAutoFit/>
           </a:bodyPr>
           <a:lstStyle/>
@@ -9513,7 +8939,7 @@
           <a:noFill/>
         </p:spPr>
         <p:txBody>
-          <a:bodyPr wrap="square" lIns="0" tIns="0" rIns="0" bIns="0" anchor="t">
+          <a:bodyPr wrap="square" anchor="t" lIns="0" rIns="0" tIns="0" bIns="0">
             <a:spAutoFit/>
           </a:bodyPr>
           <a:lstStyle/>
@@ -9552,7 +8978,7 @@
           <a:noFill/>
         </p:spPr>
         <p:txBody>
-          <a:bodyPr wrap="square" lIns="0" tIns="0" rIns="0" bIns="0" anchor="t">
+          <a:bodyPr wrap="square" anchor="t" lIns="0" rIns="0" tIns="0" bIns="0">
             <a:spAutoFit/>
           </a:bodyPr>
           <a:lstStyle/>
@@ -9587,7 +9013,7 @@
           <a:noFill/>
         </p:spPr>
         <p:txBody>
-          <a:bodyPr wrap="square" lIns="0" tIns="0" rIns="0" bIns="0" anchor="t">
+          <a:bodyPr wrap="square" anchor="t" lIns="0" rIns="0" tIns="0" bIns="0">
             <a:spAutoFit/>
           </a:bodyPr>
           <a:lstStyle/>
@@ -9626,7 +9052,7 @@
           <a:noFill/>
         </p:spPr>
         <p:txBody>
-          <a:bodyPr wrap="square" lIns="0" tIns="0" rIns="0" bIns="0" anchor="t">
+          <a:bodyPr wrap="square" anchor="t" lIns="0" rIns="0" tIns="0" bIns="0">
             <a:spAutoFit/>
           </a:bodyPr>
           <a:lstStyle/>
@@ -9661,7 +9087,7 @@
           <a:noFill/>
         </p:spPr>
         <p:txBody>
-          <a:bodyPr wrap="square" lIns="0" tIns="0" rIns="0" bIns="0" anchor="t">
+          <a:bodyPr wrap="square" anchor="t" lIns="0" rIns="0" tIns="0" bIns="0">
             <a:spAutoFit/>
           </a:bodyPr>
           <a:lstStyle/>
@@ -9700,7 +9126,7 @@
           <a:noFill/>
         </p:spPr>
         <p:txBody>
-          <a:bodyPr wrap="square" lIns="0" tIns="0" rIns="0" bIns="0" anchor="t">
+          <a:bodyPr wrap="square" anchor="t" lIns="0" rIns="0" tIns="0" bIns="0">
             <a:spAutoFit/>
           </a:bodyPr>
           <a:lstStyle/>
@@ -9735,7 +9161,7 @@
           <a:noFill/>
         </p:spPr>
         <p:txBody>
-          <a:bodyPr wrap="square" lIns="0" tIns="0" rIns="0" bIns="0" anchor="t">
+          <a:bodyPr wrap="square" anchor="t" lIns="0" rIns="0" tIns="0" bIns="0">
             <a:spAutoFit/>
           </a:bodyPr>
           <a:lstStyle/>
@@ -9774,7 +9200,7 @@
           <a:noFill/>
         </p:spPr>
         <p:txBody>
-          <a:bodyPr wrap="square" lIns="0" tIns="0" rIns="0" bIns="0" anchor="t">
+          <a:bodyPr wrap="square" anchor="t" lIns="0" rIns="0" tIns="0" bIns="0">
             <a:spAutoFit/>
           </a:bodyPr>
           <a:lstStyle/>
@@ -9801,7 +9227,7 @@
 </file>
 
 <file path=ppt/slides/slide20.xml><?xml version="1.0" encoding="utf-8"?>
-<p:sld xmlns:a="http://schemas.openxmlformats.org/drawingml/2006/main" xmlns:r="http://schemas.openxmlformats.org/officeDocument/2006/relationships" xmlns:p="http://schemas.openxmlformats.org/presentationml/2006/main">
+<p:sld xmlns:a="http://schemas.openxmlformats.org/drawingml/2006/main" xmlns:p="http://schemas.openxmlformats.org/presentationml/2006/main" xmlns:r="http://schemas.openxmlformats.org/officeDocument/2006/relationships">
   <p:cSld>
     <p:spTree>
       <p:nvGrpSpPr>
@@ -9809,14 +9235,7 @@
         <p:cNvGrpSpPr/>
         <p:nvPr/>
       </p:nvGrpSpPr>
-      <p:grpSpPr>
-        <a:xfrm>
-          <a:off x="0" y="0"/>
-          <a:ext cx="0" cy="0"/>
-          <a:chOff x="0" y="0"/>
-          <a:chExt cx="0" cy="0"/>
-        </a:xfrm>
-      </p:grpSpPr>
+      <p:grpSpPr/>
       <p:sp>
         <p:nvSpPr>
           <p:cNvPr id="2" name="TextBox 1"/>
@@ -9834,7 +9253,7 @@
           <a:noFill/>
         </p:spPr>
         <p:txBody>
-          <a:bodyPr wrap="square" lIns="0" tIns="0" rIns="0" bIns="0" anchor="t">
+          <a:bodyPr wrap="square" anchor="t" lIns="0" rIns="0" tIns="0" bIns="0">
             <a:spAutoFit/>
           </a:bodyPr>
           <a:lstStyle/>
@@ -9873,7 +9292,7 @@
           <a:noFill/>
         </p:spPr>
         <p:txBody>
-          <a:bodyPr wrap="square" lIns="0" tIns="0" rIns="0" bIns="0" anchor="t">
+          <a:bodyPr wrap="square" anchor="t" lIns="0" rIns="0" tIns="0" bIns="0">
             <a:spAutoFit/>
           </a:bodyPr>
           <a:lstStyle/>
@@ -9908,7 +9327,7 @@
           <a:noFill/>
         </p:spPr>
         <p:txBody>
-          <a:bodyPr wrap="square" lIns="0" tIns="0" rIns="0" bIns="0" anchor="t">
+          <a:bodyPr wrap="square" anchor="t" lIns="0" rIns="0" tIns="0" bIns="0">
             <a:spAutoFit/>
           </a:bodyPr>
           <a:lstStyle/>
@@ -9943,7 +9362,7 @@
           <a:noFill/>
         </p:spPr>
         <p:txBody>
-          <a:bodyPr wrap="square" lIns="0" tIns="0" rIns="0" bIns="0" anchor="t">
+          <a:bodyPr wrap="square" anchor="t" lIns="0" rIns="0" tIns="0" bIns="0">
             <a:spAutoFit/>
           </a:bodyPr>
           <a:lstStyle/>
@@ -9982,7 +9401,7 @@
           <a:noFill/>
         </p:spPr>
         <p:txBody>
-          <a:bodyPr wrap="square" lIns="0" tIns="0" rIns="0" bIns="0" anchor="t">
+          <a:bodyPr wrap="square" anchor="t" lIns="0" rIns="0" tIns="0" bIns="0">
             <a:spAutoFit/>
           </a:bodyPr>
           <a:lstStyle/>
@@ -10017,7 +9436,7 @@
           <a:noFill/>
         </p:spPr>
         <p:txBody>
-          <a:bodyPr wrap="square" lIns="0" tIns="0" rIns="0" bIns="0" anchor="t">
+          <a:bodyPr wrap="square" anchor="t" lIns="0" rIns="0" tIns="0" bIns="0">
             <a:spAutoFit/>
           </a:bodyPr>
           <a:lstStyle/>
@@ -10052,7 +9471,7 @@
           <a:noFill/>
         </p:spPr>
         <p:txBody>
-          <a:bodyPr wrap="square" lIns="0" tIns="0" rIns="0" bIns="0" anchor="t">
+          <a:bodyPr wrap="square" anchor="t" lIns="0" rIns="0" tIns="0" bIns="0">
             <a:spAutoFit/>
           </a:bodyPr>
           <a:lstStyle/>
@@ -10091,7 +9510,7 @@
           <a:noFill/>
         </p:spPr>
         <p:txBody>
-          <a:bodyPr wrap="square" lIns="0" tIns="0" rIns="0" bIns="0" anchor="t">
+          <a:bodyPr wrap="square" anchor="t" lIns="0" rIns="0" tIns="0" bIns="0">
             <a:spAutoFit/>
           </a:bodyPr>
           <a:lstStyle/>
@@ -10126,7 +9545,7 @@
           <a:noFill/>
         </p:spPr>
         <p:txBody>
-          <a:bodyPr wrap="square" lIns="0" tIns="0" rIns="0" bIns="0" anchor="t">
+          <a:bodyPr wrap="square" anchor="t" lIns="0" rIns="0" tIns="0" bIns="0">
             <a:spAutoFit/>
           </a:bodyPr>
           <a:lstStyle/>
@@ -10139,7 +9558,7 @@
                 </a:solidFill>
                 <a:latin typeface="Calibri"/>
               </a:rPr>
-              <a:t>Finish the AdaBoost tuning grid</a:t>
+              <a:t>Probability calibration</a:t>
             </a:r>
           </a:p>
         </p:txBody>
@@ -10161,7 +9580,7 @@
           <a:noFill/>
         </p:spPr>
         <p:txBody>
-          <a:bodyPr wrap="square" lIns="0" tIns="0" rIns="0" bIns="0" anchor="t">
+          <a:bodyPr wrap="square" anchor="t" lIns="0" rIns="0" tIns="0" bIns="0">
             <a:spAutoFit/>
           </a:bodyPr>
           <a:lstStyle/>
@@ -10178,7 +9597,7 @@
                 </a:solidFill>
                 <a:latin typeface="Calibri"/>
               </a:rPr>
-              <a:t>the partial 23/27 grid was halted for compute budget</a:t>
+              <a:t>Platt or isotonic regression so predict_proba is a usable risk score</a:t>
             </a:r>
           </a:p>
         </p:txBody>
@@ -10200,7 +9619,7 @@
           <a:noFill/>
         </p:spPr>
         <p:txBody>
-          <a:bodyPr wrap="square" lIns="0" tIns="0" rIns="0" bIns="0" anchor="t">
+          <a:bodyPr wrap="square" anchor="t" lIns="0" rIns="0" tIns="0" bIns="0">
             <a:spAutoFit/>
           </a:bodyPr>
           <a:lstStyle/>
@@ -10235,7 +9654,7 @@
           <a:noFill/>
         </p:spPr>
         <p:txBody>
-          <a:bodyPr wrap="square" lIns="0" tIns="0" rIns="0" bIns="0" anchor="t">
+          <a:bodyPr wrap="square" anchor="t" lIns="0" rIns="0" tIns="0" bIns="0">
             <a:spAutoFit/>
           </a:bodyPr>
           <a:lstStyle/>
@@ -10248,7 +9667,7 @@
                 </a:solidFill>
                 <a:latin typeface="Calibri"/>
               </a:rPr>
-              <a:t>Probability calibration</a:t>
+              <a:t>Gene-stratified VUS-as-class</a:t>
             </a:r>
           </a:p>
         </p:txBody>
@@ -10270,7 +9689,7 @@
           <a:noFill/>
         </p:spPr>
         <p:txBody>
-          <a:bodyPr wrap="square" lIns="0" tIns="0" rIns="0" bIns="0" anchor="t">
+          <a:bodyPr wrap="square" anchor="t" lIns="0" rIns="0" tIns="0" bIns="0">
             <a:spAutoFit/>
           </a:bodyPr>
           <a:lstStyle/>
@@ -10287,7 +9706,7 @@
                 </a:solidFill>
                 <a:latin typeface="Calibri"/>
               </a:rPr>
-              <a:t>Platt or isotonic regression so predict_proba is a usable risk score</a:t>
+              <a:t>test whether VUS-detection survives without same-gene leakage</a:t>
             </a:r>
           </a:p>
         </p:txBody>
@@ -10309,7 +9728,7 @@
           <a:noFill/>
         </p:spPr>
         <p:txBody>
-          <a:bodyPr wrap="square" lIns="0" tIns="0" rIns="0" bIns="0" anchor="t">
+          <a:bodyPr wrap="square" anchor="t" lIns="0" rIns="0" tIns="0" bIns="0">
             <a:spAutoFit/>
           </a:bodyPr>
           <a:lstStyle/>
@@ -10344,7 +9763,7 @@
           <a:noFill/>
         </p:spPr>
         <p:txBody>
-          <a:bodyPr wrap="square" lIns="0" tIns="0" rIns="0" bIns="0" anchor="t">
+          <a:bodyPr wrap="square" anchor="t" lIns="0" rIns="0" tIns="0" bIns="0">
             <a:spAutoFit/>
           </a:bodyPr>
           <a:lstStyle/>
@@ -10357,7 +9776,7 @@
                 </a:solidFill>
                 <a:latin typeface="Calibri"/>
               </a:rPr>
-              <a:t>Gene-stratified VUS-as-class</a:t>
+              <a:t>Variant-level error analysis</a:t>
             </a:r>
           </a:p>
         </p:txBody>
@@ -10379,7 +9798,7 @@
           <a:noFill/>
         </p:spPr>
         <p:txBody>
-          <a:bodyPr wrap="square" lIns="0" tIns="0" rIns="0" bIns="0" anchor="t">
+          <a:bodyPr wrap="square" anchor="t" lIns="0" rIns="0" tIns="0" bIns="0">
             <a:spAutoFit/>
           </a:bodyPr>
           <a:lstStyle/>
@@ -10396,7 +9815,7 @@
                 </a:solidFill>
                 <a:latin typeface="Calibri"/>
               </a:rPr>
-              <a:t>test whether VUS-detection survives without same-gene leakage</a:t>
+              <a:t>manual review of the Pathogenic ↔ Likely-pathogenic confusion region</a:t>
             </a:r>
           </a:p>
         </p:txBody>
@@ -10404,115 +9823,6 @@
       <p:sp>
         <p:nvSpPr>
           <p:cNvPr id="18" name="TextBox 17"/>
-          <p:cNvSpPr txBox="1"/>
-          <p:nvPr/>
-        </p:nvSpPr>
-        <p:spPr>
-          <a:xfrm>
-            <a:off x="548640" y="5257800"/>
-            <a:ext cx="365760" cy="457200"/>
-          </a:xfrm>
-          <a:prstGeom prst="rect">
-            <a:avLst/>
-          </a:prstGeom>
-          <a:noFill/>
-        </p:spPr>
-        <p:txBody>
-          <a:bodyPr wrap="square" lIns="0" tIns="0" rIns="0" bIns="0" anchor="t">
-            <a:spAutoFit/>
-          </a:bodyPr>
-          <a:lstStyle/>
-          <a:p>
-            <a:pPr algn="l"/>
-            <a:r>
-              <a:rPr sz="2400" b="1" i="0">
-                <a:solidFill>
-                  <a:srgbClr val="000000"/>
-                </a:solidFill>
-                <a:latin typeface="Georgia"/>
-              </a:rPr>
-              <a:t>·</a:t>
-            </a:r>
-          </a:p>
-        </p:txBody>
-      </p:sp>
-      <p:sp>
-        <p:nvSpPr>
-          <p:cNvPr id="19" name="TextBox 18"/>
-          <p:cNvSpPr txBox="1"/>
-          <p:nvPr/>
-        </p:nvSpPr>
-        <p:spPr>
-          <a:xfrm>
-            <a:off x="914400" y="5257800"/>
-            <a:ext cx="10515600" cy="457200"/>
-          </a:xfrm>
-          <a:prstGeom prst="rect">
-            <a:avLst/>
-          </a:prstGeom>
-          <a:noFill/>
-        </p:spPr>
-        <p:txBody>
-          <a:bodyPr wrap="square" lIns="0" tIns="0" rIns="0" bIns="0" anchor="t">
-            <a:spAutoFit/>
-          </a:bodyPr>
-          <a:lstStyle/>
-          <a:p>
-            <a:pPr algn="l"/>
-            <a:r>
-              <a:rPr sz="2000" b="1" i="0">
-                <a:solidFill>
-                  <a:srgbClr val="000000"/>
-                </a:solidFill>
-                <a:latin typeface="Calibri"/>
-              </a:rPr>
-              <a:t>Variant-level error analysis</a:t>
-            </a:r>
-          </a:p>
-        </p:txBody>
-      </p:sp>
-      <p:sp>
-        <p:nvSpPr>
-          <p:cNvPr id="20" name="TextBox 19"/>
-          <p:cNvSpPr txBox="1"/>
-          <p:nvPr/>
-        </p:nvSpPr>
-        <p:spPr>
-          <a:xfrm>
-            <a:off x="1188720" y="5669280"/>
-            <a:ext cx="10515600" cy="457200"/>
-          </a:xfrm>
-          <a:prstGeom prst="rect">
-            <a:avLst/>
-          </a:prstGeom>
-          <a:noFill/>
-        </p:spPr>
-        <p:txBody>
-          <a:bodyPr wrap="square" lIns="0" tIns="0" rIns="0" bIns="0" anchor="t">
-            <a:spAutoFit/>
-          </a:bodyPr>
-          <a:lstStyle/>
-          <a:p>
-            <a:pPr algn="l">
-              <a:lnSpc>
-                <a:spcPct val="125000"/>
-              </a:lnSpc>
-            </a:pPr>
-            <a:r>
-              <a:rPr sz="1400" b="0" i="0">
-                <a:solidFill>
-                  <a:srgbClr val="404040"/>
-                </a:solidFill>
-                <a:latin typeface="Calibri"/>
-              </a:rPr>
-              <a:t>manual review of the Pathogenic ↔ Likely-pathogenic confusion region</a:t>
-            </a:r>
-          </a:p>
-        </p:txBody>
-      </p:sp>
-      <p:sp>
-        <p:nvSpPr>
-          <p:cNvPr id="21" name="TextBox 20"/>
           <p:cNvSpPr txBox="1"/>
           <p:nvPr/>
         </p:nvSpPr>
@@ -10527,7 +9837,7 @@
           <a:noFill/>
         </p:spPr>
         <p:txBody>
-          <a:bodyPr wrap="square" lIns="0" tIns="0" rIns="0" bIns="0" anchor="t">
+          <a:bodyPr wrap="square" anchor="t" lIns="0" rIns="0" tIns="0" bIns="0">
             <a:spAutoFit/>
           </a:bodyPr>
           <a:lstStyle/>
@@ -10554,7 +9864,7 @@
 </file>
 
 <file path=ppt/slides/slide21.xml><?xml version="1.0" encoding="utf-8"?>
-<p:sld xmlns:a="http://schemas.openxmlformats.org/drawingml/2006/main" xmlns:r="http://schemas.openxmlformats.org/officeDocument/2006/relationships" xmlns:p="http://schemas.openxmlformats.org/presentationml/2006/main">
+<p:sld xmlns:a="http://schemas.openxmlformats.org/drawingml/2006/main" xmlns:p="http://schemas.openxmlformats.org/presentationml/2006/main" xmlns:r="http://schemas.openxmlformats.org/officeDocument/2006/relationships">
   <p:cSld>
     <p:spTree>
       <p:nvGrpSpPr>
@@ -10562,14 +9872,7 @@
         <p:cNvGrpSpPr/>
         <p:nvPr/>
       </p:nvGrpSpPr>
-      <p:grpSpPr>
-        <a:xfrm>
-          <a:off x="0" y="0"/>
-          <a:ext cx="0" cy="0"/>
-          <a:chOff x="0" y="0"/>
-          <a:chExt cx="0" cy="0"/>
-        </a:xfrm>
-      </p:grpSpPr>
+      <p:grpSpPr/>
       <p:sp>
         <p:nvSpPr>
           <p:cNvPr id="2" name="Rectangle 1"/>
@@ -10610,7 +9913,6 @@
           <a:lstStyle/>
           <a:p>
             <a:pPr algn="ctr"/>
-            <a:endParaRPr/>
           </a:p>
         </p:txBody>
       </p:sp>
@@ -10622,7 +9924,7 @@
         </p:nvSpPr>
         <p:spPr>
           <a:xfrm>
-            <a:off x="1036320" y="590550"/>
+            <a:off x="1097280" y="2286000"/>
             <a:ext cx="10058400" cy="1371600"/>
           </a:xfrm>
           <a:prstGeom prst="rect">
@@ -10631,14 +9933,14 @@
           <a:noFill/>
         </p:spPr>
         <p:txBody>
-          <a:bodyPr wrap="square" lIns="0" tIns="0" rIns="0" bIns="0" anchor="t">
+          <a:bodyPr wrap="square" anchor="t" lIns="0" rIns="0" tIns="0" bIns="0">
             <a:spAutoFit/>
           </a:bodyPr>
           <a:lstStyle/>
           <a:p>
             <a:pPr algn="l"/>
             <a:r>
-              <a:rPr sz="8800" b="1" i="0" dirty="0">
+              <a:rPr sz="8800" b="1" i="0">
                 <a:solidFill>
                   <a:srgbClr val="000000"/>
                 </a:solidFill>
@@ -10651,212 +9953,106 @@
       </p:sp>
       <p:sp>
         <p:nvSpPr>
+          <p:cNvPr id="4" name="TextBox 3"/>
+          <p:cNvSpPr txBox="1"/>
+          <p:nvPr/>
+        </p:nvSpPr>
+        <p:spPr>
+          <a:xfrm>
+            <a:off x="1097280" y="3749039"/>
+            <a:ext cx="10058400" cy="548640"/>
+          </a:xfrm>
+          <a:prstGeom prst="rect">
+            <a:avLst/>
+          </a:prstGeom>
+          <a:noFill/>
+        </p:spPr>
+        <p:txBody>
+          <a:bodyPr wrap="square" anchor="t" lIns="0" rIns="0" tIns="0" bIns="0">
+            <a:spAutoFit/>
+          </a:bodyPr>
+          <a:lstStyle/>
+          <a:p>
+            <a:pPr algn="l"/>
+            <a:r>
+              <a:rPr sz="3200" b="0" i="1">
+                <a:solidFill>
+                  <a:srgbClr val="202020"/>
+                </a:solidFill>
+                <a:latin typeface="Georgia"/>
+              </a:rPr>
+              <a:t>Questions?</a:t>
+            </a:r>
+          </a:p>
+        </p:txBody>
+      </p:sp>
+      <p:sp>
+        <p:nvSpPr>
           <p:cNvPr id="5" name="TextBox 4"/>
           <p:cNvSpPr txBox="1"/>
           <p:nvPr/>
         </p:nvSpPr>
         <p:spPr>
           <a:xfrm>
-            <a:off x="1036320" y="2033270"/>
-            <a:ext cx="10058400" cy="276999"/>
-          </a:xfrm>
-          <a:prstGeom prst="rect">
-            <a:avLst/>
-          </a:prstGeom>
-          <a:noFill/>
-        </p:spPr>
-        <p:txBody>
-          <a:bodyPr wrap="square" lIns="0" tIns="0" rIns="0" bIns="0" anchor="t">
+            <a:off x="1097280" y="5303520"/>
+            <a:ext cx="10058400" cy="365760"/>
+          </a:xfrm>
+          <a:prstGeom prst="rect">
+            <a:avLst/>
+          </a:prstGeom>
+          <a:noFill/>
+        </p:spPr>
+        <p:txBody>
+          <a:bodyPr wrap="square" anchor="t" lIns="0" rIns="0" tIns="0" bIns="0">
             <a:spAutoFit/>
           </a:bodyPr>
           <a:lstStyle/>
           <a:p>
             <a:pPr algn="l"/>
             <a:r>
-              <a:rPr sz="1800" b="0" i="0" dirty="0">
+              <a:rPr sz="1800" b="0" i="0">
                 <a:solidFill>
                   <a:srgbClr val="000000"/>
                 </a:solidFill>
                 <a:latin typeface="Calibri"/>
               </a:rPr>
-              <a:t>Doruk Topcu  ·  Alihan </a:t>
-            </a:r>
-            <a:r>
-              <a:rPr sz="1800" b="0" i="0" dirty="0" err="1">
-                <a:solidFill>
-                  <a:srgbClr val="000000"/>
+              <a:t>Doruk Topcu  ·  Alihan Sağöz</a:t>
+            </a:r>
+          </a:p>
+        </p:txBody>
+      </p:sp>
+      <p:sp>
+        <p:nvSpPr>
+          <p:cNvPr id="6" name="TextBox 5"/>
+          <p:cNvSpPr txBox="1"/>
+          <p:nvPr/>
+        </p:nvSpPr>
+        <p:spPr>
+          <a:xfrm>
+            <a:off x="1097280" y="5760720"/>
+            <a:ext cx="10058400" cy="365760"/>
+          </a:xfrm>
+          <a:prstGeom prst="rect">
+            <a:avLst/>
+          </a:prstGeom>
+          <a:noFill/>
+        </p:spPr>
+        <p:txBody>
+          <a:bodyPr wrap="square" anchor="t" lIns="0" rIns="0" tIns="0" bIns="0">
+            <a:spAutoFit/>
+          </a:bodyPr>
+          <a:lstStyle/>
+          <a:p>
+            <a:pPr algn="l"/>
+            <a:r>
+              <a:rPr sz="1400" b="0" i="1">
+                <a:solidFill>
+                  <a:srgbClr val="707070"/>
                 </a:solidFill>
                 <a:latin typeface="Calibri"/>
               </a:rPr>
-              <a:t>Sağöz</a:t>
-            </a:r>
-            <a:endParaRPr lang="en-US" sz="1800" b="0" i="0" dirty="0">
-              <a:solidFill>
-                <a:srgbClr val="000000"/>
-              </a:solidFill>
-              <a:latin typeface="Calibri"/>
-            </a:endParaRPr>
-          </a:p>
-        </p:txBody>
-      </p:sp>
-      <p:sp>
-        <p:nvSpPr>
-          <p:cNvPr id="6" name="TextBox 5"/>
-          <p:cNvSpPr txBox="1"/>
-          <p:nvPr/>
-        </p:nvSpPr>
-        <p:spPr>
-          <a:xfrm>
-            <a:off x="1036320" y="2934970"/>
-            <a:ext cx="10058400" cy="861774"/>
-          </a:xfrm>
-          <a:prstGeom prst="rect">
-            <a:avLst/>
-          </a:prstGeom>
-          <a:noFill/>
-        </p:spPr>
-        <p:txBody>
-          <a:bodyPr wrap="square" lIns="0" tIns="0" rIns="0" bIns="0" anchor="t">
-            <a:spAutoFit/>
-          </a:bodyPr>
-          <a:lstStyle/>
-          <a:p>
-            <a:r>
-              <a:rPr lang="en-US" sz="1400" b="0" i="1" dirty="0">
-                <a:solidFill>
-                  <a:srgbClr val="707070"/>
-                </a:solidFill>
-                <a:latin typeface="Calibri"/>
-              </a:rPr>
-              <a:t>Google Collab – </a:t>
-            </a:r>
-            <a:r>
-              <a:rPr lang="en-US" sz="1400" b="0" i="1" dirty="0" err="1">
-                <a:solidFill>
-                  <a:srgbClr val="707070"/>
-                </a:solidFill>
-                <a:latin typeface="Calibri"/>
-              </a:rPr>
-              <a:t>MissVarPath</a:t>
-            </a:r>
-            <a:r>
-              <a:rPr lang="en-US" sz="1400" b="0" i="1" dirty="0">
-                <a:solidFill>
-                  <a:srgbClr val="707070"/>
-                </a:solidFill>
-                <a:latin typeface="Calibri"/>
-              </a:rPr>
-              <a:t> </a:t>
-            </a:r>
-            <a:r>
-              <a:rPr lang="en-US" sz="1400" i="1" dirty="0">
-                <a:solidFill>
-                  <a:srgbClr val="707070"/>
-                </a:solidFill>
-              </a:rPr>
-              <a:t>EDA: </a:t>
-            </a:r>
-            <a:r>
-              <a:rPr lang="en-US" sz="1400" i="1" dirty="0">
-                <a:solidFill>
-                  <a:srgbClr val="707070"/>
-                </a:solidFill>
-                <a:hlinkClick r:id="rId2"/>
-              </a:rPr>
-              <a:t>https://colab.research.google.com/drive/1Mk_cXAjRAKlRVjWplSdtV9DCR-t0P0iU</a:t>
-            </a:r>
-            <a:r>
-              <a:rPr lang="en-US" sz="1400" i="1" dirty="0">
-                <a:solidFill>
-                  <a:srgbClr val="707070"/>
-                </a:solidFill>
-              </a:rPr>
-              <a:t> </a:t>
-            </a:r>
-            <a:endParaRPr lang="en-US" sz="1400" b="0" i="1" dirty="0">
-              <a:solidFill>
-                <a:srgbClr val="707070"/>
-              </a:solidFill>
-              <a:latin typeface="Calibri"/>
-            </a:endParaRPr>
-          </a:p>
-          <a:p>
-            <a:r>
-              <a:rPr lang="en-US" sz="1400" i="1" dirty="0">
-                <a:solidFill>
-                  <a:srgbClr val="707070"/>
-                </a:solidFill>
-                <a:latin typeface="Calibri"/>
-              </a:rPr>
-              <a:t>Google Collab – Full </a:t>
-            </a:r>
-            <a:r>
-              <a:rPr lang="en-US" sz="1400" b="0" i="1" dirty="0">
-                <a:solidFill>
-                  <a:srgbClr val="707070"/>
-                </a:solidFill>
-                <a:latin typeface="Calibri"/>
-              </a:rPr>
-              <a:t>code</a:t>
-            </a:r>
-            <a:r>
-              <a:rPr lang="en-US" sz="1400" i="1" dirty="0">
-                <a:solidFill>
-                  <a:srgbClr val="707070"/>
-                </a:solidFill>
-              </a:rPr>
-              <a:t>: </a:t>
-            </a:r>
-            <a:r>
-              <a:rPr lang="en-US" sz="1400" i="1" dirty="0">
-                <a:solidFill>
-                  <a:srgbClr val="707070"/>
-                </a:solidFill>
-                <a:hlinkClick r:id="rId3"/>
-              </a:rPr>
-              <a:t>https://colab.research.google.com/drive/1ceyQjc73Gsm2bfclc7PznBS_dQ0EB74a#scrollTo=cell-0001</a:t>
-            </a:r>
-            <a:r>
-              <a:rPr lang="en-US" sz="1400" i="1" dirty="0">
-                <a:solidFill>
-                  <a:srgbClr val="707070"/>
-                </a:solidFill>
-              </a:rPr>
-              <a:t>  </a:t>
-            </a:r>
-          </a:p>
-          <a:p>
-            <a:r>
-              <a:rPr lang="en-US" sz="1400" i="1" dirty="0">
-                <a:solidFill>
-                  <a:srgbClr val="707070"/>
-                </a:solidFill>
-                <a:latin typeface="Calibri"/>
-              </a:rPr>
-              <a:t>Datasets &amp; Other files to run the full model: </a:t>
-            </a:r>
-            <a:r>
-              <a:rPr lang="en-US" sz="1400" i="1" dirty="0">
-                <a:solidFill>
-                  <a:srgbClr val="707070"/>
-                </a:solidFill>
-                <a:hlinkClick r:id="rId4"/>
-              </a:rPr>
-              <a:t>https://drive.google.com/drive/folders/1Sy5dnzYGiwCGXYRMXiCGnyJt04SuOphv?usp=sharing</a:t>
-            </a:r>
-            <a:endParaRPr lang="en-US" sz="1400" i="1" dirty="0">
-              <a:solidFill>
-                <a:srgbClr val="707070"/>
-              </a:solidFill>
-            </a:endParaRPr>
-          </a:p>
-          <a:p>
-            <a:endParaRPr lang="en-US" sz="1400" b="0" i="1" dirty="0">
-              <a:solidFill>
-                <a:srgbClr val="707070"/>
-              </a:solidFill>
-              <a:latin typeface="Calibri"/>
-            </a:endParaRPr>
+              <a:t>github.com/doruktopcu/MissVarPath-Missense-Detection</a:t>
+            </a:r>
           </a:p>
         </p:txBody>
       </p:sp>
@@ -10877,7 +10073,7 @@
           <a:noFill/>
         </p:spPr>
         <p:txBody>
-          <a:bodyPr wrap="square" lIns="0" tIns="0" rIns="0" bIns="0" anchor="t">
+          <a:bodyPr wrap="square" anchor="t" lIns="0" rIns="0" tIns="0" bIns="0">
             <a:spAutoFit/>
           </a:bodyPr>
           <a:lstStyle/>
@@ -10904,7 +10100,7 @@
 </file>
 
 <file path=ppt/slides/slide3.xml><?xml version="1.0" encoding="utf-8"?>
-<p:sld xmlns:a="http://schemas.openxmlformats.org/drawingml/2006/main" xmlns:r="http://schemas.openxmlformats.org/officeDocument/2006/relationships" xmlns:p="http://schemas.openxmlformats.org/presentationml/2006/main">
+<p:sld xmlns:a="http://schemas.openxmlformats.org/drawingml/2006/main" xmlns:p="http://schemas.openxmlformats.org/presentationml/2006/main" xmlns:r="http://schemas.openxmlformats.org/officeDocument/2006/relationships">
   <p:cSld>
     <p:spTree>
       <p:nvGrpSpPr>
@@ -10912,14 +10108,7 @@
         <p:cNvGrpSpPr/>
         <p:nvPr/>
       </p:nvGrpSpPr>
-      <p:grpSpPr>
-        <a:xfrm>
-          <a:off x="0" y="0"/>
-          <a:ext cx="0" cy="0"/>
-          <a:chOff x="0" y="0"/>
-          <a:chExt cx="0" cy="0"/>
-        </a:xfrm>
-      </p:grpSpPr>
+      <p:grpSpPr/>
       <p:sp>
         <p:nvSpPr>
           <p:cNvPr id="2" name="TextBox 1"/>
@@ -10928,7 +10117,7 @@
         </p:nvSpPr>
         <p:spPr>
           <a:xfrm>
-            <a:off x="548640" y="182880"/>
+            <a:off x="548640" y="365760"/>
             <a:ext cx="11064240" cy="914400"/>
           </a:xfrm>
           <a:prstGeom prst="rect">
@@ -10937,7 +10126,7 @@
           <a:noFill/>
         </p:spPr>
         <p:txBody>
-          <a:bodyPr wrap="square" lIns="0" tIns="0" rIns="0" bIns="0" anchor="t">
+          <a:bodyPr wrap="square" anchor="t" lIns="0" rIns="0" tIns="0" bIns="0">
             <a:spAutoFit/>
           </a:bodyPr>
           <a:lstStyle/>
@@ -10967,7 +10156,7 @@
         </p:nvSpPr>
         <p:spPr>
           <a:xfrm>
-            <a:off x="548640" y="826770"/>
+            <a:off x="548640" y="1188720"/>
             <a:ext cx="5943600" cy="5303520"/>
           </a:xfrm>
           <a:prstGeom prst="rect">
@@ -10976,7 +10165,7 @@
           <a:noFill/>
         </p:spPr>
         <p:txBody>
-          <a:bodyPr wrap="square" lIns="0" tIns="0" rIns="0" bIns="0" anchor="t">
+          <a:bodyPr wrap="square" anchor="t" lIns="0" rIns="0" tIns="0" bIns="0">
             <a:spAutoFit/>
           </a:bodyPr>
           <a:lstStyle/>
@@ -10990,7 +10179,7 @@
               </a:spcAft>
             </a:pPr>
             <a:r>
-              <a:rPr sz="6800" b="1" i="0" dirty="0">
+              <a:rPr sz="6800" b="1" i="0">
                 <a:solidFill>
                   <a:srgbClr val="000000"/>
                 </a:solidFill>
@@ -11009,40 +10198,13 @@
               </a:spcAft>
             </a:pPr>
             <a:r>
-              <a:rPr sz="1500" b="0" i="0" dirty="0" err="1">
+              <a:rPr sz="1500" b="0" i="0">
                 <a:solidFill>
                   <a:srgbClr val="707070"/>
                 </a:solidFill>
                 <a:latin typeface="Calibri"/>
               </a:rPr>
-              <a:t>ClinVar</a:t>
-            </a:r>
-            <a:r>
-              <a:rPr sz="1500" b="0" i="0" dirty="0">
-                <a:solidFill>
-                  <a:srgbClr val="707070"/>
-                </a:solidFill>
-                <a:latin typeface="Calibri"/>
-              </a:rPr>
-              <a:t> / </a:t>
-            </a:r>
-            <a:r>
-              <a:rPr sz="1500" b="0" i="0" dirty="0" err="1">
-                <a:solidFill>
-                  <a:srgbClr val="707070"/>
-                </a:solidFill>
-                <a:latin typeface="Calibri"/>
-              </a:rPr>
-              <a:t>OpenCRAVAT</a:t>
-            </a:r>
-            <a:r>
-              <a:rPr sz="1500" b="0" i="0" dirty="0">
-                <a:solidFill>
-                  <a:srgbClr val="707070"/>
-                </a:solidFill>
-                <a:latin typeface="Calibri"/>
-              </a:rPr>
-              <a:t> missense variants</a:t>
+              <a:t>ClinVar / OpenCRAVAT missense variants</a:t>
             </a:r>
           </a:p>
           <a:p>
@@ -11055,7 +10217,7 @@
               </a:spcAft>
             </a:pPr>
             <a:r>
-              <a:rPr sz="4200" b="1" i="0" dirty="0">
+              <a:rPr sz="4200" b="1" i="0">
                 <a:solidFill>
                   <a:srgbClr val="000000"/>
                 </a:solidFill>
@@ -11074,7 +10236,7 @@
               </a:spcAft>
             </a:pPr>
             <a:r>
-              <a:rPr sz="1500" b="0" i="0" dirty="0">
+              <a:rPr sz="1500" b="0" i="0">
                 <a:solidFill>
                   <a:srgbClr val="707070"/>
                 </a:solidFill>
@@ -11093,7 +10255,7 @@
               </a:spcAft>
             </a:pPr>
             <a:r>
-              <a:rPr sz="4200" b="1" i="0" dirty="0">
+              <a:rPr sz="4200" b="1" i="0">
                 <a:solidFill>
                   <a:srgbClr val="000000"/>
                 </a:solidFill>
@@ -11112,7 +10274,7 @@
               </a:spcAft>
             </a:pPr>
             <a:r>
-              <a:rPr sz="1500" b="0" i="0" dirty="0">
+              <a:rPr sz="1500" b="0" i="0">
                 <a:solidFill>
                   <a:srgbClr val="707070"/>
                 </a:solidFill>
@@ -11131,7 +10293,7 @@
               </a:spcAft>
             </a:pPr>
             <a:r>
-              <a:rPr sz="4200" b="1" i="0" dirty="0">
+              <a:rPr sz="4200" b="1" i="0">
                 <a:solidFill>
                   <a:srgbClr val="000000"/>
                 </a:solidFill>
@@ -11147,7 +10309,7 @@
               </a:lnSpc>
             </a:pPr>
             <a:r>
-              <a:rPr sz="1500" b="0" i="0" dirty="0">
+              <a:rPr sz="1500" b="0" i="0">
                 <a:solidFill>
                   <a:srgbClr val="707070"/>
                 </a:solidFill>
@@ -11166,7 +10328,7 @@
         </p:nvSpPr>
         <p:spPr>
           <a:xfrm>
-            <a:off x="6858000" y="826770"/>
+            <a:off x="6858000" y="1188720"/>
             <a:ext cx="4937760" cy="365760"/>
           </a:xfrm>
           <a:prstGeom prst="rect">
@@ -11175,7 +10337,7 @@
           <a:noFill/>
         </p:spPr>
         <p:txBody>
-          <a:bodyPr wrap="square" lIns="0" tIns="0" rIns="0" bIns="0" anchor="t">
+          <a:bodyPr wrap="square" anchor="t" lIns="0" rIns="0" tIns="0" bIns="0">
             <a:spAutoFit/>
           </a:bodyPr>
           <a:lstStyle/>
@@ -11205,7 +10367,7 @@
         </p:nvSpPr>
         <p:spPr>
           <a:xfrm>
-            <a:off x="6858000" y="1236345"/>
+            <a:off x="6858000" y="1645920"/>
             <a:ext cx="4937760" cy="4754880"/>
           </a:xfrm>
           <a:prstGeom prst="rect">
@@ -11214,7 +10376,7 @@
           <a:noFill/>
         </p:spPr>
         <p:txBody>
-          <a:bodyPr wrap="square" lIns="0" tIns="0" rIns="0" bIns="0" anchor="t">
+          <a:bodyPr wrap="square" anchor="t" lIns="0" rIns="0" tIns="0" bIns="0">
             <a:spAutoFit/>
           </a:bodyPr>
           <a:lstStyle/>
@@ -11228,7 +10390,7 @@
               </a:spcAft>
             </a:pPr>
             <a:r>
-              <a:rPr sz="2200" b="1" i="0" dirty="0">
+              <a:rPr sz="2200" b="1" i="0">
                 <a:solidFill>
                   <a:srgbClr val="000000"/>
                 </a:solidFill>
@@ -11247,31 +10409,13 @@
               </a:spcAft>
             </a:pPr>
             <a:r>
-              <a:rPr sz="1400" b="0" i="0" dirty="0">
+              <a:rPr sz="1400" b="0" i="0">
                 <a:solidFill>
                   <a:srgbClr val="707070"/>
                 </a:solidFill>
                 <a:latin typeface="Calibri"/>
               </a:rPr>
-              <a:t>original </a:t>
-            </a:r>
-            <a:r>
-              <a:rPr sz="1400" b="0" i="0" dirty="0" err="1">
-                <a:solidFill>
-                  <a:srgbClr val="707070"/>
-                </a:solidFill>
-                <a:latin typeface="Calibri"/>
-              </a:rPr>
-              <a:t>ClinVar</a:t>
-            </a:r>
-            <a:r>
-              <a:rPr sz="1400" b="0" i="0" dirty="0">
-                <a:solidFill>
-                  <a:srgbClr val="707070"/>
-                </a:solidFill>
-                <a:latin typeface="Calibri"/>
-              </a:rPr>
-              <a:t> label space</a:t>
+              <a:t>original ClinVar label space</a:t>
             </a:r>
           </a:p>
           <a:p>
@@ -11284,7 +10428,7 @@
               </a:spcAft>
             </a:pPr>
             <a:r>
-              <a:rPr sz="2200" b="1" i="0" dirty="0">
+              <a:rPr sz="2200" b="1" i="0">
                 <a:solidFill>
                   <a:srgbClr val="000000"/>
                 </a:solidFill>
@@ -11303,7 +10447,7 @@
               </a:spcAft>
             </a:pPr>
             <a:r>
-              <a:rPr sz="1400" b="0" i="0" dirty="0">
+              <a:rPr sz="1400" b="0" i="0">
                 <a:solidFill>
                   <a:srgbClr val="707070"/>
                 </a:solidFill>
@@ -11322,7 +10466,7 @@
               </a:spcAft>
             </a:pPr>
             <a:r>
-              <a:rPr sz="2200" b="1" i="0" dirty="0">
+              <a:rPr sz="2200" b="1" i="0">
                 <a:solidFill>
                   <a:srgbClr val="000000"/>
                 </a:solidFill>
@@ -11341,7 +10485,7 @@
               </a:spcAft>
             </a:pPr>
             <a:r>
-              <a:rPr sz="1400" b="0" i="0" dirty="0">
+              <a:rPr sz="1400" b="0" i="0">
                 <a:solidFill>
                   <a:srgbClr val="707070"/>
                 </a:solidFill>
@@ -11360,7 +10504,7 @@
               </a:spcAft>
             </a:pPr>
             <a:r>
-              <a:rPr sz="2200" b="1" i="0" dirty="0">
+              <a:rPr sz="2200" b="1" i="0">
                 <a:solidFill>
                   <a:srgbClr val="000000"/>
                 </a:solidFill>
@@ -11376,31 +10520,13 @@
               </a:lnSpc>
             </a:pPr>
             <a:r>
-              <a:rPr sz="1400" b="0" i="0" dirty="0">
+              <a:rPr sz="1400" b="0" i="0">
                 <a:solidFill>
                   <a:srgbClr val="707070"/>
                 </a:solidFill>
                 <a:latin typeface="Calibri"/>
               </a:rPr>
-              <a:t>all four </a:t>
-            </a:r>
-            <a:r>
-              <a:rPr sz="1400" b="0" i="0" dirty="0" err="1">
-                <a:solidFill>
-                  <a:srgbClr val="707070"/>
-                </a:solidFill>
-                <a:latin typeface="Calibri"/>
-              </a:rPr>
-              <a:t>ClinVar</a:t>
-            </a:r>
-            <a:r>
-              <a:rPr sz="1400" b="0" i="0" dirty="0">
-                <a:solidFill>
-                  <a:srgbClr val="707070"/>
-                </a:solidFill>
-                <a:latin typeface="Calibri"/>
-              </a:rPr>
-              <a:t> labels + VUS — essentially balanced</a:t>
+              <a:t>all four ClinVar labels + VUS — essentially balanced</a:t>
             </a:r>
           </a:p>
         </p:txBody>
@@ -11422,7 +10548,7 @@
           <a:noFill/>
         </p:spPr>
         <p:txBody>
-          <a:bodyPr wrap="square" lIns="0" tIns="0" rIns="0" bIns="0" anchor="t">
+          <a:bodyPr wrap="square" anchor="t" lIns="0" rIns="0" tIns="0" bIns="0">
             <a:spAutoFit/>
           </a:bodyPr>
           <a:lstStyle/>
@@ -11449,7 +10575,7 @@
 </file>
 
 <file path=ppt/slides/slide4.xml><?xml version="1.0" encoding="utf-8"?>
-<p:sld xmlns:a="http://schemas.openxmlformats.org/drawingml/2006/main" xmlns:r="http://schemas.openxmlformats.org/officeDocument/2006/relationships" xmlns:p="http://schemas.openxmlformats.org/presentationml/2006/main">
+<p:sld xmlns:a="http://schemas.openxmlformats.org/drawingml/2006/main" xmlns:p="http://schemas.openxmlformats.org/presentationml/2006/main" xmlns:r="http://schemas.openxmlformats.org/officeDocument/2006/relationships">
   <p:cSld>
     <p:spTree>
       <p:nvGrpSpPr>
@@ -11457,14 +10583,7 @@
         <p:cNvGrpSpPr/>
         <p:nvPr/>
       </p:nvGrpSpPr>
-      <p:grpSpPr>
-        <a:xfrm>
-          <a:off x="0" y="0"/>
-          <a:ext cx="0" cy="0"/>
-          <a:chOff x="0" y="0"/>
-          <a:chExt cx="0" cy="0"/>
-        </a:xfrm>
-      </p:grpSpPr>
+      <p:grpSpPr/>
       <p:sp>
         <p:nvSpPr>
           <p:cNvPr id="2" name="TextBox 1"/>
@@ -11482,7 +10601,7 @@
           <a:noFill/>
         </p:spPr>
         <p:txBody>
-          <a:bodyPr wrap="square" lIns="0" tIns="0" rIns="0" bIns="0" anchor="t">
+          <a:bodyPr wrap="square" anchor="t" lIns="0" rIns="0" tIns="0" bIns="0">
             <a:spAutoFit/>
           </a:bodyPr>
           <a:lstStyle/>
@@ -11521,7 +10640,7 @@
           <a:noFill/>
         </p:spPr>
         <p:txBody>
-          <a:bodyPr wrap="square" lIns="0" tIns="0" rIns="0" bIns="0" anchor="t">
+          <a:bodyPr wrap="square" anchor="t" lIns="0" rIns="0" tIns="0" bIns="0">
             <a:spAutoFit/>
           </a:bodyPr>
           <a:lstStyle/>
@@ -11584,7 +10703,7 @@
           <a:noFill/>
         </p:spPr>
         <p:txBody>
-          <a:bodyPr wrap="square" lIns="0" tIns="0" rIns="0" bIns="0" anchor="t">
+          <a:bodyPr wrap="square" anchor="t" lIns="0" rIns="0" tIns="0" bIns="0">
             <a:spAutoFit/>
           </a:bodyPr>
           <a:lstStyle/>
@@ -11611,7 +10730,7 @@
 </file>
 
 <file path=ppt/slides/slide5.xml><?xml version="1.0" encoding="utf-8"?>
-<p:sld xmlns:a="http://schemas.openxmlformats.org/drawingml/2006/main" xmlns:r="http://schemas.openxmlformats.org/officeDocument/2006/relationships" xmlns:p="http://schemas.openxmlformats.org/presentationml/2006/main">
+<p:sld xmlns:a="http://schemas.openxmlformats.org/drawingml/2006/main" xmlns:p="http://schemas.openxmlformats.org/presentationml/2006/main" xmlns:r="http://schemas.openxmlformats.org/officeDocument/2006/relationships">
   <p:cSld>
     <p:spTree>
       <p:nvGrpSpPr>
@@ -11619,14 +10738,7 @@
         <p:cNvGrpSpPr/>
         <p:nvPr/>
       </p:nvGrpSpPr>
-      <p:grpSpPr>
-        <a:xfrm>
-          <a:off x="0" y="0"/>
-          <a:ext cx="0" cy="0"/>
-          <a:chOff x="0" y="0"/>
-          <a:chExt cx="0" cy="0"/>
-        </a:xfrm>
-      </p:grpSpPr>
+      <p:grpSpPr/>
       <p:sp>
         <p:nvSpPr>
           <p:cNvPr id="2" name="TextBox 1"/>
@@ -11644,7 +10756,7 @@
           <a:noFill/>
         </p:spPr>
         <p:txBody>
-          <a:bodyPr wrap="square" lIns="0" tIns="0" rIns="0" bIns="0" anchor="t">
+          <a:bodyPr wrap="square" anchor="t" lIns="0" rIns="0" tIns="0" bIns="0">
             <a:spAutoFit/>
           </a:bodyPr>
           <a:lstStyle/>
@@ -11683,7 +10795,7 @@
           <a:noFill/>
         </p:spPr>
         <p:txBody>
-          <a:bodyPr wrap="square" lIns="0" tIns="0" rIns="0" bIns="0" anchor="t">
+          <a:bodyPr wrap="square" anchor="t" lIns="0" rIns="0" tIns="0" bIns="0">
             <a:spAutoFit/>
           </a:bodyPr>
           <a:lstStyle/>
@@ -11746,7 +10858,7 @@
           <a:noFill/>
         </p:spPr>
         <p:txBody>
-          <a:bodyPr wrap="square" lIns="0" tIns="0" rIns="0" bIns="0" anchor="t">
+          <a:bodyPr wrap="square" anchor="t" lIns="0" rIns="0" tIns="0" bIns="0">
             <a:spAutoFit/>
           </a:bodyPr>
           <a:lstStyle/>
@@ -11773,7 +10885,7 @@
 </file>
 
 <file path=ppt/slides/slide6.xml><?xml version="1.0" encoding="utf-8"?>
-<p:sld xmlns:a="http://schemas.openxmlformats.org/drawingml/2006/main" xmlns:r="http://schemas.openxmlformats.org/officeDocument/2006/relationships" xmlns:p="http://schemas.openxmlformats.org/presentationml/2006/main">
+<p:sld xmlns:a="http://schemas.openxmlformats.org/drawingml/2006/main" xmlns:p="http://schemas.openxmlformats.org/presentationml/2006/main" xmlns:r="http://schemas.openxmlformats.org/officeDocument/2006/relationships">
   <p:cSld>
     <p:spTree>
       <p:nvGrpSpPr>
@@ -11781,14 +10893,7 @@
         <p:cNvGrpSpPr/>
         <p:nvPr/>
       </p:nvGrpSpPr>
-      <p:grpSpPr>
-        <a:xfrm>
-          <a:off x="0" y="0"/>
-          <a:ext cx="0" cy="0"/>
-          <a:chOff x="0" y="0"/>
-          <a:chExt cx="0" cy="0"/>
-        </a:xfrm>
-      </p:grpSpPr>
+      <p:grpSpPr/>
       <p:sp>
         <p:nvSpPr>
           <p:cNvPr id="2" name="TextBox 1"/>
@@ -11797,7 +10902,7 @@
         </p:nvSpPr>
         <p:spPr>
           <a:xfrm>
-            <a:off x="548640" y="120650"/>
+            <a:off x="548640" y="365760"/>
             <a:ext cx="11064240" cy="914400"/>
           </a:xfrm>
           <a:prstGeom prst="rect">
@@ -11806,7 +10911,7 @@
           <a:noFill/>
         </p:spPr>
         <p:txBody>
-          <a:bodyPr wrap="square" lIns="0" tIns="0" rIns="0" bIns="0" anchor="t">
+          <a:bodyPr wrap="square" anchor="t" lIns="0" rIns="0" tIns="0" bIns="0">
             <a:spAutoFit/>
           </a:bodyPr>
           <a:lstStyle/>
@@ -11817,7 +10922,7 @@
               </a:lnSpc>
             </a:pPr>
             <a:r>
-              <a:rPr sz="3200" b="1" i="0" dirty="0">
+              <a:rPr sz="3200" b="1" i="0">
                 <a:solidFill>
                   <a:srgbClr val="000000"/>
                 </a:solidFill>
@@ -11836,16 +10941,16 @@
         </p:nvSpPr>
         <p:spPr>
           <a:xfrm>
-            <a:off x="7747000" y="1097280"/>
-            <a:ext cx="3865880" cy="1019253"/>
-          </a:xfrm>
-          <a:prstGeom prst="rect">
-            <a:avLst/>
-          </a:prstGeom>
-          <a:noFill/>
-        </p:spPr>
-        <p:txBody>
-          <a:bodyPr wrap="square" lIns="0" tIns="0" rIns="0" bIns="0" anchor="t">
+            <a:off x="548640" y="1097280"/>
+            <a:ext cx="11064240" cy="548640"/>
+          </a:xfrm>
+          <a:prstGeom prst="rect">
+            <a:avLst/>
+          </a:prstGeom>
+          <a:noFill/>
+        </p:spPr>
+        <p:txBody>
+          <a:bodyPr wrap="square" anchor="t" lIns="0" rIns="0" tIns="0" bIns="0">
             <a:spAutoFit/>
           </a:bodyPr>
           <a:lstStyle/>
@@ -11856,67 +10961,13 @@
               </a:lnSpc>
             </a:pPr>
             <a:r>
-              <a:rPr sz="1300" b="0" i="1" dirty="0">
+              <a:rPr sz="1300" b="0" i="1">
                 <a:solidFill>
                   <a:srgbClr val="707070"/>
                 </a:solidFill>
                 <a:latin typeface="Calibri"/>
               </a:rPr>
-              <a:t>Boxplots of headline VEP scores stratified by the 4-class label. DITTO, </a:t>
-            </a:r>
-            <a:r>
-              <a:rPr sz="1300" b="0" i="1" dirty="0" err="1">
-                <a:solidFill>
-                  <a:srgbClr val="707070"/>
-                </a:solidFill>
-                <a:latin typeface="Calibri"/>
-              </a:rPr>
-              <a:t>MetaRNN</a:t>
-            </a:r>
-            <a:r>
-              <a:rPr sz="1300" b="0" i="1" dirty="0">
-                <a:solidFill>
-                  <a:srgbClr val="707070"/>
-                </a:solidFill>
-                <a:latin typeface="Calibri"/>
-              </a:rPr>
-              <a:t>, REVEL, </a:t>
-            </a:r>
-            <a:r>
-              <a:rPr sz="1300" b="0" i="1" dirty="0" err="1">
-                <a:solidFill>
-                  <a:srgbClr val="707070"/>
-                </a:solidFill>
-                <a:latin typeface="Calibri"/>
-              </a:rPr>
-              <a:t>AlphaMissense</a:t>
-            </a:r>
-            <a:r>
-              <a:rPr sz="1300" b="0" i="1" dirty="0">
-                <a:solidFill>
-                  <a:srgbClr val="707070"/>
-                </a:solidFill>
-                <a:latin typeface="Calibri"/>
-              </a:rPr>
-              <a:t> all separate cleanly; </a:t>
-            </a:r>
-            <a:r>
-              <a:rPr sz="1300" b="0" i="1" dirty="0" err="1">
-                <a:solidFill>
-                  <a:srgbClr val="707070"/>
-                </a:solidFill>
-                <a:latin typeface="Calibri"/>
-              </a:rPr>
-              <a:t>gnomAD</a:t>
-            </a:r>
-            <a:r>
-              <a:rPr sz="1300" b="0" i="1" dirty="0">
-                <a:solidFill>
-                  <a:srgbClr val="707070"/>
-                </a:solidFill>
-                <a:latin typeface="Calibri"/>
-              </a:rPr>
-              <a:t> AF runs the other way — high frequency means benign (the ACMG BS1 rule).</a:t>
+              <a:t>Boxplots of headline VEP scores stratified by the 4-class label. DITTO, MetaRNN, REVEL, AlphaMissense all separate cleanly; gnomAD AF runs the other way — high frequency means benign (the ACMG BS1 rule).</a:t>
             </a:r>
           </a:p>
         </p:txBody>
@@ -11937,8 +10988,8 @@
         </p:blipFill>
         <p:spPr>
           <a:xfrm>
-            <a:off x="133350" y="822960"/>
-            <a:ext cx="7505700" cy="6004560"/>
+            <a:off x="3451860" y="1920240"/>
+            <a:ext cx="5257800" cy="4206240"/>
           </a:xfrm>
           <a:prstGeom prst="rect">
             <a:avLst/>
@@ -11962,7 +11013,7 @@
           <a:noFill/>
         </p:spPr>
         <p:txBody>
-          <a:bodyPr wrap="square" lIns="0" tIns="0" rIns="0" bIns="0" anchor="t">
+          <a:bodyPr wrap="square" anchor="t" lIns="0" rIns="0" tIns="0" bIns="0">
             <a:spAutoFit/>
           </a:bodyPr>
           <a:lstStyle/>
@@ -11989,7 +11040,7 @@
 </file>
 
 <file path=ppt/slides/slide7.xml><?xml version="1.0" encoding="utf-8"?>
-<p:sld xmlns:a="http://schemas.openxmlformats.org/drawingml/2006/main" xmlns:r="http://schemas.openxmlformats.org/officeDocument/2006/relationships" xmlns:p="http://schemas.openxmlformats.org/presentationml/2006/main">
+<p:sld xmlns:a="http://schemas.openxmlformats.org/drawingml/2006/main" xmlns:p="http://schemas.openxmlformats.org/presentationml/2006/main" xmlns:r="http://schemas.openxmlformats.org/officeDocument/2006/relationships">
   <p:cSld>
     <p:spTree>
       <p:nvGrpSpPr>
@@ -11997,14 +11048,7 @@
         <p:cNvGrpSpPr/>
         <p:nvPr/>
       </p:nvGrpSpPr>
-      <p:grpSpPr>
-        <a:xfrm>
-          <a:off x="0" y="0"/>
-          <a:ext cx="0" cy="0"/>
-          <a:chOff x="0" y="0"/>
-          <a:chExt cx="0" cy="0"/>
-        </a:xfrm>
-      </p:grpSpPr>
+      <p:grpSpPr/>
       <p:sp>
         <p:nvSpPr>
           <p:cNvPr id="2" name="TextBox 1"/>
@@ -12022,7 +11066,7 @@
           <a:noFill/>
         </p:spPr>
         <p:txBody>
-          <a:bodyPr wrap="square" lIns="0" tIns="0" rIns="0" bIns="0" anchor="t">
+          <a:bodyPr wrap="square" anchor="t" lIns="0" rIns="0" tIns="0" bIns="0">
             <a:spAutoFit/>
           </a:bodyPr>
           <a:lstStyle/>
@@ -12061,7 +11105,7 @@
           <a:noFill/>
         </p:spPr>
         <p:txBody>
-          <a:bodyPr wrap="square" lIns="0" tIns="0" rIns="0" bIns="0" anchor="t">
+          <a:bodyPr wrap="square" anchor="t" lIns="0" rIns="0" tIns="0" bIns="0">
             <a:spAutoFit/>
           </a:bodyPr>
           <a:lstStyle/>
@@ -12078,7 +11122,7 @@
                 </a:solidFill>
                 <a:latin typeface="Calibri"/>
               </a:rPr>
-              <a:t>Model suite — 11 estimators</a:t>
+              <a:t>Model suite — 10 estimators</a:t>
             </a:r>
           </a:p>
         </p:txBody>
@@ -12100,7 +11144,7 @@
           <a:noFill/>
         </p:spPr>
         <p:txBody>
-          <a:bodyPr wrap="square" lIns="0" tIns="0" rIns="0" bIns="0" anchor="t">
+          <a:bodyPr wrap="square" anchor="t" lIns="0" rIns="0" tIns="0" bIns="0">
             <a:spAutoFit/>
           </a:bodyPr>
           <a:lstStyle/>
@@ -12348,25 +11392,6 @@
                 </a:solidFill>
                 <a:latin typeface="Calibri"/>
               </a:rPr>
-              <a:t>AdaBoost</a:t>
-            </a:r>
-          </a:p>
-          <a:p>
-            <a:pPr algn="l">
-              <a:lnSpc>
-                <a:spcPct val="115000"/>
-              </a:lnSpc>
-              <a:spcAft>
-                <a:spcPts val="200"/>
-              </a:spcAft>
-            </a:pPr>
-            <a:r>
-              <a:rPr sz="1500" b="0" i="0">
-                <a:solidFill>
-                  <a:srgbClr val="404040"/>
-                </a:solidFill>
-                <a:latin typeface="Calibri"/>
-              </a:rPr>
               <a:t>HistGradientBoosting</a:t>
             </a:r>
           </a:p>
@@ -12389,7 +11414,7 @@
           <a:noFill/>
         </p:spPr>
         <p:txBody>
-          <a:bodyPr wrap="square" lIns="0" tIns="0" rIns="0" bIns="0" anchor="t">
+          <a:bodyPr wrap="square" anchor="t" lIns="0" rIns="0" tIns="0" bIns="0">
             <a:spAutoFit/>
           </a:bodyPr>
           <a:lstStyle/>
@@ -12428,7 +11453,7 @@
           <a:noFill/>
         </p:spPr>
         <p:txBody>
-          <a:bodyPr wrap="square" lIns="0" tIns="0" rIns="0" bIns="0" anchor="t">
+          <a:bodyPr wrap="square" anchor="t" lIns="0" rIns="0" tIns="0" bIns="0">
             <a:spAutoFit/>
           </a:bodyPr>
           <a:lstStyle/>
@@ -12463,7 +11488,7 @@
           <a:noFill/>
         </p:spPr>
         <p:txBody>
-          <a:bodyPr wrap="square" lIns="0" tIns="0" rIns="0" bIns="0" anchor="t">
+          <a:bodyPr wrap="square" anchor="t" lIns="0" rIns="0" tIns="0" bIns="0">
             <a:spAutoFit/>
           </a:bodyPr>
           <a:lstStyle/>
@@ -12502,7 +11527,7 @@
           <a:noFill/>
         </p:spPr>
         <p:txBody>
-          <a:bodyPr wrap="square" lIns="0" tIns="0" rIns="0" bIns="0" anchor="t">
+          <a:bodyPr wrap="square" anchor="t" lIns="0" rIns="0" tIns="0" bIns="0">
             <a:spAutoFit/>
           </a:bodyPr>
           <a:lstStyle/>
@@ -12537,7 +11562,7 @@
           <a:noFill/>
         </p:spPr>
         <p:txBody>
-          <a:bodyPr wrap="square" lIns="0" tIns="0" rIns="0" bIns="0" anchor="t">
+          <a:bodyPr wrap="square" anchor="t" lIns="0" rIns="0" tIns="0" bIns="0">
             <a:spAutoFit/>
           </a:bodyPr>
           <a:lstStyle/>
@@ -12576,7 +11601,7 @@
           <a:noFill/>
         </p:spPr>
         <p:txBody>
-          <a:bodyPr wrap="square" lIns="0" tIns="0" rIns="0" bIns="0" anchor="t">
+          <a:bodyPr wrap="square" anchor="t" lIns="0" rIns="0" tIns="0" bIns="0">
             <a:spAutoFit/>
           </a:bodyPr>
           <a:lstStyle/>
@@ -12611,7 +11636,7 @@
           <a:noFill/>
         </p:spPr>
         <p:txBody>
-          <a:bodyPr wrap="square" lIns="0" tIns="0" rIns="0" bIns="0" anchor="t">
+          <a:bodyPr wrap="square" anchor="t" lIns="0" rIns="0" tIns="0" bIns="0">
             <a:spAutoFit/>
           </a:bodyPr>
           <a:lstStyle/>
@@ -12650,7 +11675,7 @@
           <a:noFill/>
         </p:spPr>
         <p:txBody>
-          <a:bodyPr wrap="square" lIns="0" tIns="0" rIns="0" bIns="0" anchor="t">
+          <a:bodyPr wrap="square" anchor="t" lIns="0" rIns="0" tIns="0" bIns="0">
             <a:spAutoFit/>
           </a:bodyPr>
           <a:lstStyle/>
@@ -12685,7 +11710,7 @@
           <a:noFill/>
         </p:spPr>
         <p:txBody>
-          <a:bodyPr wrap="square" lIns="0" tIns="0" rIns="0" bIns="0" anchor="t">
+          <a:bodyPr wrap="square" anchor="t" lIns="0" rIns="0" tIns="0" bIns="0">
             <a:spAutoFit/>
           </a:bodyPr>
           <a:lstStyle/>
@@ -12724,7 +11749,7 @@
           <a:noFill/>
         </p:spPr>
         <p:txBody>
-          <a:bodyPr wrap="square" lIns="0" tIns="0" rIns="0" bIns="0" anchor="t">
+          <a:bodyPr wrap="square" anchor="t" lIns="0" rIns="0" tIns="0" bIns="0">
             <a:spAutoFit/>
           </a:bodyPr>
           <a:lstStyle/>
@@ -12759,7 +11784,7 @@
           <a:noFill/>
         </p:spPr>
         <p:txBody>
-          <a:bodyPr wrap="square" lIns="0" tIns="0" rIns="0" bIns="0" anchor="t">
+          <a:bodyPr wrap="square" anchor="t" lIns="0" rIns="0" tIns="0" bIns="0">
             <a:spAutoFit/>
           </a:bodyPr>
           <a:lstStyle/>
@@ -12798,7 +11823,7 @@
           <a:noFill/>
         </p:spPr>
         <p:txBody>
-          <a:bodyPr wrap="square" lIns="0" tIns="0" rIns="0" bIns="0" anchor="t">
+          <a:bodyPr wrap="square" anchor="t" lIns="0" rIns="0" tIns="0" bIns="0">
             <a:spAutoFit/>
           </a:bodyPr>
           <a:lstStyle/>
@@ -12815,7 +11840,7 @@
                 </a:solidFill>
                 <a:latin typeface="Calibri"/>
               </a:rPr>
-              <a:t>RANDOM_STATE = 42 throughout. Per-model grid-search tuning by 5-fold CV macro-F1; AdaBoost grid stopped at combo 23/27 (compute budget).</a:t>
+              <a:t>RANDOM_STATE = 42 throughout. Per-model grid-search tuning by 5-fold CV macro-F1 on the training portion; tuning performed on the 4-class task, hyperparameters carried over to the binary task.</a:t>
             </a:r>
           </a:p>
         </p:txBody>
@@ -12837,7 +11862,7 @@
           <a:noFill/>
         </p:spPr>
         <p:txBody>
-          <a:bodyPr wrap="square" lIns="0" tIns="0" rIns="0" bIns="0" anchor="t">
+          <a:bodyPr wrap="square" anchor="t" lIns="0" rIns="0" tIns="0" bIns="0">
             <a:spAutoFit/>
           </a:bodyPr>
           <a:lstStyle/>
@@ -12864,7 +11889,7 @@
 </file>
 
 <file path=ppt/slides/slide8.xml><?xml version="1.0" encoding="utf-8"?>
-<p:sld xmlns:a="http://schemas.openxmlformats.org/drawingml/2006/main" xmlns:r="http://schemas.openxmlformats.org/officeDocument/2006/relationships" xmlns:p="http://schemas.openxmlformats.org/presentationml/2006/main">
+<p:sld xmlns:a="http://schemas.openxmlformats.org/drawingml/2006/main" xmlns:p="http://schemas.openxmlformats.org/presentationml/2006/main" xmlns:r="http://schemas.openxmlformats.org/officeDocument/2006/relationships">
   <p:cSld>
     <p:spTree>
       <p:nvGrpSpPr>
@@ -12872,14 +11897,7 @@
         <p:cNvGrpSpPr/>
         <p:nvPr/>
       </p:nvGrpSpPr>
-      <p:grpSpPr>
-        <a:xfrm>
-          <a:off x="0" y="0"/>
-          <a:ext cx="0" cy="0"/>
-          <a:chOff x="0" y="0"/>
-          <a:chExt cx="0" cy="0"/>
-        </a:xfrm>
-      </p:grpSpPr>
+      <p:grpSpPr/>
       <p:sp>
         <p:nvSpPr>
           <p:cNvPr id="2" name="TextBox 1"/>
@@ -12897,7 +11915,7 @@
           <a:noFill/>
         </p:spPr>
         <p:txBody>
-          <a:bodyPr wrap="square" lIns="0" tIns="0" rIns="0" bIns="0" anchor="t">
+          <a:bodyPr wrap="square" anchor="t" lIns="0" rIns="0" tIns="0" bIns="0">
             <a:spAutoFit/>
           </a:bodyPr>
           <a:lstStyle/>
@@ -12936,7 +11954,7 @@
           <a:noFill/>
         </p:spPr>
         <p:txBody>
-          <a:bodyPr wrap="square" lIns="0" tIns="0" rIns="0" bIns="0" anchor="t">
+          <a:bodyPr wrap="square" anchor="t" lIns="0" rIns="0" tIns="0" bIns="0">
             <a:spAutoFit/>
           </a:bodyPr>
           <a:lstStyle/>
@@ -12971,7 +11989,7 @@
           <a:noFill/>
         </p:spPr>
         <p:txBody>
-          <a:bodyPr wrap="square" lIns="0" tIns="0" rIns="0" bIns="0" anchor="t">
+          <a:bodyPr wrap="square" anchor="t" lIns="0" rIns="0" tIns="0" bIns="0">
             <a:spAutoFit/>
           </a:bodyPr>
           <a:lstStyle/>
@@ -13006,7 +12024,7 @@
           <a:noFill/>
         </p:spPr>
         <p:txBody>
-          <a:bodyPr wrap="square" lIns="0" tIns="0" rIns="0" bIns="0" anchor="t">
+          <a:bodyPr wrap="square" anchor="t" lIns="0" rIns="0" tIns="0" bIns="0">
             <a:spAutoFit/>
           </a:bodyPr>
           <a:lstStyle/>
@@ -13041,7 +12059,7 @@
           <a:noFill/>
         </p:spPr>
         <p:txBody>
-          <a:bodyPr wrap="square" lIns="0" tIns="0" rIns="0" bIns="0" anchor="t">
+          <a:bodyPr wrap="square" anchor="t" lIns="0" rIns="0" tIns="0" bIns="0">
             <a:spAutoFit/>
           </a:bodyPr>
           <a:lstStyle/>
@@ -13076,7 +12094,7 @@
           <a:noFill/>
         </p:spPr>
         <p:txBody>
-          <a:bodyPr wrap="square" lIns="0" tIns="0" rIns="0" bIns="0" anchor="t">
+          <a:bodyPr wrap="square" anchor="t" lIns="0" rIns="0" tIns="0" bIns="0">
             <a:spAutoFit/>
           </a:bodyPr>
           <a:lstStyle/>
@@ -13111,7 +12129,7 @@
           <a:noFill/>
         </p:spPr>
         <p:txBody>
-          <a:bodyPr wrap="square" lIns="0" tIns="0" rIns="0" bIns="0" anchor="t">
+          <a:bodyPr wrap="square" anchor="t" lIns="0" rIns="0" tIns="0" bIns="0">
             <a:spAutoFit/>
           </a:bodyPr>
           <a:lstStyle/>
@@ -13143,7 +12161,7 @@
         </p:xfrm>
         <a:graphic>
           <a:graphicData uri="http://schemas.openxmlformats.org/drawingml/2006/chart">
-            <c:chart xmlns:c="http://schemas.openxmlformats.org/drawingml/2006/chart" xmlns:r="http://schemas.openxmlformats.org/officeDocument/2006/relationships" r:id="rId2"/>
+            <c:chart xmlns:c="http://schemas.openxmlformats.org/drawingml/2006/chart" r:id="rId2"/>
           </a:graphicData>
         </a:graphic>
       </p:graphicFrame>
@@ -13164,7 +12182,7 @@
           <a:noFill/>
         </p:spPr>
         <p:txBody>
-          <a:bodyPr wrap="square" lIns="0" tIns="0" rIns="0" bIns="0" anchor="t">
+          <a:bodyPr wrap="square" anchor="t" lIns="0" rIns="0" tIns="0" bIns="0">
             <a:spAutoFit/>
           </a:bodyPr>
           <a:lstStyle/>
@@ -13191,7 +12209,7 @@
 </file>
 
 <file path=ppt/slides/slide9.xml><?xml version="1.0" encoding="utf-8"?>
-<p:sld xmlns:a="http://schemas.openxmlformats.org/drawingml/2006/main" xmlns:r="http://schemas.openxmlformats.org/officeDocument/2006/relationships" xmlns:p="http://schemas.openxmlformats.org/presentationml/2006/main">
+<p:sld xmlns:a="http://schemas.openxmlformats.org/drawingml/2006/main" xmlns:p="http://schemas.openxmlformats.org/presentationml/2006/main" xmlns:r="http://schemas.openxmlformats.org/officeDocument/2006/relationships">
   <p:cSld>
     <p:spTree>
       <p:nvGrpSpPr>
@@ -13199,14 +12217,7 @@
         <p:cNvGrpSpPr/>
         <p:nvPr/>
       </p:nvGrpSpPr>
-      <p:grpSpPr>
-        <a:xfrm>
-          <a:off x="0" y="0"/>
-          <a:ext cx="0" cy="0"/>
-          <a:chOff x="0" y="0"/>
-          <a:chExt cx="0" cy="0"/>
-        </a:xfrm>
-      </p:grpSpPr>
+      <p:grpSpPr/>
       <p:sp>
         <p:nvSpPr>
           <p:cNvPr id="2" name="TextBox 1"/>
@@ -13224,7 +12235,7 @@
           <a:noFill/>
         </p:spPr>
         <p:txBody>
-          <a:bodyPr wrap="square" lIns="0" tIns="0" rIns="0" bIns="0" anchor="t">
+          <a:bodyPr wrap="square" anchor="t" lIns="0" rIns="0" tIns="0" bIns="0">
             <a:spAutoFit/>
           </a:bodyPr>
           <a:lstStyle/>
@@ -13263,7 +12274,7 @@
           <a:noFill/>
         </p:spPr>
         <p:txBody>
-          <a:bodyPr wrap="square" lIns="0" tIns="0" rIns="0" bIns="0" anchor="t">
+          <a:bodyPr wrap="square" anchor="t" lIns="0" rIns="0" tIns="0" bIns="0">
             <a:spAutoFit/>
           </a:bodyPr>
           <a:lstStyle/>
@@ -13326,7 +12337,7 @@
           <a:noFill/>
         </p:spPr>
         <p:txBody>
-          <a:bodyPr wrap="square" lIns="0" tIns="0" rIns="0" bIns="0" anchor="t">
+          <a:bodyPr wrap="square" anchor="t" lIns="0" rIns="0" tIns="0" bIns="0">
             <a:spAutoFit/>
           </a:bodyPr>
           <a:lstStyle/>
